--- a/presentation/AI-Incident-Copilot-Airport-Middleware.pptx
+++ b/presentation/AI-Incident-Copilot-Airport-Middleware.pptx
@@ -11,7 +11,7 @@
     <p:sldId id="259" r:id="rId10"/>
     <p:sldId id="260" r:id="rId11"/>
   </p:sldIdLst>
-  <p:sldSz cx="12191999" cy="6858000" type="screen4x3"/>
+  <p:sldSz cx="12191695" cy="6858000" type="screen4x3"/>
   <p:notesSz cx="6858000" cy="9144000"/>
   <p:defaultTextStyle>
     <a:defPPr>
@@ -3092,30 +3092,789 @@
         <p:nvPr/>
       </p:nvGrpSpPr>
       <p:grpSpPr/>
-      <p:pic>
-        <p:nvPicPr>
-          <p:cNvPr id="2" name="Picture 1" descr="slide-01.png"/>
-          <p:cNvPicPr>
-            <a:picLocks noChangeAspect="1"/>
-          </p:cNvPicPr>
-          <p:nvPr/>
-        </p:nvPicPr>
-        <p:blipFill>
-          <a:blip r:embed="rId2"/>
-          <a:stretch>
-            <a:fillRect/>
-          </a:stretch>
-        </p:blipFill>
+      <p:sp>
+        <p:nvSpPr>
+          <p:cNvPr id="2" name="Rectangle 1"/>
+          <p:cNvSpPr/>
+          <p:nvPr/>
+        </p:nvSpPr>
         <p:spPr>
           <a:xfrm>
             <a:off x="0" y="0"/>
-            <a:ext cx="12191999" cy="6858000"/>
-          </a:xfrm>
-          <a:prstGeom prst="rect">
-            <a:avLst/>
-          </a:prstGeom>
-        </p:spPr>
-      </p:pic>
+            <a:ext cx="12191695" cy="384048"/>
+          </a:xfrm>
+          <a:prstGeom prst="rect">
+            <a:avLst/>
+          </a:prstGeom>
+          <a:solidFill>
+            <a:srgbClr val="1F4E79"/>
+          </a:solidFill>
+          <a:ln>
+            <a:noFill/>
+          </a:ln>
+          <a:effectLst/>
+        </p:spPr>
+        <p:style>
+          <a:lnRef idx="1">
+            <a:schemeClr val="accent1"/>
+          </a:lnRef>
+          <a:fillRef idx="3">
+            <a:schemeClr val="accent1"/>
+          </a:fillRef>
+          <a:effectRef idx="2">
+            <a:schemeClr val="accent1"/>
+          </a:effectRef>
+          <a:fontRef idx="minor">
+            <a:schemeClr val="lt1"/>
+          </a:fontRef>
+        </p:style>
+        <p:txBody>
+          <a:bodyPr rtlCol="0" anchor="ctr"/>
+          <a:lstStyle/>
+          <a:p>
+            <a:pPr algn="ctr"/>
+          </a:p>
+        </p:txBody>
+      </p:sp>
+      <p:sp>
+        <p:nvSpPr>
+          <p:cNvPr id="3" name="TextBox 2"/>
+          <p:cNvSpPr txBox="1"/>
+          <p:nvPr/>
+        </p:nvSpPr>
+        <p:spPr>
+          <a:xfrm>
+            <a:off x="320040" y="45720"/>
+            <a:ext cx="6766560" cy="292608"/>
+          </a:xfrm>
+          <a:prstGeom prst="rect">
+            <a:avLst/>
+          </a:prstGeom>
+          <a:noFill/>
+        </p:spPr>
+        <p:txBody>
+          <a:bodyPr wrap="square" anchor="ctr"/>
+          <a:lstStyle/>
+          <a:p>
+            <a:pPr algn="l">
+              <a:spcBef>
+                <a:spcPts val="0"/>
+              </a:spcBef>
+              <a:spcAft>
+                <a:spcPts val="0"/>
+              </a:spcAft>
+            </a:pPr>
+            <a:r>
+              <a:rPr sz="1200" b="0">
+                <a:solidFill>
+                  <a:srgbClr val="FFFFFF"/>
+                </a:solidFill>
+                <a:latin typeface="Calibri"/>
+              </a:rPr>
+              <a:t>Airport Technology  |  Internal Proposal</a:t>
+            </a:r>
+          </a:p>
+        </p:txBody>
+      </p:sp>
+      <p:sp>
+        <p:nvSpPr>
+          <p:cNvPr id="4" name="TextBox 3"/>
+          <p:cNvSpPr txBox="1"/>
+          <p:nvPr/>
+        </p:nvSpPr>
+        <p:spPr>
+          <a:xfrm>
+            <a:off x="8092440" y="45720"/>
+            <a:ext cx="3794760" cy="292608"/>
+          </a:xfrm>
+          <a:prstGeom prst="rect">
+            <a:avLst/>
+          </a:prstGeom>
+          <a:noFill/>
+        </p:spPr>
+        <p:txBody>
+          <a:bodyPr wrap="square" anchor="ctr"/>
+          <a:lstStyle/>
+          <a:p>
+            <a:pPr algn="r">
+              <a:spcBef>
+                <a:spcPts val="0"/>
+              </a:spcBef>
+              <a:spcAft>
+                <a:spcPts val="0"/>
+              </a:spcAft>
+            </a:pPr>
+            <a:r>
+              <a:rPr sz="1300" b="1">
+                <a:solidFill>
+                  <a:srgbClr val="FFFFFF"/>
+                </a:solidFill>
+                <a:latin typeface="Calibri"/>
+              </a:rPr>
+              <a:t>SOURCE INTEGRATE</a:t>
+            </a:r>
+          </a:p>
+        </p:txBody>
+      </p:sp>
+      <p:sp>
+        <p:nvSpPr>
+          <p:cNvPr id="5" name="Rectangle 4"/>
+          <p:cNvSpPr/>
+          <p:nvPr/>
+        </p:nvSpPr>
+        <p:spPr>
+          <a:xfrm>
+            <a:off x="0" y="6601968"/>
+            <a:ext cx="12191695" cy="256032"/>
+          </a:xfrm>
+          <a:prstGeom prst="rect">
+            <a:avLst/>
+          </a:prstGeom>
+          <a:solidFill>
+            <a:srgbClr val="F2F2F2"/>
+          </a:solidFill>
+          <a:ln>
+            <a:noFill/>
+          </a:ln>
+          <a:effectLst/>
+        </p:spPr>
+        <p:style>
+          <a:lnRef idx="1">
+            <a:schemeClr val="accent1"/>
+          </a:lnRef>
+          <a:fillRef idx="3">
+            <a:schemeClr val="accent1"/>
+          </a:fillRef>
+          <a:effectRef idx="2">
+            <a:schemeClr val="accent1"/>
+          </a:effectRef>
+          <a:fontRef idx="minor">
+            <a:schemeClr val="lt1"/>
+          </a:fontRef>
+        </p:style>
+        <p:txBody>
+          <a:bodyPr rtlCol="0" anchor="ctr"/>
+          <a:lstStyle/>
+          <a:p>
+            <a:pPr algn="ctr"/>
+          </a:p>
+        </p:txBody>
+      </p:sp>
+      <p:sp>
+        <p:nvSpPr>
+          <p:cNvPr id="6" name="TextBox 5"/>
+          <p:cNvSpPr txBox="1"/>
+          <p:nvPr/>
+        </p:nvSpPr>
+        <p:spPr>
+          <a:xfrm>
+            <a:off x="365760" y="6601968"/>
+            <a:ext cx="7772400" cy="256032"/>
+          </a:xfrm>
+          <a:prstGeom prst="rect">
+            <a:avLst/>
+          </a:prstGeom>
+          <a:noFill/>
+        </p:spPr>
+        <p:txBody>
+          <a:bodyPr wrap="square" anchor="ctr"/>
+          <a:lstStyle/>
+          <a:p>
+            <a:pPr algn="l">
+              <a:spcBef>
+                <a:spcPts val="0"/>
+              </a:spcBef>
+              <a:spcAft>
+                <a:spcPts val="0"/>
+              </a:spcAft>
+            </a:pPr>
+            <a:r>
+              <a:rPr sz="1000" b="0">
+                <a:solidFill>
+                  <a:srgbClr val="595959"/>
+                </a:solidFill>
+                <a:latin typeface="Calibri"/>
+              </a:rPr>
+              <a:t>Confidential  |  Human-in-the-loop concept  |  Not an implemented system</a:t>
+            </a:r>
+          </a:p>
+        </p:txBody>
+      </p:sp>
+      <p:sp>
+        <p:nvSpPr>
+          <p:cNvPr id="7" name="TextBox 6"/>
+          <p:cNvSpPr txBox="1"/>
+          <p:nvPr/>
+        </p:nvSpPr>
+        <p:spPr>
+          <a:xfrm>
+            <a:off x="9509760" y="6601968"/>
+            <a:ext cx="2286000" cy="256032"/>
+          </a:xfrm>
+          <a:prstGeom prst="rect">
+            <a:avLst/>
+          </a:prstGeom>
+          <a:noFill/>
+        </p:spPr>
+        <p:txBody>
+          <a:bodyPr wrap="square" anchor="ctr"/>
+          <a:lstStyle/>
+          <a:p>
+            <a:pPr algn="r">
+              <a:spcBef>
+                <a:spcPts val="0"/>
+              </a:spcBef>
+              <a:spcAft>
+                <a:spcPts val="0"/>
+              </a:spcAft>
+            </a:pPr>
+            <a:r>
+              <a:rPr sz="1000" b="0">
+                <a:solidFill>
+                  <a:srgbClr val="595959"/>
+                </a:solidFill>
+                <a:latin typeface="Calibri"/>
+              </a:rPr>
+              <a:t>Slide 1 of 5</a:t>
+            </a:r>
+          </a:p>
+        </p:txBody>
+      </p:sp>
+      <p:sp>
+        <p:nvSpPr>
+          <p:cNvPr id="8" name="TextBox 7"/>
+          <p:cNvSpPr txBox="1"/>
+          <p:nvPr/>
+        </p:nvSpPr>
+        <p:spPr>
+          <a:xfrm>
+            <a:off x="640080" y="1417320"/>
+            <a:ext cx="10881360" cy="292608"/>
+          </a:xfrm>
+          <a:prstGeom prst="rect">
+            <a:avLst/>
+          </a:prstGeom>
+          <a:noFill/>
+        </p:spPr>
+        <p:txBody>
+          <a:bodyPr wrap="square" anchor="ctr"/>
+          <a:lstStyle/>
+          <a:p>
+            <a:pPr algn="ctr">
+              <a:spcBef>
+                <a:spcPts val="0"/>
+              </a:spcBef>
+              <a:spcAft>
+                <a:spcPts val="0"/>
+              </a:spcAft>
+            </a:pPr>
+            <a:r>
+              <a:rPr sz="1400" b="0">
+                <a:solidFill>
+                  <a:srgbClr val="2E75B6"/>
+                </a:solidFill>
+                <a:latin typeface="Calibri"/>
+              </a:rPr>
+              <a:t>Proposed concept for middleware operations</a:t>
+            </a:r>
+          </a:p>
+        </p:txBody>
+      </p:sp>
+      <p:sp>
+        <p:nvSpPr>
+          <p:cNvPr id="9" name="TextBox 8"/>
+          <p:cNvSpPr txBox="1"/>
+          <p:nvPr/>
+        </p:nvSpPr>
+        <p:spPr>
+          <a:xfrm>
+            <a:off x="640080" y="1783080"/>
+            <a:ext cx="10881360" cy="1051560"/>
+          </a:xfrm>
+          <a:prstGeom prst="rect">
+            <a:avLst/>
+          </a:prstGeom>
+          <a:noFill/>
+        </p:spPr>
+        <p:txBody>
+          <a:bodyPr wrap="square" anchor="ctr"/>
+          <a:lstStyle/>
+          <a:p>
+            <a:pPr algn="ctr">
+              <a:spcBef>
+                <a:spcPts val="0"/>
+              </a:spcBef>
+              <a:spcAft>
+                <a:spcPts val="0"/>
+              </a:spcAft>
+            </a:pPr>
+            <a:r>
+              <a:rPr sz="3600" b="1">
+                <a:solidFill>
+                  <a:srgbClr val="1F4E79"/>
+                </a:solidFill>
+                <a:latin typeface="Calibri"/>
+              </a:rPr>
+              <a:t>AI Incident Copilot for Airport Middleware</a:t>
+            </a:r>
+          </a:p>
+        </p:txBody>
+      </p:sp>
+      <p:sp>
+        <p:nvSpPr>
+          <p:cNvPr id="10" name="TextBox 9"/>
+          <p:cNvSpPr txBox="1"/>
+          <p:nvPr/>
+        </p:nvSpPr>
+        <p:spPr>
+          <a:xfrm>
+            <a:off x="1280160" y="2880360"/>
+            <a:ext cx="9601200" cy="365760"/>
+          </a:xfrm>
+          <a:prstGeom prst="rect">
+            <a:avLst/>
+          </a:prstGeom>
+          <a:noFill/>
+        </p:spPr>
+        <p:txBody>
+          <a:bodyPr wrap="square" anchor="ctr"/>
+          <a:lstStyle/>
+          <a:p>
+            <a:pPr algn="ctr">
+              <a:spcBef>
+                <a:spcPts val="0"/>
+              </a:spcBef>
+              <a:spcAft>
+                <a:spcPts val="0"/>
+              </a:spcAft>
+            </a:pPr>
+            <a:r>
+              <a:rPr sz="1800" b="0">
+                <a:solidFill>
+                  <a:srgbClr val="595959"/>
+                </a:solidFill>
+                <a:latin typeface="Calibri"/>
+              </a:rPr>
+              <a:t>From incident detection to intelligent investigation and recommendation</a:t>
+            </a:r>
+          </a:p>
+        </p:txBody>
+      </p:sp>
+      <p:sp>
+        <p:nvSpPr>
+          <p:cNvPr id="11" name="Rectangle 10"/>
+          <p:cNvSpPr/>
+          <p:nvPr/>
+        </p:nvSpPr>
+        <p:spPr>
+          <a:xfrm>
+            <a:off x="4937760" y="3291840"/>
+            <a:ext cx="2286000" cy="36576"/>
+          </a:xfrm>
+          <a:prstGeom prst="rect">
+            <a:avLst/>
+          </a:prstGeom>
+          <a:solidFill>
+            <a:srgbClr val="2E75B6"/>
+          </a:solidFill>
+          <a:ln>
+            <a:noFill/>
+          </a:ln>
+          <a:effectLst/>
+        </p:spPr>
+        <p:style>
+          <a:lnRef idx="1">
+            <a:schemeClr val="accent1"/>
+          </a:lnRef>
+          <a:fillRef idx="3">
+            <a:schemeClr val="accent1"/>
+          </a:fillRef>
+          <a:effectRef idx="2">
+            <a:schemeClr val="accent1"/>
+          </a:effectRef>
+          <a:fontRef idx="minor">
+            <a:schemeClr val="lt1"/>
+          </a:fontRef>
+        </p:style>
+        <p:txBody>
+          <a:bodyPr rtlCol="0" anchor="ctr"/>
+          <a:lstStyle/>
+          <a:p>
+            <a:pPr algn="ctr"/>
+          </a:p>
+        </p:txBody>
+      </p:sp>
+      <p:sp>
+        <p:nvSpPr>
+          <p:cNvPr id="12" name="Rectangle 11"/>
+          <p:cNvSpPr/>
+          <p:nvPr/>
+        </p:nvSpPr>
+        <p:spPr>
+          <a:xfrm>
+            <a:off x="1417320" y="3794760"/>
+            <a:ext cx="2651760" cy="1234440"/>
+          </a:xfrm>
+          <a:prstGeom prst="rect">
+            <a:avLst/>
+          </a:prstGeom>
+          <a:solidFill>
+            <a:srgbClr val="FDE9D9"/>
+          </a:solidFill>
+          <a:ln w="12700">
+            <a:solidFill>
+              <a:srgbClr val="BFBFBF"/>
+            </a:solidFill>
+          </a:ln>
+          <a:effectLst/>
+        </p:spPr>
+        <p:style>
+          <a:lnRef idx="1">
+            <a:schemeClr val="accent1"/>
+          </a:lnRef>
+          <a:fillRef idx="3">
+            <a:schemeClr val="accent1"/>
+          </a:fillRef>
+          <a:effectRef idx="2">
+            <a:schemeClr val="accent1"/>
+          </a:effectRef>
+          <a:fontRef idx="minor">
+            <a:schemeClr val="lt1"/>
+          </a:fontRef>
+        </p:style>
+        <p:txBody>
+          <a:bodyPr rtlCol="0" anchor="ctr" wrap="square" lIns="73152" rIns="73152" tIns="36576" bIns="36576"/>
+          <a:lstStyle/>
+          <a:p>
+            <a:pPr algn="ctr">
+              <a:spcBef>
+                <a:spcPts val="0"/>
+              </a:spcBef>
+              <a:spcAft>
+                <a:spcPts val="200"/>
+              </a:spcAft>
+            </a:pPr>
+            <a:r>
+              <a:rPr sz="1800" b="1">
+                <a:solidFill>
+                  <a:srgbClr val="C65911"/>
+                </a:solidFill>
+                <a:latin typeface="Calibri"/>
+              </a:rPr>
+              <a:t>Alert</a:t>
+            </a:r>
+          </a:p>
+          <a:p>
+            <a:pPr algn="ctr">
+              <a:spcBef>
+                <a:spcPts val="0"/>
+              </a:spcBef>
+              <a:spcAft>
+                <a:spcPts val="0"/>
+              </a:spcAft>
+            </a:pPr>
+            <a:r>
+              <a:rPr sz="1100" b="0">
+                <a:solidFill>
+                  <a:srgbClr val="595959"/>
+                </a:solidFill>
+                <a:latin typeface="Calibri"/>
+              </a:rPr>
+              <a:t>Incident detected</a:t>
+            </a:r>
+          </a:p>
+        </p:txBody>
+      </p:sp>
+      <p:sp>
+        <p:nvSpPr>
+          <p:cNvPr id="13" name="Rectangle 12"/>
+          <p:cNvSpPr/>
+          <p:nvPr/>
+        </p:nvSpPr>
+        <p:spPr>
+          <a:xfrm>
+            <a:off x="4754880" y="3794760"/>
+            <a:ext cx="2651760" cy="1234440"/>
+          </a:xfrm>
+          <a:prstGeom prst="rect">
+            <a:avLst/>
+          </a:prstGeom>
+          <a:solidFill>
+            <a:srgbClr val="DEEBF7"/>
+          </a:solidFill>
+          <a:ln w="12700">
+            <a:solidFill>
+              <a:srgbClr val="BFBFBF"/>
+            </a:solidFill>
+          </a:ln>
+          <a:effectLst/>
+        </p:spPr>
+        <p:style>
+          <a:lnRef idx="1">
+            <a:schemeClr val="accent1"/>
+          </a:lnRef>
+          <a:fillRef idx="3">
+            <a:schemeClr val="accent1"/>
+          </a:fillRef>
+          <a:effectRef idx="2">
+            <a:schemeClr val="accent1"/>
+          </a:effectRef>
+          <a:fontRef idx="minor">
+            <a:schemeClr val="lt1"/>
+          </a:fontRef>
+        </p:style>
+        <p:txBody>
+          <a:bodyPr rtlCol="0" anchor="ctr" wrap="square" lIns="73152" rIns="73152" tIns="36576" bIns="36576"/>
+          <a:lstStyle/>
+          <a:p>
+            <a:pPr algn="ctr">
+              <a:spcBef>
+                <a:spcPts val="0"/>
+              </a:spcBef>
+              <a:spcAft>
+                <a:spcPts val="200"/>
+              </a:spcAft>
+            </a:pPr>
+            <a:r>
+              <a:rPr sz="1800" b="1">
+                <a:solidFill>
+                  <a:srgbClr val="1F4E79"/>
+                </a:solidFill>
+                <a:latin typeface="Calibri"/>
+              </a:rPr>
+              <a:t>AI Analysis</a:t>
+            </a:r>
+          </a:p>
+          <a:p>
+            <a:pPr algn="ctr">
+              <a:spcBef>
+                <a:spcPts val="0"/>
+              </a:spcBef>
+              <a:spcAft>
+                <a:spcPts val="0"/>
+              </a:spcAft>
+            </a:pPr>
+            <a:r>
+              <a:rPr sz="1100" b="0">
+                <a:solidFill>
+                  <a:srgbClr val="595959"/>
+                </a:solidFill>
+                <a:latin typeface="Calibri"/>
+              </a:rPr>
+              <a:t>Correlate and recommend</a:t>
+            </a:r>
+          </a:p>
+        </p:txBody>
+      </p:sp>
+      <p:sp>
+        <p:nvSpPr>
+          <p:cNvPr id="14" name="Rectangle 13"/>
+          <p:cNvSpPr/>
+          <p:nvPr/>
+        </p:nvSpPr>
+        <p:spPr>
+          <a:xfrm>
+            <a:off x="8092440" y="3794760"/>
+            <a:ext cx="2651760" cy="1234440"/>
+          </a:xfrm>
+          <a:prstGeom prst="rect">
+            <a:avLst/>
+          </a:prstGeom>
+          <a:solidFill>
+            <a:srgbClr val="E2EFDA"/>
+          </a:solidFill>
+          <a:ln w="12700">
+            <a:solidFill>
+              <a:srgbClr val="BFBFBF"/>
+            </a:solidFill>
+          </a:ln>
+          <a:effectLst/>
+        </p:spPr>
+        <p:style>
+          <a:lnRef idx="1">
+            <a:schemeClr val="accent1"/>
+          </a:lnRef>
+          <a:fillRef idx="3">
+            <a:schemeClr val="accent1"/>
+          </a:fillRef>
+          <a:effectRef idx="2">
+            <a:schemeClr val="accent1"/>
+          </a:effectRef>
+          <a:fontRef idx="minor">
+            <a:schemeClr val="lt1"/>
+          </a:fontRef>
+        </p:style>
+        <p:txBody>
+          <a:bodyPr rtlCol="0" anchor="ctr" wrap="square" lIns="73152" rIns="73152" tIns="36576" bIns="36576"/>
+          <a:lstStyle/>
+          <a:p>
+            <a:pPr algn="ctr">
+              <a:spcBef>
+                <a:spcPts val="0"/>
+              </a:spcBef>
+              <a:spcAft>
+                <a:spcPts val="200"/>
+              </a:spcAft>
+            </a:pPr>
+            <a:r>
+              <a:rPr sz="1800" b="1">
+                <a:solidFill>
+                  <a:srgbClr val="375E37"/>
+                </a:solidFill>
+                <a:latin typeface="Calibri"/>
+              </a:rPr>
+              <a:t>Engineer</a:t>
+            </a:r>
+          </a:p>
+          <a:p>
+            <a:pPr algn="ctr">
+              <a:spcBef>
+                <a:spcPts val="0"/>
+              </a:spcBef>
+              <a:spcAft>
+                <a:spcPts val="0"/>
+              </a:spcAft>
+            </a:pPr>
+            <a:r>
+              <a:rPr sz="1100" b="0">
+                <a:solidFill>
+                  <a:srgbClr val="595959"/>
+                </a:solidFill>
+                <a:latin typeface="Calibri"/>
+              </a:rPr>
+              <a:t>Validate and act</a:t>
+            </a:r>
+          </a:p>
+        </p:txBody>
+      </p:sp>
+      <p:sp>
+        <p:nvSpPr>
+          <p:cNvPr id="15" name="Right Arrow 14"/>
+          <p:cNvSpPr/>
+          <p:nvPr/>
+        </p:nvSpPr>
+        <p:spPr>
+          <a:xfrm>
+            <a:off x="4160520" y="4297680"/>
+            <a:ext cx="457200" cy="256032"/>
+          </a:xfrm>
+          <a:prstGeom prst="rightArrow">
+            <a:avLst/>
+          </a:prstGeom>
+          <a:solidFill>
+            <a:srgbClr val="2E75B6"/>
+          </a:solidFill>
+          <a:ln>
+            <a:noFill/>
+          </a:ln>
+          <a:effectLst/>
+        </p:spPr>
+        <p:style>
+          <a:lnRef idx="1">
+            <a:schemeClr val="accent1"/>
+          </a:lnRef>
+          <a:fillRef idx="3">
+            <a:schemeClr val="accent1"/>
+          </a:fillRef>
+          <a:effectRef idx="2">
+            <a:schemeClr val="accent1"/>
+          </a:effectRef>
+          <a:fontRef idx="minor">
+            <a:schemeClr val="lt1"/>
+          </a:fontRef>
+        </p:style>
+        <p:txBody>
+          <a:bodyPr rtlCol="0" anchor="ctr"/>
+          <a:lstStyle/>
+          <a:p>
+            <a:pPr algn="ctr"/>
+          </a:p>
+        </p:txBody>
+      </p:sp>
+      <p:sp>
+        <p:nvSpPr>
+          <p:cNvPr id="16" name="Right Arrow 15"/>
+          <p:cNvSpPr/>
+          <p:nvPr/>
+        </p:nvSpPr>
+        <p:spPr>
+          <a:xfrm>
+            <a:off x="7498079" y="4297680"/>
+            <a:ext cx="457200" cy="256032"/>
+          </a:xfrm>
+          <a:prstGeom prst="rightArrow">
+            <a:avLst/>
+          </a:prstGeom>
+          <a:solidFill>
+            <a:srgbClr val="2E75B6"/>
+          </a:solidFill>
+          <a:ln>
+            <a:noFill/>
+          </a:ln>
+          <a:effectLst/>
+        </p:spPr>
+        <p:style>
+          <a:lnRef idx="1">
+            <a:schemeClr val="accent1"/>
+          </a:lnRef>
+          <a:fillRef idx="3">
+            <a:schemeClr val="accent1"/>
+          </a:fillRef>
+          <a:effectRef idx="2">
+            <a:schemeClr val="accent1"/>
+          </a:effectRef>
+          <a:fontRef idx="minor">
+            <a:schemeClr val="lt1"/>
+          </a:fontRef>
+        </p:style>
+        <p:txBody>
+          <a:bodyPr rtlCol="0" anchor="ctr"/>
+          <a:lstStyle/>
+          <a:p>
+            <a:pPr algn="ctr"/>
+          </a:p>
+        </p:txBody>
+      </p:sp>
+      <p:sp>
+        <p:nvSpPr>
+          <p:cNvPr id="17" name="TextBox 16"/>
+          <p:cNvSpPr txBox="1"/>
+          <p:nvPr/>
+        </p:nvSpPr>
+        <p:spPr>
+          <a:xfrm>
+            <a:off x="640080" y="5257800"/>
+            <a:ext cx="10881360" cy="365760"/>
+          </a:xfrm>
+          <a:prstGeom prst="rect">
+            <a:avLst/>
+          </a:prstGeom>
+          <a:noFill/>
+        </p:spPr>
+        <p:txBody>
+          <a:bodyPr wrap="square" anchor="ctr"/>
+          <a:lstStyle/>
+          <a:p>
+            <a:pPr algn="ctr">
+              <a:spcBef>
+                <a:spcPts val="0"/>
+              </a:spcBef>
+              <a:spcAft>
+                <a:spcPts val="0"/>
+              </a:spcAft>
+            </a:pPr>
+            <a:r>
+              <a:rPr sz="1400" b="0">
+                <a:solidFill>
+                  <a:srgbClr val="595959"/>
+                </a:solidFill>
+                <a:latin typeface="Calibri"/>
+              </a:rPr>
+              <a:t>AI recommends.  The engineer decides.  No autonomous production changes.</a:t>
+            </a:r>
+          </a:p>
+        </p:txBody>
+      </p:sp>
     </p:spTree>
   </p:cSld>
   <p:clrMapOvr>
@@ -3134,30 +3893,1242 @@
         <p:nvPr/>
       </p:nvGrpSpPr>
       <p:grpSpPr/>
-      <p:pic>
-        <p:nvPicPr>
-          <p:cNvPr id="2" name="Picture 1" descr="slide-02.png"/>
-          <p:cNvPicPr>
-            <a:picLocks noChangeAspect="1"/>
-          </p:cNvPicPr>
-          <p:nvPr/>
-        </p:nvPicPr>
-        <p:blipFill>
-          <a:blip r:embed="rId2"/>
-          <a:stretch>
-            <a:fillRect/>
-          </a:stretch>
-        </p:blipFill>
+      <p:sp>
+        <p:nvSpPr>
+          <p:cNvPr id="2" name="Rectangle 1"/>
+          <p:cNvSpPr/>
+          <p:nvPr/>
+        </p:nvSpPr>
         <p:spPr>
           <a:xfrm>
             <a:off x="0" y="0"/>
-            <a:ext cx="12191999" cy="6858000"/>
-          </a:xfrm>
-          <a:prstGeom prst="rect">
-            <a:avLst/>
-          </a:prstGeom>
-        </p:spPr>
-      </p:pic>
+            <a:ext cx="12191695" cy="384048"/>
+          </a:xfrm>
+          <a:prstGeom prst="rect">
+            <a:avLst/>
+          </a:prstGeom>
+          <a:solidFill>
+            <a:srgbClr val="1F4E79"/>
+          </a:solidFill>
+          <a:ln>
+            <a:noFill/>
+          </a:ln>
+          <a:effectLst/>
+        </p:spPr>
+        <p:style>
+          <a:lnRef idx="1">
+            <a:schemeClr val="accent1"/>
+          </a:lnRef>
+          <a:fillRef idx="3">
+            <a:schemeClr val="accent1"/>
+          </a:fillRef>
+          <a:effectRef idx="2">
+            <a:schemeClr val="accent1"/>
+          </a:effectRef>
+          <a:fontRef idx="minor">
+            <a:schemeClr val="lt1"/>
+          </a:fontRef>
+        </p:style>
+        <p:txBody>
+          <a:bodyPr rtlCol="0" anchor="ctr"/>
+          <a:lstStyle/>
+          <a:p>
+            <a:pPr algn="ctr"/>
+          </a:p>
+        </p:txBody>
+      </p:sp>
+      <p:sp>
+        <p:nvSpPr>
+          <p:cNvPr id="3" name="TextBox 2"/>
+          <p:cNvSpPr txBox="1"/>
+          <p:nvPr/>
+        </p:nvSpPr>
+        <p:spPr>
+          <a:xfrm>
+            <a:off x="320040" y="45720"/>
+            <a:ext cx="6766560" cy="292608"/>
+          </a:xfrm>
+          <a:prstGeom prst="rect">
+            <a:avLst/>
+          </a:prstGeom>
+          <a:noFill/>
+        </p:spPr>
+        <p:txBody>
+          <a:bodyPr wrap="square" anchor="ctr"/>
+          <a:lstStyle/>
+          <a:p>
+            <a:pPr algn="l">
+              <a:spcBef>
+                <a:spcPts val="0"/>
+              </a:spcBef>
+              <a:spcAft>
+                <a:spcPts val="0"/>
+              </a:spcAft>
+            </a:pPr>
+            <a:r>
+              <a:rPr sz="1200" b="0">
+                <a:solidFill>
+                  <a:srgbClr val="FFFFFF"/>
+                </a:solidFill>
+                <a:latin typeface="Calibri"/>
+              </a:rPr>
+              <a:t>Airport Technology  |  Internal Proposal</a:t>
+            </a:r>
+          </a:p>
+        </p:txBody>
+      </p:sp>
+      <p:sp>
+        <p:nvSpPr>
+          <p:cNvPr id="4" name="TextBox 3"/>
+          <p:cNvSpPr txBox="1"/>
+          <p:nvPr/>
+        </p:nvSpPr>
+        <p:spPr>
+          <a:xfrm>
+            <a:off x="8092440" y="45720"/>
+            <a:ext cx="3794760" cy="292608"/>
+          </a:xfrm>
+          <a:prstGeom prst="rect">
+            <a:avLst/>
+          </a:prstGeom>
+          <a:noFill/>
+        </p:spPr>
+        <p:txBody>
+          <a:bodyPr wrap="square" anchor="ctr"/>
+          <a:lstStyle/>
+          <a:p>
+            <a:pPr algn="r">
+              <a:spcBef>
+                <a:spcPts val="0"/>
+              </a:spcBef>
+              <a:spcAft>
+                <a:spcPts val="0"/>
+              </a:spcAft>
+            </a:pPr>
+            <a:r>
+              <a:rPr sz="1300" b="1">
+                <a:solidFill>
+                  <a:srgbClr val="FFFFFF"/>
+                </a:solidFill>
+                <a:latin typeface="Calibri"/>
+              </a:rPr>
+              <a:t>SOURCE INTEGRATE</a:t>
+            </a:r>
+          </a:p>
+        </p:txBody>
+      </p:sp>
+      <p:sp>
+        <p:nvSpPr>
+          <p:cNvPr id="5" name="TextBox 4"/>
+          <p:cNvSpPr txBox="1"/>
+          <p:nvPr/>
+        </p:nvSpPr>
+        <p:spPr>
+          <a:xfrm>
+            <a:off x="365760" y="502920"/>
+            <a:ext cx="11430000" cy="384048"/>
+          </a:xfrm>
+          <a:prstGeom prst="rect">
+            <a:avLst/>
+          </a:prstGeom>
+          <a:noFill/>
+        </p:spPr>
+        <p:txBody>
+          <a:bodyPr wrap="square" anchor="ctr"/>
+          <a:lstStyle/>
+          <a:p>
+            <a:pPr algn="l">
+              <a:spcBef>
+                <a:spcPts val="0"/>
+              </a:spcBef>
+              <a:spcAft>
+                <a:spcPts val="0"/>
+              </a:spcAft>
+            </a:pPr>
+            <a:r>
+              <a:rPr sz="2600" b="1">
+                <a:solidFill>
+                  <a:srgbClr val="1F4E79"/>
+                </a:solidFill>
+                <a:latin typeface="Calibri"/>
+              </a:rPr>
+              <a:t>The Current Incident Investigation Process</a:t>
+            </a:r>
+          </a:p>
+        </p:txBody>
+      </p:sp>
+      <p:sp>
+        <p:nvSpPr>
+          <p:cNvPr id="6" name="Rectangle 5"/>
+          <p:cNvSpPr/>
+          <p:nvPr/>
+        </p:nvSpPr>
+        <p:spPr>
+          <a:xfrm>
+            <a:off x="365760" y="896112"/>
+            <a:ext cx="1920240" cy="41148"/>
+          </a:xfrm>
+          <a:prstGeom prst="rect">
+            <a:avLst/>
+          </a:prstGeom>
+          <a:solidFill>
+            <a:srgbClr val="2E75B6"/>
+          </a:solidFill>
+          <a:ln>
+            <a:noFill/>
+          </a:ln>
+          <a:effectLst/>
+        </p:spPr>
+        <p:style>
+          <a:lnRef idx="1">
+            <a:schemeClr val="accent1"/>
+          </a:lnRef>
+          <a:fillRef idx="3">
+            <a:schemeClr val="accent1"/>
+          </a:fillRef>
+          <a:effectRef idx="2">
+            <a:schemeClr val="accent1"/>
+          </a:effectRef>
+          <a:fontRef idx="minor">
+            <a:schemeClr val="lt1"/>
+          </a:fontRef>
+        </p:style>
+        <p:txBody>
+          <a:bodyPr rtlCol="0" anchor="ctr"/>
+          <a:lstStyle/>
+          <a:p>
+            <a:pPr algn="ctr"/>
+          </a:p>
+        </p:txBody>
+      </p:sp>
+      <p:sp>
+        <p:nvSpPr>
+          <p:cNvPr id="7" name="Rectangle 6"/>
+          <p:cNvSpPr/>
+          <p:nvPr/>
+        </p:nvSpPr>
+        <p:spPr>
+          <a:xfrm>
+            <a:off x="0" y="6601968"/>
+            <a:ext cx="12191695" cy="256032"/>
+          </a:xfrm>
+          <a:prstGeom prst="rect">
+            <a:avLst/>
+          </a:prstGeom>
+          <a:solidFill>
+            <a:srgbClr val="F2F2F2"/>
+          </a:solidFill>
+          <a:ln>
+            <a:noFill/>
+          </a:ln>
+          <a:effectLst/>
+        </p:spPr>
+        <p:style>
+          <a:lnRef idx="1">
+            <a:schemeClr val="accent1"/>
+          </a:lnRef>
+          <a:fillRef idx="3">
+            <a:schemeClr val="accent1"/>
+          </a:fillRef>
+          <a:effectRef idx="2">
+            <a:schemeClr val="accent1"/>
+          </a:effectRef>
+          <a:fontRef idx="minor">
+            <a:schemeClr val="lt1"/>
+          </a:fontRef>
+        </p:style>
+        <p:txBody>
+          <a:bodyPr rtlCol="0" anchor="ctr"/>
+          <a:lstStyle/>
+          <a:p>
+            <a:pPr algn="ctr"/>
+          </a:p>
+        </p:txBody>
+      </p:sp>
+      <p:sp>
+        <p:nvSpPr>
+          <p:cNvPr id="8" name="TextBox 7"/>
+          <p:cNvSpPr txBox="1"/>
+          <p:nvPr/>
+        </p:nvSpPr>
+        <p:spPr>
+          <a:xfrm>
+            <a:off x="365760" y="6601968"/>
+            <a:ext cx="7772400" cy="256032"/>
+          </a:xfrm>
+          <a:prstGeom prst="rect">
+            <a:avLst/>
+          </a:prstGeom>
+          <a:noFill/>
+        </p:spPr>
+        <p:txBody>
+          <a:bodyPr wrap="square" anchor="ctr"/>
+          <a:lstStyle/>
+          <a:p>
+            <a:pPr algn="l">
+              <a:spcBef>
+                <a:spcPts val="0"/>
+              </a:spcBef>
+              <a:spcAft>
+                <a:spcPts val="0"/>
+              </a:spcAft>
+            </a:pPr>
+            <a:r>
+              <a:rPr sz="1000" b="0">
+                <a:solidFill>
+                  <a:srgbClr val="595959"/>
+                </a:solidFill>
+                <a:latin typeface="Calibri"/>
+              </a:rPr>
+              <a:t>Confidential  |  Human-in-the-loop concept  |  Not an implemented system</a:t>
+            </a:r>
+          </a:p>
+        </p:txBody>
+      </p:sp>
+      <p:sp>
+        <p:nvSpPr>
+          <p:cNvPr id="9" name="TextBox 8"/>
+          <p:cNvSpPr txBox="1"/>
+          <p:nvPr/>
+        </p:nvSpPr>
+        <p:spPr>
+          <a:xfrm>
+            <a:off x="9509760" y="6601968"/>
+            <a:ext cx="2286000" cy="256032"/>
+          </a:xfrm>
+          <a:prstGeom prst="rect">
+            <a:avLst/>
+          </a:prstGeom>
+          <a:noFill/>
+        </p:spPr>
+        <p:txBody>
+          <a:bodyPr wrap="square" anchor="ctr"/>
+          <a:lstStyle/>
+          <a:p>
+            <a:pPr algn="r">
+              <a:spcBef>
+                <a:spcPts val="0"/>
+              </a:spcBef>
+              <a:spcAft>
+                <a:spcPts val="0"/>
+              </a:spcAft>
+            </a:pPr>
+            <a:r>
+              <a:rPr sz="1000" b="0">
+                <a:solidFill>
+                  <a:srgbClr val="595959"/>
+                </a:solidFill>
+                <a:latin typeface="Calibri"/>
+              </a:rPr>
+              <a:t>Slide 2 of 5</a:t>
+            </a:r>
+          </a:p>
+        </p:txBody>
+      </p:sp>
+      <p:sp>
+        <p:nvSpPr>
+          <p:cNvPr id="10" name="TextBox 9"/>
+          <p:cNvSpPr txBox="1"/>
+          <p:nvPr/>
+        </p:nvSpPr>
+        <p:spPr>
+          <a:xfrm>
+            <a:off x="365760" y="1051560"/>
+            <a:ext cx="11430000" cy="256032"/>
+          </a:xfrm>
+          <a:prstGeom prst="rect">
+            <a:avLst/>
+          </a:prstGeom>
+          <a:noFill/>
+        </p:spPr>
+        <p:txBody>
+          <a:bodyPr wrap="square" anchor="t"/>
+          <a:lstStyle/>
+          <a:p>
+            <a:pPr algn="l">
+              <a:spcBef>
+                <a:spcPts val="0"/>
+              </a:spcBef>
+              <a:spcAft>
+                <a:spcPts val="0"/>
+              </a:spcAft>
+            </a:pPr>
+            <a:r>
+              <a:rPr sz="1400" b="0">
+                <a:solidFill>
+                  <a:srgbClr val="595959"/>
+                </a:solidFill>
+                <a:latin typeface="Calibri"/>
+              </a:rPr>
+              <a:t>Today the engineer stitches this together by hand:</a:t>
+            </a:r>
+          </a:p>
+        </p:txBody>
+      </p:sp>
+      <p:sp>
+        <p:nvSpPr>
+          <p:cNvPr id="11" name="Chevron 10"/>
+          <p:cNvSpPr/>
+          <p:nvPr/>
+        </p:nvSpPr>
+        <p:spPr>
+          <a:xfrm>
+            <a:off x="365760" y="1371600"/>
+            <a:ext cx="2816352" cy="658368"/>
+          </a:xfrm>
+          <a:prstGeom prst="chevron">
+            <a:avLst>
+              <a:gd name="adj" fmla="val 16000"/>
+            </a:avLst>
+          </a:prstGeom>
+          <a:solidFill>
+            <a:srgbClr val="DEEBF7"/>
+          </a:solidFill>
+          <a:ln w="12700">
+            <a:solidFill>
+              <a:srgbClr val="2E75B6"/>
+            </a:solidFill>
+          </a:ln>
+          <a:effectLst/>
+        </p:spPr>
+        <p:style>
+          <a:lnRef idx="1">
+            <a:schemeClr val="accent1"/>
+          </a:lnRef>
+          <a:fillRef idx="3">
+            <a:schemeClr val="accent1"/>
+          </a:fillRef>
+          <a:effectRef idx="2">
+            <a:schemeClr val="accent1"/>
+          </a:effectRef>
+          <a:fontRef idx="minor">
+            <a:schemeClr val="lt1"/>
+          </a:fontRef>
+        </p:style>
+        <p:txBody>
+          <a:bodyPr rtlCol="0" anchor="ctr" rIns="73152" wrap="square" lIns="73152" tIns="36576" bIns="36576"/>
+          <a:lstStyle/>
+          <a:p>
+            <a:pPr algn="ctr">
+              <a:spcBef>
+                <a:spcPts val="0"/>
+              </a:spcBef>
+              <a:spcAft>
+                <a:spcPts val="0"/>
+              </a:spcAft>
+            </a:pPr>
+            <a:r>
+              <a:rPr sz="1200" b="1">
+                <a:solidFill>
+                  <a:srgbClr val="1F4E79"/>
+                </a:solidFill>
+                <a:latin typeface="Calibri"/>
+              </a:rPr>
+              <a:t>1  Incident alert</a:t>
+            </a:r>
+          </a:p>
+        </p:txBody>
+      </p:sp>
+      <p:sp>
+        <p:nvSpPr>
+          <p:cNvPr id="12" name="Chevron 11"/>
+          <p:cNvSpPr/>
+          <p:nvPr/>
+        </p:nvSpPr>
+        <p:spPr>
+          <a:xfrm>
+            <a:off x="3236976" y="1371600"/>
+            <a:ext cx="2816352" cy="658368"/>
+          </a:xfrm>
+          <a:prstGeom prst="chevron">
+            <a:avLst>
+              <a:gd name="adj" fmla="val 16000"/>
+            </a:avLst>
+          </a:prstGeom>
+          <a:solidFill>
+            <a:srgbClr val="DEEBF7"/>
+          </a:solidFill>
+          <a:ln w="12700">
+            <a:solidFill>
+              <a:srgbClr val="2E75B6"/>
+            </a:solidFill>
+          </a:ln>
+          <a:effectLst/>
+        </p:spPr>
+        <p:style>
+          <a:lnRef idx="1">
+            <a:schemeClr val="accent1"/>
+          </a:lnRef>
+          <a:fillRef idx="3">
+            <a:schemeClr val="accent1"/>
+          </a:fillRef>
+          <a:effectRef idx="2">
+            <a:schemeClr val="accent1"/>
+          </a:effectRef>
+          <a:fontRef idx="minor">
+            <a:schemeClr val="lt1"/>
+          </a:fontRef>
+        </p:style>
+        <p:txBody>
+          <a:bodyPr rtlCol="0" anchor="ctr" rIns="73152" wrap="square" lIns="73152" tIns="36576" bIns="36576"/>
+          <a:lstStyle/>
+          <a:p>
+            <a:pPr algn="ctr">
+              <a:spcBef>
+                <a:spcPts val="0"/>
+              </a:spcBef>
+              <a:spcAft>
+                <a:spcPts val="0"/>
+              </a:spcAft>
+            </a:pPr>
+            <a:r>
+              <a:rPr sz="1200" b="1">
+                <a:solidFill>
+                  <a:srgbClr val="1F4E79"/>
+                </a:solidFill>
+                <a:latin typeface="Calibri"/>
+              </a:rPr>
+              <a:t>2  Engineer starts investigation</a:t>
+            </a:r>
+          </a:p>
+        </p:txBody>
+      </p:sp>
+      <p:sp>
+        <p:nvSpPr>
+          <p:cNvPr id="13" name="Chevron 12"/>
+          <p:cNvSpPr/>
+          <p:nvPr/>
+        </p:nvSpPr>
+        <p:spPr>
+          <a:xfrm>
+            <a:off x="6108192" y="1371600"/>
+            <a:ext cx="2816352" cy="658368"/>
+          </a:xfrm>
+          <a:prstGeom prst="chevron">
+            <a:avLst>
+              <a:gd name="adj" fmla="val 16000"/>
+            </a:avLst>
+          </a:prstGeom>
+          <a:solidFill>
+            <a:srgbClr val="DEEBF7"/>
+          </a:solidFill>
+          <a:ln w="12700">
+            <a:solidFill>
+              <a:srgbClr val="2E75B6"/>
+            </a:solidFill>
+          </a:ln>
+          <a:effectLst/>
+        </p:spPr>
+        <p:style>
+          <a:lnRef idx="1">
+            <a:schemeClr val="accent1"/>
+          </a:lnRef>
+          <a:fillRef idx="3">
+            <a:schemeClr val="accent1"/>
+          </a:fillRef>
+          <a:effectRef idx="2">
+            <a:schemeClr val="accent1"/>
+          </a:effectRef>
+          <a:fontRef idx="minor">
+            <a:schemeClr val="lt1"/>
+          </a:fontRef>
+        </p:style>
+        <p:txBody>
+          <a:bodyPr rtlCol="0" anchor="ctr" rIns="73152" wrap="square" lIns="73152" tIns="36576" bIns="36576"/>
+          <a:lstStyle/>
+          <a:p>
+            <a:pPr algn="ctr">
+              <a:spcBef>
+                <a:spcPts val="0"/>
+              </a:spcBef>
+              <a:spcAft>
+                <a:spcPts val="0"/>
+              </a:spcAft>
+            </a:pPr>
+            <a:r>
+              <a:rPr sz="1200" b="1">
+                <a:solidFill>
+                  <a:srgbClr val="1F4E79"/>
+                </a:solidFill>
+                <a:latin typeface="Calibri"/>
+              </a:rPr>
+              <a:t>3  Check MQ</a:t>
+            </a:r>
+          </a:p>
+        </p:txBody>
+      </p:sp>
+      <p:sp>
+        <p:nvSpPr>
+          <p:cNvPr id="14" name="Rectangle 13"/>
+          <p:cNvSpPr/>
+          <p:nvPr/>
+        </p:nvSpPr>
+        <p:spPr>
+          <a:xfrm>
+            <a:off x="8979408" y="1371600"/>
+            <a:ext cx="2816352" cy="658368"/>
+          </a:xfrm>
+          <a:prstGeom prst="rect">
+            <a:avLst/>
+          </a:prstGeom>
+          <a:solidFill>
+            <a:srgbClr val="DEEBF7"/>
+          </a:solidFill>
+          <a:ln w="12700">
+            <a:solidFill>
+              <a:srgbClr val="2E75B6"/>
+            </a:solidFill>
+          </a:ln>
+          <a:effectLst/>
+        </p:spPr>
+        <p:style>
+          <a:lnRef idx="1">
+            <a:schemeClr val="accent1"/>
+          </a:lnRef>
+          <a:fillRef idx="3">
+            <a:schemeClr val="accent1"/>
+          </a:fillRef>
+          <a:effectRef idx="2">
+            <a:schemeClr val="accent1"/>
+          </a:effectRef>
+          <a:fontRef idx="minor">
+            <a:schemeClr val="lt1"/>
+          </a:fontRef>
+        </p:style>
+        <p:txBody>
+          <a:bodyPr rtlCol="0" anchor="ctr" wrap="square" lIns="73152" rIns="73152" tIns="36576" bIns="36576"/>
+          <a:lstStyle/>
+          <a:p>
+            <a:pPr algn="ctr">
+              <a:spcBef>
+                <a:spcPts val="0"/>
+              </a:spcBef>
+              <a:spcAft>
+                <a:spcPts val="0"/>
+              </a:spcAft>
+            </a:pPr>
+            <a:r>
+              <a:rPr sz="1200" b="1">
+                <a:solidFill>
+                  <a:srgbClr val="1F4E79"/>
+                </a:solidFill>
+                <a:latin typeface="Calibri"/>
+              </a:rPr>
+              <a:t>4  Check ACE</a:t>
+            </a:r>
+          </a:p>
+        </p:txBody>
+      </p:sp>
+      <p:sp>
+        <p:nvSpPr>
+          <p:cNvPr id="15" name="Chevron 14"/>
+          <p:cNvSpPr/>
+          <p:nvPr/>
+        </p:nvSpPr>
+        <p:spPr>
+          <a:xfrm>
+            <a:off x="365760" y="2176272"/>
+            <a:ext cx="2816352" cy="658368"/>
+          </a:xfrm>
+          <a:prstGeom prst="chevron">
+            <a:avLst>
+              <a:gd name="adj" fmla="val 16000"/>
+            </a:avLst>
+          </a:prstGeom>
+          <a:solidFill>
+            <a:srgbClr val="DEEBF7"/>
+          </a:solidFill>
+          <a:ln w="12700">
+            <a:solidFill>
+              <a:srgbClr val="2E75B6"/>
+            </a:solidFill>
+          </a:ln>
+          <a:effectLst/>
+        </p:spPr>
+        <p:style>
+          <a:lnRef idx="1">
+            <a:schemeClr val="accent1"/>
+          </a:lnRef>
+          <a:fillRef idx="3">
+            <a:schemeClr val="accent1"/>
+          </a:fillRef>
+          <a:effectRef idx="2">
+            <a:schemeClr val="accent1"/>
+          </a:effectRef>
+          <a:fontRef idx="minor">
+            <a:schemeClr val="lt1"/>
+          </a:fontRef>
+        </p:style>
+        <p:txBody>
+          <a:bodyPr rtlCol="0" anchor="ctr" rIns="73152" wrap="square" lIns="73152" tIns="36576" bIns="36576"/>
+          <a:lstStyle/>
+          <a:p>
+            <a:pPr algn="ctr">
+              <a:spcBef>
+                <a:spcPts val="0"/>
+              </a:spcBef>
+              <a:spcAft>
+                <a:spcPts val="0"/>
+              </a:spcAft>
+            </a:pPr>
+            <a:r>
+              <a:rPr sz="1200" b="1">
+                <a:solidFill>
+                  <a:srgbClr val="1F4E79"/>
+                </a:solidFill>
+                <a:latin typeface="Calibri"/>
+              </a:rPr>
+              <a:t>5  Check logs</a:t>
+            </a:r>
+          </a:p>
+        </p:txBody>
+      </p:sp>
+      <p:sp>
+        <p:nvSpPr>
+          <p:cNvPr id="16" name="Chevron 15"/>
+          <p:cNvSpPr/>
+          <p:nvPr/>
+        </p:nvSpPr>
+        <p:spPr>
+          <a:xfrm>
+            <a:off x="3236976" y="2176272"/>
+            <a:ext cx="2816352" cy="658368"/>
+          </a:xfrm>
+          <a:prstGeom prst="chevron">
+            <a:avLst>
+              <a:gd name="adj" fmla="val 16000"/>
+            </a:avLst>
+          </a:prstGeom>
+          <a:solidFill>
+            <a:srgbClr val="DEEBF7"/>
+          </a:solidFill>
+          <a:ln w="12700">
+            <a:solidFill>
+              <a:srgbClr val="2E75B6"/>
+            </a:solidFill>
+          </a:ln>
+          <a:effectLst/>
+        </p:spPr>
+        <p:style>
+          <a:lnRef idx="1">
+            <a:schemeClr val="accent1"/>
+          </a:lnRef>
+          <a:fillRef idx="3">
+            <a:schemeClr val="accent1"/>
+          </a:fillRef>
+          <a:effectRef idx="2">
+            <a:schemeClr val="accent1"/>
+          </a:effectRef>
+          <a:fontRef idx="minor">
+            <a:schemeClr val="lt1"/>
+          </a:fontRef>
+        </p:style>
+        <p:txBody>
+          <a:bodyPr rtlCol="0" anchor="ctr" rIns="73152" wrap="square" lIns="73152" tIns="36576" bIns="36576"/>
+          <a:lstStyle/>
+          <a:p>
+            <a:pPr algn="ctr">
+              <a:spcBef>
+                <a:spcPts val="0"/>
+              </a:spcBef>
+              <a:spcAft>
+                <a:spcPts val="0"/>
+              </a:spcAft>
+            </a:pPr>
+            <a:r>
+              <a:rPr sz="1200" b="1">
+                <a:solidFill>
+                  <a:srgbClr val="1F4E79"/>
+                </a:solidFill>
+                <a:latin typeface="Calibri"/>
+              </a:rPr>
+              <a:t>6  Review previous incidents</a:t>
+            </a:r>
+          </a:p>
+        </p:txBody>
+      </p:sp>
+      <p:sp>
+        <p:nvSpPr>
+          <p:cNvPr id="17" name="Chevron 16"/>
+          <p:cNvSpPr/>
+          <p:nvPr/>
+        </p:nvSpPr>
+        <p:spPr>
+          <a:xfrm>
+            <a:off x="6108192" y="2176272"/>
+            <a:ext cx="2816352" cy="658368"/>
+          </a:xfrm>
+          <a:prstGeom prst="chevron">
+            <a:avLst>
+              <a:gd name="adj" fmla="val 16000"/>
+            </a:avLst>
+          </a:prstGeom>
+          <a:solidFill>
+            <a:srgbClr val="DEEBF7"/>
+          </a:solidFill>
+          <a:ln w="12700">
+            <a:solidFill>
+              <a:srgbClr val="2E75B6"/>
+            </a:solidFill>
+          </a:ln>
+          <a:effectLst/>
+        </p:spPr>
+        <p:style>
+          <a:lnRef idx="1">
+            <a:schemeClr val="accent1"/>
+          </a:lnRef>
+          <a:fillRef idx="3">
+            <a:schemeClr val="accent1"/>
+          </a:fillRef>
+          <a:effectRef idx="2">
+            <a:schemeClr val="accent1"/>
+          </a:effectRef>
+          <a:fontRef idx="minor">
+            <a:schemeClr val="lt1"/>
+          </a:fontRef>
+        </p:style>
+        <p:txBody>
+          <a:bodyPr rtlCol="0" anchor="ctr" rIns="73152" wrap="square" lIns="73152" tIns="36576" bIns="36576"/>
+          <a:lstStyle/>
+          <a:p>
+            <a:pPr algn="ctr">
+              <a:spcBef>
+                <a:spcPts val="0"/>
+              </a:spcBef>
+              <a:spcAft>
+                <a:spcPts val="0"/>
+              </a:spcAft>
+            </a:pPr>
+            <a:r>
+              <a:rPr sz="1200" b="1">
+                <a:solidFill>
+                  <a:srgbClr val="1F4E79"/>
+                </a:solidFill>
+                <a:latin typeface="Calibri"/>
+              </a:rPr>
+              <a:t>7  Identify pattern</a:t>
+            </a:r>
+          </a:p>
+        </p:txBody>
+      </p:sp>
+      <p:sp>
+        <p:nvSpPr>
+          <p:cNvPr id="18" name="Rectangle 17"/>
+          <p:cNvSpPr/>
+          <p:nvPr/>
+        </p:nvSpPr>
+        <p:spPr>
+          <a:xfrm>
+            <a:off x="8979408" y="2176272"/>
+            <a:ext cx="2816352" cy="658368"/>
+          </a:xfrm>
+          <a:prstGeom prst="rect">
+            <a:avLst/>
+          </a:prstGeom>
+          <a:solidFill>
+            <a:srgbClr val="DEEBF7"/>
+          </a:solidFill>
+          <a:ln w="12700">
+            <a:solidFill>
+              <a:srgbClr val="2E75B6"/>
+            </a:solidFill>
+          </a:ln>
+          <a:effectLst/>
+        </p:spPr>
+        <p:style>
+          <a:lnRef idx="1">
+            <a:schemeClr val="accent1"/>
+          </a:lnRef>
+          <a:fillRef idx="3">
+            <a:schemeClr val="accent1"/>
+          </a:fillRef>
+          <a:effectRef idx="2">
+            <a:schemeClr val="accent1"/>
+          </a:effectRef>
+          <a:fontRef idx="minor">
+            <a:schemeClr val="lt1"/>
+          </a:fontRef>
+        </p:style>
+        <p:txBody>
+          <a:bodyPr rtlCol="0" anchor="ctr" wrap="square" lIns="73152" rIns="73152" tIns="36576" bIns="36576"/>
+          <a:lstStyle/>
+          <a:p>
+            <a:pPr algn="ctr">
+              <a:spcBef>
+                <a:spcPts val="0"/>
+              </a:spcBef>
+              <a:spcAft>
+                <a:spcPts val="0"/>
+              </a:spcAft>
+            </a:pPr>
+            <a:r>
+              <a:rPr sz="1200" b="1">
+                <a:solidFill>
+                  <a:srgbClr val="1F4E79"/>
+                </a:solidFill>
+                <a:latin typeface="Calibri"/>
+              </a:rPr>
+              <a:t>8  Decide what to do</a:t>
+            </a:r>
+          </a:p>
+        </p:txBody>
+      </p:sp>
+      <p:sp>
+        <p:nvSpPr>
+          <p:cNvPr id="19" name="Rectangle 18"/>
+          <p:cNvSpPr/>
+          <p:nvPr/>
+        </p:nvSpPr>
+        <p:spPr>
+          <a:xfrm>
+            <a:off x="365760" y="3063240"/>
+            <a:ext cx="11430000" cy="640080"/>
+          </a:xfrm>
+          <a:prstGeom prst="rect">
+            <a:avLst/>
+          </a:prstGeom>
+          <a:solidFill>
+            <a:srgbClr val="DEEBF7"/>
+          </a:solidFill>
+          <a:ln w="12700">
+            <a:solidFill>
+              <a:srgbClr val="2E75B6"/>
+            </a:solidFill>
+          </a:ln>
+          <a:effectLst/>
+        </p:spPr>
+        <p:style>
+          <a:lnRef idx="1">
+            <a:schemeClr val="accent1"/>
+          </a:lnRef>
+          <a:fillRef idx="3">
+            <a:schemeClr val="accent1"/>
+          </a:fillRef>
+          <a:effectRef idx="2">
+            <a:schemeClr val="accent1"/>
+          </a:effectRef>
+          <a:fontRef idx="minor">
+            <a:schemeClr val="lt1"/>
+          </a:fontRef>
+        </p:style>
+        <p:txBody>
+          <a:bodyPr rtlCol="0" anchor="ctr" wrap="square" lIns="201168" rIns="73152" tIns="36576" bIns="36576"/>
+          <a:lstStyle/>
+          <a:p>
+            <a:pPr algn="l">
+              <a:spcBef>
+                <a:spcPts val="0"/>
+              </a:spcBef>
+              <a:spcAft>
+                <a:spcPts val="0"/>
+              </a:spcAft>
+            </a:pPr>
+            <a:r>
+              <a:rPr sz="1600" b="1">
+                <a:solidFill>
+                  <a:srgbClr val="1F4E79"/>
+                </a:solidFill>
+                <a:latin typeface="Calibri"/>
+              </a:rPr>
+              <a:t>The required information is available, but engineers must manually connect the dots across multiple sources.</a:t>
+            </a:r>
+          </a:p>
+        </p:txBody>
+      </p:sp>
+      <p:sp>
+        <p:nvSpPr>
+          <p:cNvPr id="20" name="Rectangle 19"/>
+          <p:cNvSpPr/>
+          <p:nvPr/>
+        </p:nvSpPr>
+        <p:spPr>
+          <a:xfrm>
+            <a:off x="365760" y="3886200"/>
+            <a:ext cx="5532120" cy="2423160"/>
+          </a:xfrm>
+          <a:prstGeom prst="rect">
+            <a:avLst/>
+          </a:prstGeom>
+          <a:solidFill>
+            <a:srgbClr val="FFFFFF"/>
+          </a:solidFill>
+          <a:ln w="12700">
+            <a:solidFill>
+              <a:srgbClr val="BFBFBF"/>
+            </a:solidFill>
+          </a:ln>
+          <a:effectLst/>
+        </p:spPr>
+        <p:style>
+          <a:lnRef idx="1">
+            <a:schemeClr val="accent1"/>
+          </a:lnRef>
+          <a:fillRef idx="3">
+            <a:schemeClr val="accent1"/>
+          </a:fillRef>
+          <a:effectRef idx="2">
+            <a:schemeClr val="accent1"/>
+          </a:effectRef>
+          <a:fontRef idx="minor">
+            <a:schemeClr val="lt1"/>
+          </a:fontRef>
+        </p:style>
+        <p:txBody>
+          <a:bodyPr rtlCol="0" anchor="ctr"/>
+          <a:lstStyle/>
+          <a:p>
+            <a:pPr algn="ctr"/>
+          </a:p>
+        </p:txBody>
+      </p:sp>
+      <p:sp>
+        <p:nvSpPr>
+          <p:cNvPr id="21" name="Rectangle 20"/>
+          <p:cNvSpPr/>
+          <p:nvPr/>
+        </p:nvSpPr>
+        <p:spPr>
+          <a:xfrm>
+            <a:off x="6263640" y="3886200"/>
+            <a:ext cx="5532120" cy="2423160"/>
+          </a:xfrm>
+          <a:prstGeom prst="rect">
+            <a:avLst/>
+          </a:prstGeom>
+          <a:solidFill>
+            <a:srgbClr val="FFFFFF"/>
+          </a:solidFill>
+          <a:ln w="12700">
+            <a:solidFill>
+              <a:srgbClr val="BFBFBF"/>
+            </a:solidFill>
+          </a:ln>
+          <a:effectLst/>
+        </p:spPr>
+        <p:style>
+          <a:lnRef idx="1">
+            <a:schemeClr val="accent1"/>
+          </a:lnRef>
+          <a:fillRef idx="3">
+            <a:schemeClr val="accent1"/>
+          </a:fillRef>
+          <a:effectRef idx="2">
+            <a:schemeClr val="accent1"/>
+          </a:effectRef>
+          <a:fontRef idx="minor">
+            <a:schemeClr val="lt1"/>
+          </a:fontRef>
+        </p:style>
+        <p:txBody>
+          <a:bodyPr rtlCol="0" anchor="ctr"/>
+          <a:lstStyle/>
+          <a:p>
+            <a:pPr algn="ctr"/>
+          </a:p>
+        </p:txBody>
+      </p:sp>
+      <p:sp>
+        <p:nvSpPr>
+          <p:cNvPr id="22" name="Rectangle 21"/>
+          <p:cNvSpPr/>
+          <p:nvPr/>
+        </p:nvSpPr>
+        <p:spPr>
+          <a:xfrm>
+            <a:off x="365760" y="3886200"/>
+            <a:ext cx="5532120" cy="384048"/>
+          </a:xfrm>
+          <a:prstGeom prst="rect">
+            <a:avLst/>
+          </a:prstGeom>
+          <a:solidFill>
+            <a:srgbClr val="1F4E79"/>
+          </a:solidFill>
+          <a:ln>
+            <a:noFill/>
+          </a:ln>
+          <a:effectLst/>
+        </p:spPr>
+        <p:style>
+          <a:lnRef idx="1">
+            <a:schemeClr val="accent1"/>
+          </a:lnRef>
+          <a:fillRef idx="3">
+            <a:schemeClr val="accent1"/>
+          </a:fillRef>
+          <a:effectRef idx="2">
+            <a:schemeClr val="accent1"/>
+          </a:effectRef>
+          <a:fontRef idx="minor">
+            <a:schemeClr val="lt1"/>
+          </a:fontRef>
+        </p:style>
+        <p:txBody>
+          <a:bodyPr rtlCol="0" anchor="ctr" wrap="square" lIns="73152" rIns="73152" tIns="36576" bIns="36576"/>
+          <a:lstStyle/>
+          <a:p>
+            <a:pPr algn="ctr">
+              <a:spcBef>
+                <a:spcPts val="0"/>
+              </a:spcBef>
+              <a:spcAft>
+                <a:spcPts val="0"/>
+              </a:spcAft>
+            </a:pPr>
+            <a:r>
+              <a:rPr sz="1400" b="1">
+                <a:solidFill>
+                  <a:srgbClr val="FFFFFF"/>
+                </a:solidFill>
+                <a:latin typeface="Calibri"/>
+              </a:rPr>
+              <a:t>AIP Sentinel  (existing)</a:t>
+            </a:r>
+          </a:p>
+        </p:txBody>
+      </p:sp>
+      <p:sp>
+        <p:nvSpPr>
+          <p:cNvPr id="23" name="TextBox 22"/>
+          <p:cNvSpPr txBox="1"/>
+          <p:nvPr/>
+        </p:nvSpPr>
+        <p:spPr>
+          <a:xfrm>
+            <a:off x="548640" y="4389120"/>
+            <a:ext cx="5166360" cy="1691640"/>
+          </a:xfrm>
+          <a:prstGeom prst="rect">
+            <a:avLst/>
+          </a:prstGeom>
+          <a:noFill/>
+        </p:spPr>
+        <p:txBody>
+          <a:bodyPr wrap="square" anchor="t"/>
+          <a:lstStyle/>
+          <a:p>
+            <a:pPr algn="l">
+              <a:spcBef>
+                <a:spcPts val="0"/>
+              </a:spcBef>
+              <a:spcAft>
+                <a:spcPts val="0"/>
+              </a:spcAft>
+            </a:pPr>
+            <a:r>
+              <a:rPr sz="1500" b="0">
+                <a:solidFill>
+                  <a:srgbClr val="2F2F2F"/>
+                </a:solidFill>
+                <a:latin typeface="Calibri"/>
+              </a:rPr>
+              <a:t>Detection and alerting.
+Tells the team that something is wrong so investigation can start.</a:t>
+            </a:r>
+          </a:p>
+        </p:txBody>
+      </p:sp>
+      <p:sp>
+        <p:nvSpPr>
+          <p:cNvPr id="24" name="Rectangle 23"/>
+          <p:cNvSpPr/>
+          <p:nvPr/>
+        </p:nvSpPr>
+        <p:spPr>
+          <a:xfrm>
+            <a:off x="6263640" y="3886200"/>
+            <a:ext cx="5532120" cy="384048"/>
+          </a:xfrm>
+          <a:prstGeom prst="rect">
+            <a:avLst/>
+          </a:prstGeom>
+          <a:solidFill>
+            <a:srgbClr val="2E75B6"/>
+          </a:solidFill>
+          <a:ln>
+            <a:noFill/>
+          </a:ln>
+          <a:effectLst/>
+        </p:spPr>
+        <p:style>
+          <a:lnRef idx="1">
+            <a:schemeClr val="accent1"/>
+          </a:lnRef>
+          <a:fillRef idx="3">
+            <a:schemeClr val="accent1"/>
+          </a:fillRef>
+          <a:effectRef idx="2">
+            <a:schemeClr val="accent1"/>
+          </a:effectRef>
+          <a:fontRef idx="minor">
+            <a:schemeClr val="lt1"/>
+          </a:fontRef>
+        </p:style>
+        <p:txBody>
+          <a:bodyPr rtlCol="0" anchor="ctr" wrap="square" lIns="73152" rIns="73152" tIns="36576" bIns="36576"/>
+          <a:lstStyle/>
+          <a:p>
+            <a:pPr algn="ctr">
+              <a:spcBef>
+                <a:spcPts val="0"/>
+              </a:spcBef>
+              <a:spcAft>
+                <a:spcPts val="0"/>
+              </a:spcAft>
+            </a:pPr>
+            <a:r>
+              <a:rPr sz="1400" b="1">
+                <a:solidFill>
+                  <a:srgbClr val="FFFFFF"/>
+                </a:solidFill>
+                <a:latin typeface="Calibri"/>
+              </a:rPr>
+              <a:t>AI Incident Copilot  (proposed addition)</a:t>
+            </a:r>
+          </a:p>
+        </p:txBody>
+      </p:sp>
+      <p:sp>
+        <p:nvSpPr>
+          <p:cNvPr id="25" name="TextBox 24"/>
+          <p:cNvSpPr txBox="1"/>
+          <p:nvPr/>
+        </p:nvSpPr>
+        <p:spPr>
+          <a:xfrm>
+            <a:off x="6446520" y="4389120"/>
+            <a:ext cx="5166360" cy="1691640"/>
+          </a:xfrm>
+          <a:prstGeom prst="rect">
+            <a:avLst/>
+          </a:prstGeom>
+          <a:noFill/>
+        </p:spPr>
+        <p:txBody>
+          <a:bodyPr wrap="square" anchor="t"/>
+          <a:lstStyle/>
+          <a:p>
+            <a:pPr algn="l">
+              <a:spcBef>
+                <a:spcPts val="0"/>
+              </a:spcBef>
+              <a:spcAft>
+                <a:spcPts val="0"/>
+              </a:spcAft>
+            </a:pPr>
+            <a:r>
+              <a:rPr sz="1500" b="0">
+                <a:solidFill>
+                  <a:srgbClr val="2F2F2F"/>
+                </a:solidFill>
+                <a:latin typeface="Calibri"/>
+              </a:rPr>
+              <a:t>Investigation intelligence layer.
+Does not replace Sentinel.  Prepares the investigation so the engineer can decide faster.</a:t>
+            </a:r>
+          </a:p>
+        </p:txBody>
+      </p:sp>
     </p:spTree>
   </p:cSld>
   <p:clrMapOvr>
@@ -3176,30 +5147,1649 @@
         <p:nvPr/>
       </p:nvGrpSpPr>
       <p:grpSpPr/>
-      <p:pic>
-        <p:nvPicPr>
-          <p:cNvPr id="2" name="Picture 1" descr="slide-03.png"/>
-          <p:cNvPicPr>
-            <a:picLocks noChangeAspect="1"/>
-          </p:cNvPicPr>
-          <p:nvPr/>
-        </p:nvPicPr>
-        <p:blipFill>
-          <a:blip r:embed="rId2"/>
-          <a:stretch>
-            <a:fillRect/>
-          </a:stretch>
-        </p:blipFill>
+      <p:sp>
+        <p:nvSpPr>
+          <p:cNvPr id="2" name="Rectangle 1"/>
+          <p:cNvSpPr/>
+          <p:nvPr/>
+        </p:nvSpPr>
         <p:spPr>
           <a:xfrm>
             <a:off x="0" y="0"/>
-            <a:ext cx="12191999" cy="6858000"/>
-          </a:xfrm>
-          <a:prstGeom prst="rect">
-            <a:avLst/>
-          </a:prstGeom>
-        </p:spPr>
-      </p:pic>
+            <a:ext cx="12191695" cy="384048"/>
+          </a:xfrm>
+          <a:prstGeom prst="rect">
+            <a:avLst/>
+          </a:prstGeom>
+          <a:solidFill>
+            <a:srgbClr val="1F4E79"/>
+          </a:solidFill>
+          <a:ln>
+            <a:noFill/>
+          </a:ln>
+          <a:effectLst/>
+        </p:spPr>
+        <p:style>
+          <a:lnRef idx="1">
+            <a:schemeClr val="accent1"/>
+          </a:lnRef>
+          <a:fillRef idx="3">
+            <a:schemeClr val="accent1"/>
+          </a:fillRef>
+          <a:effectRef idx="2">
+            <a:schemeClr val="accent1"/>
+          </a:effectRef>
+          <a:fontRef idx="minor">
+            <a:schemeClr val="lt1"/>
+          </a:fontRef>
+        </p:style>
+        <p:txBody>
+          <a:bodyPr rtlCol="0" anchor="ctr"/>
+          <a:lstStyle/>
+          <a:p>
+            <a:pPr algn="ctr"/>
+          </a:p>
+        </p:txBody>
+      </p:sp>
+      <p:sp>
+        <p:nvSpPr>
+          <p:cNvPr id="3" name="TextBox 2"/>
+          <p:cNvSpPr txBox="1"/>
+          <p:nvPr/>
+        </p:nvSpPr>
+        <p:spPr>
+          <a:xfrm>
+            <a:off x="320040" y="45720"/>
+            <a:ext cx="6766560" cy="292608"/>
+          </a:xfrm>
+          <a:prstGeom prst="rect">
+            <a:avLst/>
+          </a:prstGeom>
+          <a:noFill/>
+        </p:spPr>
+        <p:txBody>
+          <a:bodyPr wrap="square" anchor="ctr"/>
+          <a:lstStyle/>
+          <a:p>
+            <a:pPr algn="l">
+              <a:spcBef>
+                <a:spcPts val="0"/>
+              </a:spcBef>
+              <a:spcAft>
+                <a:spcPts val="0"/>
+              </a:spcAft>
+            </a:pPr>
+            <a:r>
+              <a:rPr sz="1200" b="0">
+                <a:solidFill>
+                  <a:srgbClr val="FFFFFF"/>
+                </a:solidFill>
+                <a:latin typeface="Calibri"/>
+              </a:rPr>
+              <a:t>Airport Technology  |  Internal Proposal</a:t>
+            </a:r>
+          </a:p>
+        </p:txBody>
+      </p:sp>
+      <p:sp>
+        <p:nvSpPr>
+          <p:cNvPr id="4" name="TextBox 3"/>
+          <p:cNvSpPr txBox="1"/>
+          <p:nvPr/>
+        </p:nvSpPr>
+        <p:spPr>
+          <a:xfrm>
+            <a:off x="8092440" y="45720"/>
+            <a:ext cx="3794760" cy="292608"/>
+          </a:xfrm>
+          <a:prstGeom prst="rect">
+            <a:avLst/>
+          </a:prstGeom>
+          <a:noFill/>
+        </p:spPr>
+        <p:txBody>
+          <a:bodyPr wrap="square" anchor="ctr"/>
+          <a:lstStyle/>
+          <a:p>
+            <a:pPr algn="r">
+              <a:spcBef>
+                <a:spcPts val="0"/>
+              </a:spcBef>
+              <a:spcAft>
+                <a:spcPts val="0"/>
+              </a:spcAft>
+            </a:pPr>
+            <a:r>
+              <a:rPr sz="1300" b="1">
+                <a:solidFill>
+                  <a:srgbClr val="FFFFFF"/>
+                </a:solidFill>
+                <a:latin typeface="Calibri"/>
+              </a:rPr>
+              <a:t>SOURCE INTEGRATE</a:t>
+            </a:r>
+          </a:p>
+        </p:txBody>
+      </p:sp>
+      <p:sp>
+        <p:nvSpPr>
+          <p:cNvPr id="5" name="TextBox 4"/>
+          <p:cNvSpPr txBox="1"/>
+          <p:nvPr/>
+        </p:nvSpPr>
+        <p:spPr>
+          <a:xfrm>
+            <a:off x="365760" y="502920"/>
+            <a:ext cx="11430000" cy="384048"/>
+          </a:xfrm>
+          <a:prstGeom prst="rect">
+            <a:avLst/>
+          </a:prstGeom>
+          <a:noFill/>
+        </p:spPr>
+        <p:txBody>
+          <a:bodyPr wrap="square" anchor="ctr"/>
+          <a:lstStyle/>
+          <a:p>
+            <a:pPr algn="l">
+              <a:spcBef>
+                <a:spcPts val="0"/>
+              </a:spcBef>
+              <a:spcAft>
+                <a:spcPts val="0"/>
+              </a:spcAft>
+            </a:pPr>
+            <a:r>
+              <a:rPr sz="2600" b="1">
+                <a:solidFill>
+                  <a:srgbClr val="1F4E79"/>
+                </a:solidFill>
+                <a:latin typeface="Calibri"/>
+              </a:rPr>
+              <a:t>AI Incident Copilot</a:t>
+            </a:r>
+          </a:p>
+        </p:txBody>
+      </p:sp>
+      <p:sp>
+        <p:nvSpPr>
+          <p:cNvPr id="6" name="Rectangle 5"/>
+          <p:cNvSpPr/>
+          <p:nvPr/>
+        </p:nvSpPr>
+        <p:spPr>
+          <a:xfrm>
+            <a:off x="365760" y="896112"/>
+            <a:ext cx="1920240" cy="41148"/>
+          </a:xfrm>
+          <a:prstGeom prst="rect">
+            <a:avLst/>
+          </a:prstGeom>
+          <a:solidFill>
+            <a:srgbClr val="2E75B6"/>
+          </a:solidFill>
+          <a:ln>
+            <a:noFill/>
+          </a:ln>
+          <a:effectLst/>
+        </p:spPr>
+        <p:style>
+          <a:lnRef idx="1">
+            <a:schemeClr val="accent1"/>
+          </a:lnRef>
+          <a:fillRef idx="3">
+            <a:schemeClr val="accent1"/>
+          </a:fillRef>
+          <a:effectRef idx="2">
+            <a:schemeClr val="accent1"/>
+          </a:effectRef>
+          <a:fontRef idx="minor">
+            <a:schemeClr val="lt1"/>
+          </a:fontRef>
+        </p:style>
+        <p:txBody>
+          <a:bodyPr rtlCol="0" anchor="ctr"/>
+          <a:lstStyle/>
+          <a:p>
+            <a:pPr algn="ctr"/>
+          </a:p>
+        </p:txBody>
+      </p:sp>
+      <p:sp>
+        <p:nvSpPr>
+          <p:cNvPr id="7" name="Rectangle 6"/>
+          <p:cNvSpPr/>
+          <p:nvPr/>
+        </p:nvSpPr>
+        <p:spPr>
+          <a:xfrm>
+            <a:off x="0" y="6601968"/>
+            <a:ext cx="12191695" cy="256032"/>
+          </a:xfrm>
+          <a:prstGeom prst="rect">
+            <a:avLst/>
+          </a:prstGeom>
+          <a:solidFill>
+            <a:srgbClr val="F2F2F2"/>
+          </a:solidFill>
+          <a:ln>
+            <a:noFill/>
+          </a:ln>
+          <a:effectLst/>
+        </p:spPr>
+        <p:style>
+          <a:lnRef idx="1">
+            <a:schemeClr val="accent1"/>
+          </a:lnRef>
+          <a:fillRef idx="3">
+            <a:schemeClr val="accent1"/>
+          </a:fillRef>
+          <a:effectRef idx="2">
+            <a:schemeClr val="accent1"/>
+          </a:effectRef>
+          <a:fontRef idx="minor">
+            <a:schemeClr val="lt1"/>
+          </a:fontRef>
+        </p:style>
+        <p:txBody>
+          <a:bodyPr rtlCol="0" anchor="ctr"/>
+          <a:lstStyle/>
+          <a:p>
+            <a:pPr algn="ctr"/>
+          </a:p>
+        </p:txBody>
+      </p:sp>
+      <p:sp>
+        <p:nvSpPr>
+          <p:cNvPr id="8" name="TextBox 7"/>
+          <p:cNvSpPr txBox="1"/>
+          <p:nvPr/>
+        </p:nvSpPr>
+        <p:spPr>
+          <a:xfrm>
+            <a:off x="365760" y="6601968"/>
+            <a:ext cx="7772400" cy="256032"/>
+          </a:xfrm>
+          <a:prstGeom prst="rect">
+            <a:avLst/>
+          </a:prstGeom>
+          <a:noFill/>
+        </p:spPr>
+        <p:txBody>
+          <a:bodyPr wrap="square" anchor="ctr"/>
+          <a:lstStyle/>
+          <a:p>
+            <a:pPr algn="l">
+              <a:spcBef>
+                <a:spcPts val="0"/>
+              </a:spcBef>
+              <a:spcAft>
+                <a:spcPts val="0"/>
+              </a:spcAft>
+            </a:pPr>
+            <a:r>
+              <a:rPr sz="1000" b="0">
+                <a:solidFill>
+                  <a:srgbClr val="595959"/>
+                </a:solidFill>
+                <a:latin typeface="Calibri"/>
+              </a:rPr>
+              <a:t>Confidential  |  Human-in-the-loop concept  |  Not an implemented system</a:t>
+            </a:r>
+          </a:p>
+        </p:txBody>
+      </p:sp>
+      <p:sp>
+        <p:nvSpPr>
+          <p:cNvPr id="9" name="TextBox 8"/>
+          <p:cNvSpPr txBox="1"/>
+          <p:nvPr/>
+        </p:nvSpPr>
+        <p:spPr>
+          <a:xfrm>
+            <a:off x="9509760" y="6601968"/>
+            <a:ext cx="2286000" cy="256032"/>
+          </a:xfrm>
+          <a:prstGeom prst="rect">
+            <a:avLst/>
+          </a:prstGeom>
+          <a:noFill/>
+        </p:spPr>
+        <p:txBody>
+          <a:bodyPr wrap="square" anchor="ctr"/>
+          <a:lstStyle/>
+          <a:p>
+            <a:pPr algn="r">
+              <a:spcBef>
+                <a:spcPts val="0"/>
+              </a:spcBef>
+              <a:spcAft>
+                <a:spcPts val="0"/>
+              </a:spcAft>
+            </a:pPr>
+            <a:r>
+              <a:rPr sz="1000" b="0">
+                <a:solidFill>
+                  <a:srgbClr val="595959"/>
+                </a:solidFill>
+                <a:latin typeface="Calibri"/>
+              </a:rPr>
+              <a:t>Slide 3 of 5</a:t>
+            </a:r>
+          </a:p>
+        </p:txBody>
+      </p:sp>
+      <p:sp>
+        <p:nvSpPr>
+          <p:cNvPr id="10" name="TextBox 9"/>
+          <p:cNvSpPr txBox="1"/>
+          <p:nvPr/>
+        </p:nvSpPr>
+        <p:spPr>
+          <a:xfrm>
+            <a:off x="365760" y="1024128"/>
+            <a:ext cx="11430000" cy="256032"/>
+          </a:xfrm>
+          <a:prstGeom prst="rect">
+            <a:avLst/>
+          </a:prstGeom>
+          <a:noFill/>
+        </p:spPr>
+        <p:txBody>
+          <a:bodyPr wrap="square" anchor="t"/>
+          <a:lstStyle/>
+          <a:p>
+            <a:pPr algn="l">
+              <a:spcBef>
+                <a:spcPts val="0"/>
+              </a:spcBef>
+              <a:spcAft>
+                <a:spcPts val="0"/>
+              </a:spcAft>
+            </a:pPr>
+            <a:r>
+              <a:rPr sz="1300" b="1">
+                <a:solidFill>
+                  <a:srgbClr val="595959"/>
+                </a:solidFill>
+                <a:latin typeface="Calibri"/>
+              </a:rPr>
+              <a:t>Inputs the Copilot would use</a:t>
+            </a:r>
+          </a:p>
+        </p:txBody>
+      </p:sp>
+      <p:sp>
+        <p:nvSpPr>
+          <p:cNvPr id="11" name="Rectangle 10"/>
+          <p:cNvSpPr/>
+          <p:nvPr/>
+        </p:nvSpPr>
+        <p:spPr>
+          <a:xfrm>
+            <a:off x="365760" y="1325880"/>
+            <a:ext cx="1737360" cy="777240"/>
+          </a:xfrm>
+          <a:prstGeom prst="rect">
+            <a:avLst/>
+          </a:prstGeom>
+          <a:solidFill>
+            <a:srgbClr val="F2F2F2"/>
+          </a:solidFill>
+          <a:ln w="12700">
+            <a:solidFill>
+              <a:srgbClr val="BFBFBF"/>
+            </a:solidFill>
+          </a:ln>
+          <a:effectLst/>
+        </p:spPr>
+        <p:style>
+          <a:lnRef idx="1">
+            <a:schemeClr val="accent1"/>
+          </a:lnRef>
+          <a:fillRef idx="3">
+            <a:schemeClr val="accent1"/>
+          </a:fillRef>
+          <a:effectRef idx="2">
+            <a:schemeClr val="accent1"/>
+          </a:effectRef>
+          <a:fontRef idx="minor">
+            <a:schemeClr val="lt1"/>
+          </a:fontRef>
+        </p:style>
+        <p:txBody>
+          <a:bodyPr rtlCol="0" anchor="ctr" wrap="square" lIns="73152" rIns="73152" tIns="36576" bIns="36576"/>
+          <a:lstStyle/>
+          <a:p>
+            <a:pPr algn="ctr">
+              <a:spcBef>
+                <a:spcPts val="0"/>
+              </a:spcBef>
+              <a:spcAft>
+                <a:spcPts val="200"/>
+              </a:spcAft>
+            </a:pPr>
+            <a:r>
+              <a:rPr sz="1200" b="1">
+                <a:solidFill>
+                  <a:srgbClr val="1F4E79"/>
+                </a:solidFill>
+                <a:latin typeface="Calibri"/>
+              </a:rPr>
+              <a:t>Incident</a:t>
+            </a:r>
+          </a:p>
+          <a:p>
+            <a:pPr algn="ctr">
+              <a:spcBef>
+                <a:spcPts val="0"/>
+              </a:spcBef>
+              <a:spcAft>
+                <a:spcPts val="0"/>
+              </a:spcAft>
+            </a:pPr>
+            <a:r>
+              <a:rPr sz="1200" b="1">
+                <a:solidFill>
+                  <a:srgbClr val="1F4E79"/>
+                </a:solidFill>
+                <a:latin typeface="Calibri"/>
+              </a:rPr>
+              <a:t>alert</a:t>
+            </a:r>
+          </a:p>
+        </p:txBody>
+      </p:sp>
+      <p:sp>
+        <p:nvSpPr>
+          <p:cNvPr id="12" name="Rectangle 11"/>
+          <p:cNvSpPr/>
+          <p:nvPr/>
+        </p:nvSpPr>
+        <p:spPr>
+          <a:xfrm>
+            <a:off x="2267712" y="1325880"/>
+            <a:ext cx="1737360" cy="777240"/>
+          </a:xfrm>
+          <a:prstGeom prst="rect">
+            <a:avLst/>
+          </a:prstGeom>
+          <a:solidFill>
+            <a:srgbClr val="F2F2F2"/>
+          </a:solidFill>
+          <a:ln w="12700">
+            <a:solidFill>
+              <a:srgbClr val="BFBFBF"/>
+            </a:solidFill>
+          </a:ln>
+          <a:effectLst/>
+        </p:spPr>
+        <p:style>
+          <a:lnRef idx="1">
+            <a:schemeClr val="accent1"/>
+          </a:lnRef>
+          <a:fillRef idx="3">
+            <a:schemeClr val="accent1"/>
+          </a:fillRef>
+          <a:effectRef idx="2">
+            <a:schemeClr val="accent1"/>
+          </a:effectRef>
+          <a:fontRef idx="minor">
+            <a:schemeClr val="lt1"/>
+          </a:fontRef>
+        </p:style>
+        <p:txBody>
+          <a:bodyPr rtlCol="0" anchor="ctr" wrap="square" lIns="73152" rIns="73152" tIns="36576" bIns="36576"/>
+          <a:lstStyle/>
+          <a:p>
+            <a:pPr algn="ctr">
+              <a:spcBef>
+                <a:spcPts val="0"/>
+              </a:spcBef>
+              <a:spcAft>
+                <a:spcPts val="200"/>
+              </a:spcAft>
+            </a:pPr>
+            <a:r>
+              <a:rPr sz="1200" b="1">
+                <a:solidFill>
+                  <a:srgbClr val="1F4E79"/>
+                </a:solidFill>
+                <a:latin typeface="Calibri"/>
+              </a:rPr>
+              <a:t>IBM MQ</a:t>
+            </a:r>
+          </a:p>
+          <a:p>
+            <a:pPr algn="ctr">
+              <a:spcBef>
+                <a:spcPts val="0"/>
+              </a:spcBef>
+              <a:spcAft>
+                <a:spcPts val="0"/>
+              </a:spcAft>
+            </a:pPr>
+            <a:r>
+              <a:rPr sz="1200" b="1">
+                <a:solidFill>
+                  <a:srgbClr val="1F4E79"/>
+                </a:solidFill>
+                <a:latin typeface="Calibri"/>
+              </a:rPr>
+              <a:t>data</a:t>
+            </a:r>
+          </a:p>
+        </p:txBody>
+      </p:sp>
+      <p:sp>
+        <p:nvSpPr>
+          <p:cNvPr id="13" name="Rectangle 12"/>
+          <p:cNvSpPr/>
+          <p:nvPr/>
+        </p:nvSpPr>
+        <p:spPr>
+          <a:xfrm>
+            <a:off x="4169664" y="1325880"/>
+            <a:ext cx="1737360" cy="777240"/>
+          </a:xfrm>
+          <a:prstGeom prst="rect">
+            <a:avLst/>
+          </a:prstGeom>
+          <a:solidFill>
+            <a:srgbClr val="F2F2F2"/>
+          </a:solidFill>
+          <a:ln w="12700">
+            <a:solidFill>
+              <a:srgbClr val="BFBFBF"/>
+            </a:solidFill>
+          </a:ln>
+          <a:effectLst/>
+        </p:spPr>
+        <p:style>
+          <a:lnRef idx="1">
+            <a:schemeClr val="accent1"/>
+          </a:lnRef>
+          <a:fillRef idx="3">
+            <a:schemeClr val="accent1"/>
+          </a:fillRef>
+          <a:effectRef idx="2">
+            <a:schemeClr val="accent1"/>
+          </a:effectRef>
+          <a:fontRef idx="minor">
+            <a:schemeClr val="lt1"/>
+          </a:fontRef>
+        </p:style>
+        <p:txBody>
+          <a:bodyPr rtlCol="0" anchor="ctr" wrap="square" lIns="73152" rIns="73152" tIns="36576" bIns="36576"/>
+          <a:lstStyle/>
+          <a:p>
+            <a:pPr algn="ctr">
+              <a:spcBef>
+                <a:spcPts val="0"/>
+              </a:spcBef>
+              <a:spcAft>
+                <a:spcPts val="200"/>
+              </a:spcAft>
+            </a:pPr>
+            <a:r>
+              <a:rPr sz="1200" b="1">
+                <a:solidFill>
+                  <a:srgbClr val="1F4E79"/>
+                </a:solidFill>
+                <a:latin typeface="Calibri"/>
+              </a:rPr>
+              <a:t>IBM ACE</a:t>
+            </a:r>
+          </a:p>
+          <a:p>
+            <a:pPr algn="ctr">
+              <a:spcBef>
+                <a:spcPts val="0"/>
+              </a:spcBef>
+              <a:spcAft>
+                <a:spcPts val="0"/>
+              </a:spcAft>
+            </a:pPr>
+            <a:r>
+              <a:rPr sz="1200" b="1">
+                <a:solidFill>
+                  <a:srgbClr val="1F4E79"/>
+                </a:solidFill>
+                <a:latin typeface="Calibri"/>
+              </a:rPr>
+              <a:t>logs</a:t>
+            </a:r>
+          </a:p>
+        </p:txBody>
+      </p:sp>
+      <p:sp>
+        <p:nvSpPr>
+          <p:cNvPr id="14" name="Rectangle 13"/>
+          <p:cNvSpPr/>
+          <p:nvPr/>
+        </p:nvSpPr>
+        <p:spPr>
+          <a:xfrm>
+            <a:off x="6071616" y="1325880"/>
+            <a:ext cx="1737360" cy="777240"/>
+          </a:xfrm>
+          <a:prstGeom prst="rect">
+            <a:avLst/>
+          </a:prstGeom>
+          <a:solidFill>
+            <a:srgbClr val="F2F2F2"/>
+          </a:solidFill>
+          <a:ln w="12700">
+            <a:solidFill>
+              <a:srgbClr val="BFBFBF"/>
+            </a:solidFill>
+          </a:ln>
+          <a:effectLst/>
+        </p:spPr>
+        <p:style>
+          <a:lnRef idx="1">
+            <a:schemeClr val="accent1"/>
+          </a:lnRef>
+          <a:fillRef idx="3">
+            <a:schemeClr val="accent1"/>
+          </a:fillRef>
+          <a:effectRef idx="2">
+            <a:schemeClr val="accent1"/>
+          </a:effectRef>
+          <a:fontRef idx="minor">
+            <a:schemeClr val="lt1"/>
+          </a:fontRef>
+        </p:style>
+        <p:txBody>
+          <a:bodyPr rtlCol="0" anchor="ctr" wrap="square" lIns="73152" rIns="73152" tIns="36576" bIns="36576"/>
+          <a:lstStyle/>
+          <a:p>
+            <a:pPr algn="ctr">
+              <a:spcBef>
+                <a:spcPts val="0"/>
+              </a:spcBef>
+              <a:spcAft>
+                <a:spcPts val="200"/>
+              </a:spcAft>
+            </a:pPr>
+            <a:r>
+              <a:rPr sz="1200" b="1">
+                <a:solidFill>
+                  <a:srgbClr val="1F4E79"/>
+                </a:solidFill>
+                <a:latin typeface="Calibri"/>
+              </a:rPr>
+              <a:t>Application</a:t>
+            </a:r>
+          </a:p>
+          <a:p>
+            <a:pPr algn="ctr">
+              <a:spcBef>
+                <a:spcPts val="0"/>
+              </a:spcBef>
+              <a:spcAft>
+                <a:spcPts val="0"/>
+              </a:spcAft>
+            </a:pPr>
+            <a:r>
+              <a:rPr sz="1200" b="1">
+                <a:solidFill>
+                  <a:srgbClr val="1F4E79"/>
+                </a:solidFill>
+                <a:latin typeface="Calibri"/>
+              </a:rPr>
+              <a:t>logs</a:t>
+            </a:r>
+          </a:p>
+        </p:txBody>
+      </p:sp>
+      <p:sp>
+        <p:nvSpPr>
+          <p:cNvPr id="15" name="Rectangle 14"/>
+          <p:cNvSpPr/>
+          <p:nvPr/>
+        </p:nvSpPr>
+        <p:spPr>
+          <a:xfrm>
+            <a:off x="7973568" y="1325880"/>
+            <a:ext cx="1737360" cy="777240"/>
+          </a:xfrm>
+          <a:prstGeom prst="rect">
+            <a:avLst/>
+          </a:prstGeom>
+          <a:solidFill>
+            <a:srgbClr val="F2F2F2"/>
+          </a:solidFill>
+          <a:ln w="12700">
+            <a:solidFill>
+              <a:srgbClr val="BFBFBF"/>
+            </a:solidFill>
+          </a:ln>
+          <a:effectLst/>
+        </p:spPr>
+        <p:style>
+          <a:lnRef idx="1">
+            <a:schemeClr val="accent1"/>
+          </a:lnRef>
+          <a:fillRef idx="3">
+            <a:schemeClr val="accent1"/>
+          </a:fillRef>
+          <a:effectRef idx="2">
+            <a:schemeClr val="accent1"/>
+          </a:effectRef>
+          <a:fontRef idx="minor">
+            <a:schemeClr val="lt1"/>
+          </a:fontRef>
+        </p:style>
+        <p:txBody>
+          <a:bodyPr rtlCol="0" anchor="ctr" wrap="square" lIns="73152" rIns="73152" tIns="36576" bIns="36576"/>
+          <a:lstStyle/>
+          <a:p>
+            <a:pPr algn="ctr">
+              <a:spcBef>
+                <a:spcPts val="0"/>
+              </a:spcBef>
+              <a:spcAft>
+                <a:spcPts val="200"/>
+              </a:spcAft>
+            </a:pPr>
+            <a:r>
+              <a:rPr sz="1200" b="1">
+                <a:solidFill>
+                  <a:srgbClr val="1F4E79"/>
+                </a:solidFill>
+                <a:latin typeface="Calibri"/>
+              </a:rPr>
+              <a:t>Historical</a:t>
+            </a:r>
+          </a:p>
+          <a:p>
+            <a:pPr algn="ctr">
+              <a:spcBef>
+                <a:spcPts val="0"/>
+              </a:spcBef>
+              <a:spcAft>
+                <a:spcPts val="0"/>
+              </a:spcAft>
+            </a:pPr>
+            <a:r>
+              <a:rPr sz="1200" b="1">
+                <a:solidFill>
+                  <a:srgbClr val="1F4E79"/>
+                </a:solidFill>
+                <a:latin typeface="Calibri"/>
+              </a:rPr>
+              <a:t>incidents</a:t>
+            </a:r>
+          </a:p>
+        </p:txBody>
+      </p:sp>
+      <p:sp>
+        <p:nvSpPr>
+          <p:cNvPr id="16" name="Rectangle 15"/>
+          <p:cNvSpPr/>
+          <p:nvPr/>
+        </p:nvSpPr>
+        <p:spPr>
+          <a:xfrm>
+            <a:off x="9875520" y="1325880"/>
+            <a:ext cx="1737360" cy="777240"/>
+          </a:xfrm>
+          <a:prstGeom prst="rect">
+            <a:avLst/>
+          </a:prstGeom>
+          <a:solidFill>
+            <a:srgbClr val="F2F2F2"/>
+          </a:solidFill>
+          <a:ln w="12700">
+            <a:solidFill>
+              <a:srgbClr val="BFBFBF"/>
+            </a:solidFill>
+          </a:ln>
+          <a:effectLst/>
+        </p:spPr>
+        <p:style>
+          <a:lnRef idx="1">
+            <a:schemeClr val="accent1"/>
+          </a:lnRef>
+          <a:fillRef idx="3">
+            <a:schemeClr val="accent1"/>
+          </a:fillRef>
+          <a:effectRef idx="2">
+            <a:schemeClr val="accent1"/>
+          </a:effectRef>
+          <a:fontRef idx="minor">
+            <a:schemeClr val="lt1"/>
+          </a:fontRef>
+        </p:style>
+        <p:txBody>
+          <a:bodyPr rtlCol="0" anchor="ctr" wrap="square" lIns="73152" rIns="73152" tIns="36576" bIns="36576"/>
+          <a:lstStyle/>
+          <a:p>
+            <a:pPr algn="ctr">
+              <a:spcBef>
+                <a:spcPts val="0"/>
+              </a:spcBef>
+              <a:spcAft>
+                <a:spcPts val="200"/>
+              </a:spcAft>
+            </a:pPr>
+            <a:r>
+              <a:rPr sz="1200" b="1">
+                <a:solidFill>
+                  <a:srgbClr val="1F4E79"/>
+                </a:solidFill>
+                <a:latin typeface="Calibri"/>
+              </a:rPr>
+              <a:t>Knowledge /</a:t>
+            </a:r>
+          </a:p>
+          <a:p>
+            <a:pPr algn="ctr">
+              <a:spcBef>
+                <a:spcPts val="0"/>
+              </a:spcBef>
+              <a:spcAft>
+                <a:spcPts val="0"/>
+              </a:spcAft>
+            </a:pPr>
+            <a:r>
+              <a:rPr sz="1200" b="1">
+                <a:solidFill>
+                  <a:srgbClr val="1F4E79"/>
+                </a:solidFill>
+                <a:latin typeface="Calibri"/>
+              </a:rPr>
+              <a:t>runbooks</a:t>
+            </a:r>
+          </a:p>
+        </p:txBody>
+      </p:sp>
+      <p:sp>
+        <p:nvSpPr>
+          <p:cNvPr id="17" name="Down Arrow 16"/>
+          <p:cNvSpPr/>
+          <p:nvPr/>
+        </p:nvSpPr>
+        <p:spPr>
+          <a:xfrm>
+            <a:off x="5897880" y="2176272"/>
+            <a:ext cx="256032" cy="201168"/>
+          </a:xfrm>
+          <a:prstGeom prst="downArrow">
+            <a:avLst/>
+          </a:prstGeom>
+          <a:solidFill>
+            <a:srgbClr val="2E75B6"/>
+          </a:solidFill>
+          <a:ln>
+            <a:noFill/>
+          </a:ln>
+          <a:effectLst/>
+        </p:spPr>
+        <p:style>
+          <a:lnRef idx="1">
+            <a:schemeClr val="accent1"/>
+          </a:lnRef>
+          <a:fillRef idx="3">
+            <a:schemeClr val="accent1"/>
+          </a:fillRef>
+          <a:effectRef idx="2">
+            <a:schemeClr val="accent1"/>
+          </a:effectRef>
+          <a:fontRef idx="minor">
+            <a:schemeClr val="lt1"/>
+          </a:fontRef>
+        </p:style>
+        <p:txBody>
+          <a:bodyPr rtlCol="0" anchor="ctr"/>
+          <a:lstStyle/>
+          <a:p>
+            <a:pPr algn="ctr"/>
+          </a:p>
+        </p:txBody>
+      </p:sp>
+      <p:sp>
+        <p:nvSpPr>
+          <p:cNvPr id="18" name="Rectangle 17"/>
+          <p:cNvSpPr/>
+          <p:nvPr/>
+        </p:nvSpPr>
+        <p:spPr>
+          <a:xfrm>
+            <a:off x="365760" y="2450592"/>
+            <a:ext cx="11430000" cy="1691640"/>
+          </a:xfrm>
+          <a:prstGeom prst="rect">
+            <a:avLst/>
+          </a:prstGeom>
+          <a:solidFill>
+            <a:srgbClr val="DEEBF7"/>
+          </a:solidFill>
+          <a:ln w="12700">
+            <a:solidFill>
+              <a:srgbClr val="2E75B6"/>
+            </a:solidFill>
+          </a:ln>
+          <a:effectLst/>
+        </p:spPr>
+        <p:style>
+          <a:lnRef idx="1">
+            <a:schemeClr val="accent1"/>
+          </a:lnRef>
+          <a:fillRef idx="3">
+            <a:schemeClr val="accent1"/>
+          </a:fillRef>
+          <a:effectRef idx="2">
+            <a:schemeClr val="accent1"/>
+          </a:effectRef>
+          <a:fontRef idx="minor">
+            <a:schemeClr val="lt1"/>
+          </a:fontRef>
+        </p:style>
+        <p:txBody>
+          <a:bodyPr rtlCol="0" anchor="ctr"/>
+          <a:lstStyle/>
+          <a:p>
+            <a:pPr algn="ctr"/>
+          </a:p>
+        </p:txBody>
+      </p:sp>
+      <p:sp>
+        <p:nvSpPr>
+          <p:cNvPr id="19" name="TextBox 18"/>
+          <p:cNvSpPr txBox="1"/>
+          <p:nvPr/>
+        </p:nvSpPr>
+        <p:spPr>
+          <a:xfrm>
+            <a:off x="502920" y="2514600"/>
+            <a:ext cx="11155680" cy="292608"/>
+          </a:xfrm>
+          <a:prstGeom prst="rect">
+            <a:avLst/>
+          </a:prstGeom>
+          <a:noFill/>
+        </p:spPr>
+        <p:txBody>
+          <a:bodyPr wrap="square" anchor="t"/>
+          <a:lstStyle/>
+          <a:p>
+            <a:pPr algn="l">
+              <a:spcBef>
+                <a:spcPts val="0"/>
+              </a:spcBef>
+              <a:spcAft>
+                <a:spcPts val="0"/>
+              </a:spcAft>
+            </a:pPr>
+            <a:r>
+              <a:rPr sz="1600" b="1">
+                <a:solidFill>
+                  <a:srgbClr val="1F4E79"/>
+                </a:solidFill>
+                <a:latin typeface="Calibri"/>
+              </a:rPr>
+              <a:t>AI Incident Copilot   —   proposed intelligence layer</a:t>
+            </a:r>
+          </a:p>
+        </p:txBody>
+      </p:sp>
+      <p:sp>
+        <p:nvSpPr>
+          <p:cNvPr id="20" name="Rectangle 19"/>
+          <p:cNvSpPr/>
+          <p:nvPr/>
+        </p:nvSpPr>
+        <p:spPr>
+          <a:xfrm>
+            <a:off x="640080" y="2907792"/>
+            <a:ext cx="2606040" cy="1024128"/>
+          </a:xfrm>
+          <a:prstGeom prst="rect">
+            <a:avLst/>
+          </a:prstGeom>
+          <a:solidFill>
+            <a:srgbClr val="FFFFFF"/>
+          </a:solidFill>
+          <a:ln w="12700">
+            <a:solidFill>
+              <a:srgbClr val="2E75B6"/>
+            </a:solidFill>
+          </a:ln>
+          <a:effectLst/>
+        </p:spPr>
+        <p:style>
+          <a:lnRef idx="1">
+            <a:schemeClr val="accent1"/>
+          </a:lnRef>
+          <a:fillRef idx="3">
+            <a:schemeClr val="accent1"/>
+          </a:fillRef>
+          <a:effectRef idx="2">
+            <a:schemeClr val="accent1"/>
+          </a:effectRef>
+          <a:fontRef idx="minor">
+            <a:schemeClr val="lt1"/>
+          </a:fontRef>
+        </p:style>
+        <p:txBody>
+          <a:bodyPr rtlCol="0" anchor="ctr" wrap="square" lIns="73152" rIns="73152" tIns="36576" bIns="36576"/>
+          <a:lstStyle/>
+          <a:p>
+            <a:pPr algn="ctr">
+              <a:spcBef>
+                <a:spcPts val="0"/>
+              </a:spcBef>
+              <a:spcAft>
+                <a:spcPts val="200"/>
+              </a:spcAft>
+            </a:pPr>
+            <a:r>
+              <a:rPr sz="1100" b="1">
+                <a:solidFill>
+                  <a:srgbClr val="2E75B6"/>
+                </a:solidFill>
+                <a:latin typeface="Calibri"/>
+              </a:rPr>
+              <a:t>1</a:t>
+            </a:r>
+          </a:p>
+          <a:p>
+            <a:pPr algn="ctr">
+              <a:spcBef>
+                <a:spcPts val="0"/>
+              </a:spcBef>
+              <a:spcAft>
+                <a:spcPts val="0"/>
+              </a:spcAft>
+            </a:pPr>
+            <a:r>
+              <a:rPr sz="1600" b="1">
+                <a:solidFill>
+                  <a:srgbClr val="1F4E79"/>
+                </a:solidFill>
+                <a:latin typeface="Calibri"/>
+              </a:rPr>
+              <a:t>Analyze</a:t>
+            </a:r>
+          </a:p>
+        </p:txBody>
+      </p:sp>
+      <p:sp>
+        <p:nvSpPr>
+          <p:cNvPr id="21" name="Rectangle 20"/>
+          <p:cNvSpPr/>
+          <p:nvPr/>
+        </p:nvSpPr>
+        <p:spPr>
+          <a:xfrm>
+            <a:off x="3410712" y="2907792"/>
+            <a:ext cx="2606040" cy="1024128"/>
+          </a:xfrm>
+          <a:prstGeom prst="rect">
+            <a:avLst/>
+          </a:prstGeom>
+          <a:solidFill>
+            <a:srgbClr val="FFFFFF"/>
+          </a:solidFill>
+          <a:ln w="12700">
+            <a:solidFill>
+              <a:srgbClr val="2E75B6"/>
+            </a:solidFill>
+          </a:ln>
+          <a:effectLst/>
+        </p:spPr>
+        <p:style>
+          <a:lnRef idx="1">
+            <a:schemeClr val="accent1"/>
+          </a:lnRef>
+          <a:fillRef idx="3">
+            <a:schemeClr val="accent1"/>
+          </a:fillRef>
+          <a:effectRef idx="2">
+            <a:schemeClr val="accent1"/>
+          </a:effectRef>
+          <a:fontRef idx="minor">
+            <a:schemeClr val="lt1"/>
+          </a:fontRef>
+        </p:style>
+        <p:txBody>
+          <a:bodyPr rtlCol="0" anchor="ctr" wrap="square" lIns="73152" rIns="73152" tIns="36576" bIns="36576"/>
+          <a:lstStyle/>
+          <a:p>
+            <a:pPr algn="ctr">
+              <a:spcBef>
+                <a:spcPts val="0"/>
+              </a:spcBef>
+              <a:spcAft>
+                <a:spcPts val="200"/>
+              </a:spcAft>
+            </a:pPr>
+            <a:r>
+              <a:rPr sz="1100" b="1">
+                <a:solidFill>
+                  <a:srgbClr val="2E75B6"/>
+                </a:solidFill>
+                <a:latin typeface="Calibri"/>
+              </a:rPr>
+              <a:t>2</a:t>
+            </a:r>
+          </a:p>
+          <a:p>
+            <a:pPr algn="ctr">
+              <a:spcBef>
+                <a:spcPts val="0"/>
+              </a:spcBef>
+              <a:spcAft>
+                <a:spcPts val="0"/>
+              </a:spcAft>
+            </a:pPr>
+            <a:r>
+              <a:rPr sz="1600" b="1">
+                <a:solidFill>
+                  <a:srgbClr val="1F4E79"/>
+                </a:solidFill>
+                <a:latin typeface="Calibri"/>
+              </a:rPr>
+              <a:t>Correlate</a:t>
+            </a:r>
+          </a:p>
+        </p:txBody>
+      </p:sp>
+      <p:sp>
+        <p:nvSpPr>
+          <p:cNvPr id="22" name="Rectangle 21"/>
+          <p:cNvSpPr/>
+          <p:nvPr/>
+        </p:nvSpPr>
+        <p:spPr>
+          <a:xfrm>
+            <a:off x="6181344" y="2907792"/>
+            <a:ext cx="2606040" cy="1024128"/>
+          </a:xfrm>
+          <a:prstGeom prst="rect">
+            <a:avLst/>
+          </a:prstGeom>
+          <a:solidFill>
+            <a:srgbClr val="FFFFFF"/>
+          </a:solidFill>
+          <a:ln w="12700">
+            <a:solidFill>
+              <a:srgbClr val="2E75B6"/>
+            </a:solidFill>
+          </a:ln>
+          <a:effectLst/>
+        </p:spPr>
+        <p:style>
+          <a:lnRef idx="1">
+            <a:schemeClr val="accent1"/>
+          </a:lnRef>
+          <a:fillRef idx="3">
+            <a:schemeClr val="accent1"/>
+          </a:fillRef>
+          <a:effectRef idx="2">
+            <a:schemeClr val="accent1"/>
+          </a:effectRef>
+          <a:fontRef idx="minor">
+            <a:schemeClr val="lt1"/>
+          </a:fontRef>
+        </p:style>
+        <p:txBody>
+          <a:bodyPr rtlCol="0" anchor="ctr" wrap="square" lIns="73152" rIns="73152" tIns="36576" bIns="36576"/>
+          <a:lstStyle/>
+          <a:p>
+            <a:pPr algn="ctr">
+              <a:spcBef>
+                <a:spcPts val="0"/>
+              </a:spcBef>
+              <a:spcAft>
+                <a:spcPts val="200"/>
+              </a:spcAft>
+            </a:pPr>
+            <a:r>
+              <a:rPr sz="1100" b="1">
+                <a:solidFill>
+                  <a:srgbClr val="2E75B6"/>
+                </a:solidFill>
+                <a:latin typeface="Calibri"/>
+              </a:rPr>
+              <a:t>3</a:t>
+            </a:r>
+          </a:p>
+          <a:p>
+            <a:pPr algn="ctr">
+              <a:spcBef>
+                <a:spcPts val="0"/>
+              </a:spcBef>
+              <a:spcAft>
+                <a:spcPts val="0"/>
+              </a:spcAft>
+            </a:pPr>
+            <a:r>
+              <a:rPr sz="1600" b="1">
+                <a:solidFill>
+                  <a:srgbClr val="1F4E79"/>
+                </a:solidFill>
+                <a:latin typeface="Calibri"/>
+              </a:rPr>
+              <a:t>Find patterns</a:t>
+            </a:r>
+          </a:p>
+        </p:txBody>
+      </p:sp>
+      <p:sp>
+        <p:nvSpPr>
+          <p:cNvPr id="23" name="Rectangle 22"/>
+          <p:cNvSpPr/>
+          <p:nvPr/>
+        </p:nvSpPr>
+        <p:spPr>
+          <a:xfrm>
+            <a:off x="8951976" y="2907792"/>
+            <a:ext cx="2606040" cy="1024128"/>
+          </a:xfrm>
+          <a:prstGeom prst="rect">
+            <a:avLst/>
+          </a:prstGeom>
+          <a:solidFill>
+            <a:srgbClr val="FFFFFF"/>
+          </a:solidFill>
+          <a:ln w="12700">
+            <a:solidFill>
+              <a:srgbClr val="2E75B6"/>
+            </a:solidFill>
+          </a:ln>
+          <a:effectLst/>
+        </p:spPr>
+        <p:style>
+          <a:lnRef idx="1">
+            <a:schemeClr val="accent1"/>
+          </a:lnRef>
+          <a:fillRef idx="3">
+            <a:schemeClr val="accent1"/>
+          </a:fillRef>
+          <a:effectRef idx="2">
+            <a:schemeClr val="accent1"/>
+          </a:effectRef>
+          <a:fontRef idx="minor">
+            <a:schemeClr val="lt1"/>
+          </a:fontRef>
+        </p:style>
+        <p:txBody>
+          <a:bodyPr rtlCol="0" anchor="ctr" wrap="square" lIns="73152" rIns="73152" tIns="36576" bIns="36576"/>
+          <a:lstStyle/>
+          <a:p>
+            <a:pPr algn="ctr">
+              <a:spcBef>
+                <a:spcPts val="0"/>
+              </a:spcBef>
+              <a:spcAft>
+                <a:spcPts val="200"/>
+              </a:spcAft>
+            </a:pPr>
+            <a:r>
+              <a:rPr sz="1100" b="1">
+                <a:solidFill>
+                  <a:srgbClr val="2E75B6"/>
+                </a:solidFill>
+                <a:latin typeface="Calibri"/>
+              </a:rPr>
+              <a:t>4</a:t>
+            </a:r>
+          </a:p>
+          <a:p>
+            <a:pPr algn="ctr">
+              <a:spcBef>
+                <a:spcPts val="0"/>
+              </a:spcBef>
+              <a:spcAft>
+                <a:spcPts val="0"/>
+              </a:spcAft>
+            </a:pPr>
+            <a:r>
+              <a:rPr sz="1600" b="1">
+                <a:solidFill>
+                  <a:srgbClr val="1F4E79"/>
+                </a:solidFill>
+                <a:latin typeface="Calibri"/>
+              </a:rPr>
+              <a:t>Recommend</a:t>
+            </a:r>
+          </a:p>
+        </p:txBody>
+      </p:sp>
+      <p:sp>
+        <p:nvSpPr>
+          <p:cNvPr id="24" name="Down Arrow 23"/>
+          <p:cNvSpPr/>
+          <p:nvPr/>
+        </p:nvSpPr>
+        <p:spPr>
+          <a:xfrm>
+            <a:off x="5897880" y="4206240"/>
+            <a:ext cx="256032" cy="201168"/>
+          </a:xfrm>
+          <a:prstGeom prst="downArrow">
+            <a:avLst/>
+          </a:prstGeom>
+          <a:solidFill>
+            <a:srgbClr val="2E75B6"/>
+          </a:solidFill>
+          <a:ln>
+            <a:noFill/>
+          </a:ln>
+          <a:effectLst/>
+        </p:spPr>
+        <p:style>
+          <a:lnRef idx="1">
+            <a:schemeClr val="accent1"/>
+          </a:lnRef>
+          <a:fillRef idx="3">
+            <a:schemeClr val="accent1"/>
+          </a:fillRef>
+          <a:effectRef idx="2">
+            <a:schemeClr val="accent1"/>
+          </a:effectRef>
+          <a:fontRef idx="minor">
+            <a:schemeClr val="lt1"/>
+          </a:fontRef>
+        </p:style>
+        <p:txBody>
+          <a:bodyPr rtlCol="0" anchor="ctr"/>
+          <a:lstStyle/>
+          <a:p>
+            <a:pPr algn="ctr"/>
+          </a:p>
+        </p:txBody>
+      </p:sp>
+      <p:sp>
+        <p:nvSpPr>
+          <p:cNvPr id="25" name="Rectangle 24"/>
+          <p:cNvSpPr/>
+          <p:nvPr/>
+        </p:nvSpPr>
+        <p:spPr>
+          <a:xfrm>
+            <a:off x="365760" y="4480560"/>
+            <a:ext cx="5532120" cy="960120"/>
+          </a:xfrm>
+          <a:prstGeom prst="rect">
+            <a:avLst/>
+          </a:prstGeom>
+          <a:solidFill>
+            <a:srgbClr val="E2EFDA"/>
+          </a:solidFill>
+          <a:ln w="12700">
+            <a:solidFill>
+              <a:srgbClr val="375E37"/>
+            </a:solidFill>
+          </a:ln>
+          <a:effectLst/>
+        </p:spPr>
+        <p:style>
+          <a:lnRef idx="1">
+            <a:schemeClr val="accent1"/>
+          </a:lnRef>
+          <a:fillRef idx="3">
+            <a:schemeClr val="accent1"/>
+          </a:fillRef>
+          <a:effectRef idx="2">
+            <a:schemeClr val="accent1"/>
+          </a:effectRef>
+          <a:fontRef idx="minor">
+            <a:schemeClr val="lt1"/>
+          </a:fontRef>
+        </p:style>
+        <p:txBody>
+          <a:bodyPr rtlCol="0" anchor="ctr" wrap="square" lIns="73152" rIns="73152" tIns="36576" bIns="36576"/>
+          <a:lstStyle/>
+          <a:p>
+            <a:pPr algn="ctr">
+              <a:spcBef>
+                <a:spcPts val="0"/>
+              </a:spcBef>
+              <a:spcAft>
+                <a:spcPts val="200"/>
+              </a:spcAft>
+            </a:pPr>
+            <a:r>
+              <a:rPr sz="1600" b="1">
+                <a:solidFill>
+                  <a:srgbClr val="375E37"/>
+                </a:solidFill>
+                <a:latin typeface="Calibri"/>
+              </a:rPr>
+              <a:t>Engineer validation</a:t>
+            </a:r>
+          </a:p>
+          <a:p>
+            <a:pPr algn="ctr">
+              <a:spcBef>
+                <a:spcPts val="0"/>
+              </a:spcBef>
+              <a:spcAft>
+                <a:spcPts val="0"/>
+              </a:spcAft>
+            </a:pPr>
+            <a:r>
+              <a:rPr sz="1200" b="0">
+                <a:solidFill>
+                  <a:srgbClr val="2F2F2F"/>
+                </a:solidFill>
+                <a:latin typeface="Calibri"/>
+              </a:rPr>
+              <a:t>Review findings, confirm likely cause, choose the action</a:t>
+            </a:r>
+          </a:p>
+        </p:txBody>
+      </p:sp>
+      <p:sp>
+        <p:nvSpPr>
+          <p:cNvPr id="26" name="Right Arrow 25"/>
+          <p:cNvSpPr/>
+          <p:nvPr/>
+        </p:nvSpPr>
+        <p:spPr>
+          <a:xfrm>
+            <a:off x="5989320" y="4828032"/>
+            <a:ext cx="347472" cy="219456"/>
+          </a:xfrm>
+          <a:prstGeom prst="rightArrow">
+            <a:avLst/>
+          </a:prstGeom>
+          <a:solidFill>
+            <a:srgbClr val="2E75B6"/>
+          </a:solidFill>
+          <a:ln>
+            <a:noFill/>
+          </a:ln>
+          <a:effectLst/>
+        </p:spPr>
+        <p:style>
+          <a:lnRef idx="1">
+            <a:schemeClr val="accent1"/>
+          </a:lnRef>
+          <a:fillRef idx="3">
+            <a:schemeClr val="accent1"/>
+          </a:fillRef>
+          <a:effectRef idx="2">
+            <a:schemeClr val="accent1"/>
+          </a:effectRef>
+          <a:fontRef idx="minor">
+            <a:schemeClr val="lt1"/>
+          </a:fontRef>
+        </p:style>
+        <p:txBody>
+          <a:bodyPr rtlCol="0" anchor="ctr"/>
+          <a:lstStyle/>
+          <a:p>
+            <a:pPr algn="ctr"/>
+          </a:p>
+        </p:txBody>
+      </p:sp>
+      <p:sp>
+        <p:nvSpPr>
+          <p:cNvPr id="27" name="Rectangle 26"/>
+          <p:cNvSpPr/>
+          <p:nvPr/>
+        </p:nvSpPr>
+        <p:spPr>
+          <a:xfrm>
+            <a:off x="6446520" y="4480560"/>
+            <a:ext cx="5349240" cy="960120"/>
+          </a:xfrm>
+          <a:prstGeom prst="rect">
+            <a:avLst/>
+          </a:prstGeom>
+          <a:solidFill>
+            <a:srgbClr val="FFFFFF"/>
+          </a:solidFill>
+          <a:ln w="12700">
+            <a:solidFill>
+              <a:srgbClr val="BFBFBF"/>
+            </a:solidFill>
+          </a:ln>
+          <a:effectLst/>
+        </p:spPr>
+        <p:style>
+          <a:lnRef idx="1">
+            <a:schemeClr val="accent1"/>
+          </a:lnRef>
+          <a:fillRef idx="3">
+            <a:schemeClr val="accent1"/>
+          </a:fillRef>
+          <a:effectRef idx="2">
+            <a:schemeClr val="accent1"/>
+          </a:effectRef>
+          <a:fontRef idx="minor">
+            <a:schemeClr val="lt1"/>
+          </a:fontRef>
+        </p:style>
+        <p:txBody>
+          <a:bodyPr rtlCol="0" anchor="ctr" wrap="square" lIns="73152" rIns="73152" tIns="36576" bIns="36576"/>
+          <a:lstStyle/>
+          <a:p>
+            <a:pPr algn="ctr">
+              <a:spcBef>
+                <a:spcPts val="0"/>
+              </a:spcBef>
+              <a:spcAft>
+                <a:spcPts val="200"/>
+              </a:spcAft>
+            </a:pPr>
+            <a:r>
+              <a:rPr sz="1600" b="1">
+                <a:solidFill>
+                  <a:srgbClr val="1F4E79"/>
+                </a:solidFill>
+                <a:latin typeface="Calibri"/>
+              </a:rPr>
+              <a:t>Action / resolution</a:t>
+            </a:r>
+          </a:p>
+          <a:p>
+            <a:pPr algn="ctr">
+              <a:spcBef>
+                <a:spcPts val="0"/>
+              </a:spcBef>
+              <a:spcAft>
+                <a:spcPts val="0"/>
+              </a:spcAft>
+            </a:pPr>
+            <a:r>
+              <a:rPr sz="1200" b="0">
+                <a:solidFill>
+                  <a:srgbClr val="2F2F2F"/>
+                </a:solidFill>
+                <a:latin typeface="Calibri"/>
+              </a:rPr>
+              <a:t>Engineer executes the change — not the AI</a:t>
+            </a:r>
+          </a:p>
+        </p:txBody>
+      </p:sp>
+      <p:sp>
+        <p:nvSpPr>
+          <p:cNvPr id="28" name="Rectangle 27"/>
+          <p:cNvSpPr/>
+          <p:nvPr/>
+        </p:nvSpPr>
+        <p:spPr>
+          <a:xfrm>
+            <a:off x="365760" y="5623560"/>
+            <a:ext cx="11430000" cy="777240"/>
+          </a:xfrm>
+          <a:prstGeom prst="rect">
+            <a:avLst/>
+          </a:prstGeom>
+          <a:solidFill>
+            <a:srgbClr val="FFFFFF"/>
+          </a:solidFill>
+          <a:ln w="15875">
+            <a:solidFill>
+              <a:srgbClr val="1F4E79"/>
+            </a:solidFill>
+          </a:ln>
+          <a:effectLst/>
+        </p:spPr>
+        <p:style>
+          <a:lnRef idx="1">
+            <a:schemeClr val="accent1"/>
+          </a:lnRef>
+          <a:fillRef idx="3">
+            <a:schemeClr val="accent1"/>
+          </a:fillRef>
+          <a:effectRef idx="2">
+            <a:schemeClr val="accent1"/>
+          </a:effectRef>
+          <a:fontRef idx="minor">
+            <a:schemeClr val="lt1"/>
+          </a:fontRef>
+        </p:style>
+        <p:txBody>
+          <a:bodyPr rtlCol="0" anchor="ctr" wrap="square" lIns="201168" rIns="73152" tIns="36576" bIns="36576"/>
+          <a:lstStyle/>
+          <a:p>
+            <a:pPr algn="l">
+              <a:spcBef>
+                <a:spcPts val="0"/>
+              </a:spcBef>
+              <a:spcAft>
+                <a:spcPts val="200"/>
+              </a:spcAft>
+            </a:pPr>
+            <a:r>
+              <a:rPr sz="1500" b="1">
+                <a:solidFill>
+                  <a:srgbClr val="1F4E79"/>
+                </a:solidFill>
+                <a:latin typeface="Calibri"/>
+              </a:rPr>
+              <a:t>The Copilot does not replace the engineer.</a:t>
+            </a:r>
+          </a:p>
+          <a:p>
+            <a:pPr algn="l">
+              <a:spcBef>
+                <a:spcPts val="0"/>
+              </a:spcBef>
+              <a:spcAft>
+                <a:spcPts val="0"/>
+              </a:spcAft>
+            </a:pPr>
+            <a:r>
+              <a:rPr sz="1400" b="0">
+                <a:solidFill>
+                  <a:srgbClr val="2F2F2F"/>
+                </a:solidFill>
+                <a:latin typeface="Calibri"/>
+              </a:rPr>
+              <a:t>It reduces investigation effort and helps the engineer reach the right decision faster.</a:t>
+            </a:r>
+          </a:p>
+        </p:txBody>
+      </p:sp>
     </p:spTree>
   </p:cSld>
   <p:clrMapOvr>
@@ -3218,30 +6808,1864 @@
         <p:nvPr/>
       </p:nvGrpSpPr>
       <p:grpSpPr/>
-      <p:pic>
-        <p:nvPicPr>
-          <p:cNvPr id="2" name="Picture 1" descr="slide-04.png"/>
-          <p:cNvPicPr>
-            <a:picLocks noChangeAspect="1"/>
-          </p:cNvPicPr>
-          <p:nvPr/>
-        </p:nvPicPr>
-        <p:blipFill>
-          <a:blip r:embed="rId2"/>
-          <a:stretch>
-            <a:fillRect/>
-          </a:stretch>
-        </p:blipFill>
+      <p:sp>
+        <p:nvSpPr>
+          <p:cNvPr id="2" name="Rectangle 1"/>
+          <p:cNvSpPr/>
+          <p:nvPr/>
+        </p:nvSpPr>
         <p:spPr>
           <a:xfrm>
             <a:off x="0" y="0"/>
-            <a:ext cx="12191999" cy="6858000"/>
-          </a:xfrm>
-          <a:prstGeom prst="rect">
-            <a:avLst/>
-          </a:prstGeom>
-        </p:spPr>
-      </p:pic>
+            <a:ext cx="12191695" cy="384048"/>
+          </a:xfrm>
+          <a:prstGeom prst="rect">
+            <a:avLst/>
+          </a:prstGeom>
+          <a:solidFill>
+            <a:srgbClr val="1F4E79"/>
+          </a:solidFill>
+          <a:ln>
+            <a:noFill/>
+          </a:ln>
+          <a:effectLst/>
+        </p:spPr>
+        <p:style>
+          <a:lnRef idx="1">
+            <a:schemeClr val="accent1"/>
+          </a:lnRef>
+          <a:fillRef idx="3">
+            <a:schemeClr val="accent1"/>
+          </a:fillRef>
+          <a:effectRef idx="2">
+            <a:schemeClr val="accent1"/>
+          </a:effectRef>
+          <a:fontRef idx="minor">
+            <a:schemeClr val="lt1"/>
+          </a:fontRef>
+        </p:style>
+        <p:txBody>
+          <a:bodyPr rtlCol="0" anchor="ctr"/>
+          <a:lstStyle/>
+          <a:p>
+            <a:pPr algn="ctr"/>
+          </a:p>
+        </p:txBody>
+      </p:sp>
+      <p:sp>
+        <p:nvSpPr>
+          <p:cNvPr id="3" name="TextBox 2"/>
+          <p:cNvSpPr txBox="1"/>
+          <p:nvPr/>
+        </p:nvSpPr>
+        <p:spPr>
+          <a:xfrm>
+            <a:off x="320040" y="45720"/>
+            <a:ext cx="6766560" cy="292608"/>
+          </a:xfrm>
+          <a:prstGeom prst="rect">
+            <a:avLst/>
+          </a:prstGeom>
+          <a:noFill/>
+        </p:spPr>
+        <p:txBody>
+          <a:bodyPr wrap="square" anchor="ctr"/>
+          <a:lstStyle/>
+          <a:p>
+            <a:pPr algn="l">
+              <a:spcBef>
+                <a:spcPts val="0"/>
+              </a:spcBef>
+              <a:spcAft>
+                <a:spcPts val="0"/>
+              </a:spcAft>
+            </a:pPr>
+            <a:r>
+              <a:rPr sz="1200" b="0">
+                <a:solidFill>
+                  <a:srgbClr val="FFFFFF"/>
+                </a:solidFill>
+                <a:latin typeface="Calibri"/>
+              </a:rPr>
+              <a:t>Airport Technology  |  Internal Proposal</a:t>
+            </a:r>
+          </a:p>
+        </p:txBody>
+      </p:sp>
+      <p:sp>
+        <p:nvSpPr>
+          <p:cNvPr id="4" name="TextBox 3"/>
+          <p:cNvSpPr txBox="1"/>
+          <p:nvPr/>
+        </p:nvSpPr>
+        <p:spPr>
+          <a:xfrm>
+            <a:off x="8092440" y="45720"/>
+            <a:ext cx="3794760" cy="292608"/>
+          </a:xfrm>
+          <a:prstGeom prst="rect">
+            <a:avLst/>
+          </a:prstGeom>
+          <a:noFill/>
+        </p:spPr>
+        <p:txBody>
+          <a:bodyPr wrap="square" anchor="ctr"/>
+          <a:lstStyle/>
+          <a:p>
+            <a:pPr algn="r">
+              <a:spcBef>
+                <a:spcPts val="0"/>
+              </a:spcBef>
+              <a:spcAft>
+                <a:spcPts val="0"/>
+              </a:spcAft>
+            </a:pPr>
+            <a:r>
+              <a:rPr sz="1300" b="1">
+                <a:solidFill>
+                  <a:srgbClr val="FFFFFF"/>
+                </a:solidFill>
+                <a:latin typeface="Calibri"/>
+              </a:rPr>
+              <a:t>SOURCE INTEGRATE</a:t>
+            </a:r>
+          </a:p>
+        </p:txBody>
+      </p:sp>
+      <p:sp>
+        <p:nvSpPr>
+          <p:cNvPr id="5" name="TextBox 4"/>
+          <p:cNvSpPr txBox="1"/>
+          <p:nvPr/>
+        </p:nvSpPr>
+        <p:spPr>
+          <a:xfrm>
+            <a:off x="365760" y="502920"/>
+            <a:ext cx="11430000" cy="384048"/>
+          </a:xfrm>
+          <a:prstGeom prst="rect">
+            <a:avLst/>
+          </a:prstGeom>
+          <a:noFill/>
+        </p:spPr>
+        <p:txBody>
+          <a:bodyPr wrap="square" anchor="ctr"/>
+          <a:lstStyle/>
+          <a:p>
+            <a:pPr algn="l">
+              <a:spcBef>
+                <a:spcPts val="0"/>
+              </a:spcBef>
+              <a:spcAft>
+                <a:spcPts val="0"/>
+              </a:spcAft>
+            </a:pPr>
+            <a:r>
+              <a:rPr sz="2600" b="1">
+                <a:solidFill>
+                  <a:srgbClr val="1F4E79"/>
+                </a:solidFill>
+                <a:latin typeface="Calibri"/>
+              </a:rPr>
+              <a:t>Example: AODB Incident Investigation</a:t>
+            </a:r>
+          </a:p>
+        </p:txBody>
+      </p:sp>
+      <p:sp>
+        <p:nvSpPr>
+          <p:cNvPr id="6" name="Rectangle 5"/>
+          <p:cNvSpPr/>
+          <p:nvPr/>
+        </p:nvSpPr>
+        <p:spPr>
+          <a:xfrm>
+            <a:off x="365760" y="896112"/>
+            <a:ext cx="1920240" cy="41148"/>
+          </a:xfrm>
+          <a:prstGeom prst="rect">
+            <a:avLst/>
+          </a:prstGeom>
+          <a:solidFill>
+            <a:srgbClr val="2E75B6"/>
+          </a:solidFill>
+          <a:ln>
+            <a:noFill/>
+          </a:ln>
+          <a:effectLst/>
+        </p:spPr>
+        <p:style>
+          <a:lnRef idx="1">
+            <a:schemeClr val="accent1"/>
+          </a:lnRef>
+          <a:fillRef idx="3">
+            <a:schemeClr val="accent1"/>
+          </a:fillRef>
+          <a:effectRef idx="2">
+            <a:schemeClr val="accent1"/>
+          </a:effectRef>
+          <a:fontRef idx="minor">
+            <a:schemeClr val="lt1"/>
+          </a:fontRef>
+        </p:style>
+        <p:txBody>
+          <a:bodyPr rtlCol="0" anchor="ctr"/>
+          <a:lstStyle/>
+          <a:p>
+            <a:pPr algn="ctr"/>
+          </a:p>
+        </p:txBody>
+      </p:sp>
+      <p:sp>
+        <p:nvSpPr>
+          <p:cNvPr id="7" name="Rectangle 6"/>
+          <p:cNvSpPr/>
+          <p:nvPr/>
+        </p:nvSpPr>
+        <p:spPr>
+          <a:xfrm>
+            <a:off x="0" y="6601968"/>
+            <a:ext cx="12191695" cy="256032"/>
+          </a:xfrm>
+          <a:prstGeom prst="rect">
+            <a:avLst/>
+          </a:prstGeom>
+          <a:solidFill>
+            <a:srgbClr val="F2F2F2"/>
+          </a:solidFill>
+          <a:ln>
+            <a:noFill/>
+          </a:ln>
+          <a:effectLst/>
+        </p:spPr>
+        <p:style>
+          <a:lnRef idx="1">
+            <a:schemeClr val="accent1"/>
+          </a:lnRef>
+          <a:fillRef idx="3">
+            <a:schemeClr val="accent1"/>
+          </a:fillRef>
+          <a:effectRef idx="2">
+            <a:schemeClr val="accent1"/>
+          </a:effectRef>
+          <a:fontRef idx="minor">
+            <a:schemeClr val="lt1"/>
+          </a:fontRef>
+        </p:style>
+        <p:txBody>
+          <a:bodyPr rtlCol="0" anchor="ctr"/>
+          <a:lstStyle/>
+          <a:p>
+            <a:pPr algn="ctr"/>
+          </a:p>
+        </p:txBody>
+      </p:sp>
+      <p:sp>
+        <p:nvSpPr>
+          <p:cNvPr id="8" name="TextBox 7"/>
+          <p:cNvSpPr txBox="1"/>
+          <p:nvPr/>
+        </p:nvSpPr>
+        <p:spPr>
+          <a:xfrm>
+            <a:off x="365760" y="6601968"/>
+            <a:ext cx="7772400" cy="256032"/>
+          </a:xfrm>
+          <a:prstGeom prst="rect">
+            <a:avLst/>
+          </a:prstGeom>
+          <a:noFill/>
+        </p:spPr>
+        <p:txBody>
+          <a:bodyPr wrap="square" anchor="ctr"/>
+          <a:lstStyle/>
+          <a:p>
+            <a:pPr algn="l">
+              <a:spcBef>
+                <a:spcPts val="0"/>
+              </a:spcBef>
+              <a:spcAft>
+                <a:spcPts val="0"/>
+              </a:spcAft>
+            </a:pPr>
+            <a:r>
+              <a:rPr sz="1000" b="0">
+                <a:solidFill>
+                  <a:srgbClr val="595959"/>
+                </a:solidFill>
+                <a:latin typeface="Calibri"/>
+              </a:rPr>
+              <a:t>Confidential  |  Human-in-the-loop concept  |  Not an implemented system</a:t>
+            </a:r>
+          </a:p>
+        </p:txBody>
+      </p:sp>
+      <p:sp>
+        <p:nvSpPr>
+          <p:cNvPr id="9" name="TextBox 8"/>
+          <p:cNvSpPr txBox="1"/>
+          <p:nvPr/>
+        </p:nvSpPr>
+        <p:spPr>
+          <a:xfrm>
+            <a:off x="9509760" y="6601968"/>
+            <a:ext cx="2286000" cy="256032"/>
+          </a:xfrm>
+          <a:prstGeom prst="rect">
+            <a:avLst/>
+          </a:prstGeom>
+          <a:noFill/>
+        </p:spPr>
+        <p:txBody>
+          <a:bodyPr wrap="square" anchor="ctr"/>
+          <a:lstStyle/>
+          <a:p>
+            <a:pPr algn="r">
+              <a:spcBef>
+                <a:spcPts val="0"/>
+              </a:spcBef>
+              <a:spcAft>
+                <a:spcPts val="0"/>
+              </a:spcAft>
+            </a:pPr>
+            <a:r>
+              <a:rPr sz="1000" b="0">
+                <a:solidFill>
+                  <a:srgbClr val="595959"/>
+                </a:solidFill>
+                <a:latin typeface="Calibri"/>
+              </a:rPr>
+              <a:t>Slide 4 of 5</a:t>
+            </a:r>
+          </a:p>
+        </p:txBody>
+      </p:sp>
+      <p:sp>
+        <p:nvSpPr>
+          <p:cNvPr id="10" name="TextBox 9"/>
+          <p:cNvSpPr txBox="1"/>
+          <p:nvPr/>
+        </p:nvSpPr>
+        <p:spPr>
+          <a:xfrm>
+            <a:off x="365760" y="1024128"/>
+            <a:ext cx="11430000" cy="237744"/>
+          </a:xfrm>
+          <a:prstGeom prst="rect">
+            <a:avLst/>
+          </a:prstGeom>
+          <a:noFill/>
+        </p:spPr>
+        <p:txBody>
+          <a:bodyPr wrap="square" anchor="t"/>
+          <a:lstStyle/>
+          <a:p>
+            <a:pPr algn="l">
+              <a:spcBef>
+                <a:spcPts val="0"/>
+              </a:spcBef>
+              <a:spcAft>
+                <a:spcPts val="0"/>
+              </a:spcAft>
+            </a:pPr>
+            <a:r>
+              <a:rPr sz="1300" b="1">
+                <a:solidFill>
+                  <a:srgbClr val="595959"/>
+                </a:solidFill>
+                <a:latin typeface="Calibri"/>
+              </a:rPr>
+              <a:t>Illustrative path  (generic example)</a:t>
+            </a:r>
+          </a:p>
+        </p:txBody>
+      </p:sp>
+      <p:sp>
+        <p:nvSpPr>
+          <p:cNvPr id="11" name="Rectangle 10"/>
+          <p:cNvSpPr/>
+          <p:nvPr/>
+        </p:nvSpPr>
+        <p:spPr>
+          <a:xfrm>
+            <a:off x="365760" y="1298448"/>
+            <a:ext cx="1874519" cy="777240"/>
+          </a:xfrm>
+          <a:prstGeom prst="rect">
+            <a:avLst/>
+          </a:prstGeom>
+          <a:solidFill>
+            <a:srgbClr val="FFFFFF"/>
+          </a:solidFill>
+          <a:ln w="12700">
+            <a:solidFill>
+              <a:srgbClr val="BFBFBF"/>
+            </a:solidFill>
+          </a:ln>
+          <a:effectLst/>
+        </p:spPr>
+        <p:style>
+          <a:lnRef idx="1">
+            <a:schemeClr val="accent1"/>
+          </a:lnRef>
+          <a:fillRef idx="3">
+            <a:schemeClr val="accent1"/>
+          </a:fillRef>
+          <a:effectRef idx="2">
+            <a:schemeClr val="accent1"/>
+          </a:effectRef>
+          <a:fontRef idx="minor">
+            <a:schemeClr val="lt1"/>
+          </a:fontRef>
+        </p:style>
+        <p:txBody>
+          <a:bodyPr rtlCol="0" anchor="ctr" wrap="square" lIns="73152" rIns="73152" tIns="36576" bIns="36576"/>
+          <a:lstStyle/>
+          <a:p>
+            <a:pPr algn="ctr">
+              <a:spcBef>
+                <a:spcPts val="0"/>
+              </a:spcBef>
+              <a:spcAft>
+                <a:spcPts val="0"/>
+              </a:spcAft>
+            </a:pPr>
+            <a:r>
+              <a:rPr sz="1300" b="1">
+                <a:solidFill>
+                  <a:srgbClr val="1F4E79"/>
+                </a:solidFill>
+                <a:latin typeface="Calibri"/>
+              </a:rPr>
+              <a:t>AODB</a:t>
+            </a:r>
+          </a:p>
+        </p:txBody>
+      </p:sp>
+      <p:sp>
+        <p:nvSpPr>
+          <p:cNvPr id="12" name="Right Arrow 11"/>
+          <p:cNvSpPr/>
+          <p:nvPr/>
+        </p:nvSpPr>
+        <p:spPr>
+          <a:xfrm>
+            <a:off x="2313431" y="1554480"/>
+            <a:ext cx="274320" cy="201168"/>
+          </a:xfrm>
+          <a:prstGeom prst="rightArrow">
+            <a:avLst/>
+          </a:prstGeom>
+          <a:solidFill>
+            <a:srgbClr val="2E75B6"/>
+          </a:solidFill>
+          <a:ln>
+            <a:noFill/>
+          </a:ln>
+          <a:effectLst/>
+        </p:spPr>
+        <p:style>
+          <a:lnRef idx="1">
+            <a:schemeClr val="accent1"/>
+          </a:lnRef>
+          <a:fillRef idx="3">
+            <a:schemeClr val="accent1"/>
+          </a:fillRef>
+          <a:effectRef idx="2">
+            <a:schemeClr val="accent1"/>
+          </a:effectRef>
+          <a:fontRef idx="minor">
+            <a:schemeClr val="lt1"/>
+          </a:fontRef>
+        </p:style>
+        <p:txBody>
+          <a:bodyPr rtlCol="0" anchor="ctr"/>
+          <a:lstStyle/>
+          <a:p>
+            <a:pPr algn="ctr"/>
+          </a:p>
+        </p:txBody>
+      </p:sp>
+      <p:sp>
+        <p:nvSpPr>
+          <p:cNvPr id="13" name="Rectangle 12"/>
+          <p:cNvSpPr/>
+          <p:nvPr/>
+        </p:nvSpPr>
+        <p:spPr>
+          <a:xfrm>
+            <a:off x="2651760" y="1298448"/>
+            <a:ext cx="1874519" cy="777240"/>
+          </a:xfrm>
+          <a:prstGeom prst="rect">
+            <a:avLst/>
+          </a:prstGeom>
+          <a:solidFill>
+            <a:srgbClr val="FFFFFF"/>
+          </a:solidFill>
+          <a:ln w="12700">
+            <a:solidFill>
+              <a:srgbClr val="BFBFBF"/>
+            </a:solidFill>
+          </a:ln>
+          <a:effectLst/>
+        </p:spPr>
+        <p:style>
+          <a:lnRef idx="1">
+            <a:schemeClr val="accent1"/>
+          </a:lnRef>
+          <a:fillRef idx="3">
+            <a:schemeClr val="accent1"/>
+          </a:fillRef>
+          <a:effectRef idx="2">
+            <a:schemeClr val="accent1"/>
+          </a:effectRef>
+          <a:fontRef idx="minor">
+            <a:schemeClr val="lt1"/>
+          </a:fontRef>
+        </p:style>
+        <p:txBody>
+          <a:bodyPr rtlCol="0" anchor="ctr" wrap="square" lIns="73152" rIns="73152" tIns="36576" bIns="36576"/>
+          <a:lstStyle/>
+          <a:p>
+            <a:pPr algn="ctr">
+              <a:spcBef>
+                <a:spcPts val="0"/>
+              </a:spcBef>
+              <a:spcAft>
+                <a:spcPts val="200"/>
+              </a:spcAft>
+            </a:pPr>
+            <a:r>
+              <a:rPr sz="1300" b="1">
+                <a:solidFill>
+                  <a:srgbClr val="1F4E79"/>
+                </a:solidFill>
+                <a:latin typeface="Calibri"/>
+              </a:rPr>
+              <a:t>FLTU / RNUP</a:t>
+            </a:r>
+          </a:p>
+          <a:p>
+            <a:pPr algn="ctr">
+              <a:spcBef>
+                <a:spcPts val="0"/>
+              </a:spcBef>
+              <a:spcAft>
+                <a:spcPts val="0"/>
+              </a:spcAft>
+            </a:pPr>
+            <a:r>
+              <a:rPr sz="1300" b="1">
+                <a:solidFill>
+                  <a:srgbClr val="1F4E79"/>
+                </a:solidFill>
+                <a:latin typeface="Calibri"/>
+              </a:rPr>
+              <a:t>message</a:t>
+            </a:r>
+          </a:p>
+        </p:txBody>
+      </p:sp>
+      <p:sp>
+        <p:nvSpPr>
+          <p:cNvPr id="14" name="Right Arrow 13"/>
+          <p:cNvSpPr/>
+          <p:nvPr/>
+        </p:nvSpPr>
+        <p:spPr>
+          <a:xfrm>
+            <a:off x="4599431" y="1554480"/>
+            <a:ext cx="274320" cy="201168"/>
+          </a:xfrm>
+          <a:prstGeom prst="rightArrow">
+            <a:avLst/>
+          </a:prstGeom>
+          <a:solidFill>
+            <a:srgbClr val="2E75B6"/>
+          </a:solidFill>
+          <a:ln>
+            <a:noFill/>
+          </a:ln>
+          <a:effectLst/>
+        </p:spPr>
+        <p:style>
+          <a:lnRef idx="1">
+            <a:schemeClr val="accent1"/>
+          </a:lnRef>
+          <a:fillRef idx="3">
+            <a:schemeClr val="accent1"/>
+          </a:fillRef>
+          <a:effectRef idx="2">
+            <a:schemeClr val="accent1"/>
+          </a:effectRef>
+          <a:fontRef idx="minor">
+            <a:schemeClr val="lt1"/>
+          </a:fontRef>
+        </p:style>
+        <p:txBody>
+          <a:bodyPr rtlCol="0" anchor="ctr"/>
+          <a:lstStyle/>
+          <a:p>
+            <a:pPr algn="ctr"/>
+          </a:p>
+        </p:txBody>
+      </p:sp>
+      <p:sp>
+        <p:nvSpPr>
+          <p:cNvPr id="15" name="Rectangle 14"/>
+          <p:cNvSpPr/>
+          <p:nvPr/>
+        </p:nvSpPr>
+        <p:spPr>
+          <a:xfrm>
+            <a:off x="4937760" y="1298448"/>
+            <a:ext cx="1874519" cy="777240"/>
+          </a:xfrm>
+          <a:prstGeom prst="rect">
+            <a:avLst/>
+          </a:prstGeom>
+          <a:solidFill>
+            <a:srgbClr val="FFFFFF"/>
+          </a:solidFill>
+          <a:ln w="12700">
+            <a:solidFill>
+              <a:srgbClr val="BFBFBF"/>
+            </a:solidFill>
+          </a:ln>
+          <a:effectLst/>
+        </p:spPr>
+        <p:style>
+          <a:lnRef idx="1">
+            <a:schemeClr val="accent1"/>
+          </a:lnRef>
+          <a:fillRef idx="3">
+            <a:schemeClr val="accent1"/>
+          </a:fillRef>
+          <a:effectRef idx="2">
+            <a:schemeClr val="accent1"/>
+          </a:effectRef>
+          <a:fontRef idx="minor">
+            <a:schemeClr val="lt1"/>
+          </a:fontRef>
+        </p:style>
+        <p:txBody>
+          <a:bodyPr rtlCol="0" anchor="ctr" wrap="square" lIns="73152" rIns="73152" tIns="36576" bIns="36576"/>
+          <a:lstStyle/>
+          <a:p>
+            <a:pPr algn="ctr">
+              <a:spcBef>
+                <a:spcPts val="0"/>
+              </a:spcBef>
+              <a:spcAft>
+                <a:spcPts val="0"/>
+              </a:spcAft>
+            </a:pPr>
+            <a:r>
+              <a:rPr sz="1300" b="1">
+                <a:solidFill>
+                  <a:srgbClr val="1F4E79"/>
+                </a:solidFill>
+                <a:latin typeface="Calibri"/>
+              </a:rPr>
+              <a:t>IBM MQ</a:t>
+            </a:r>
+          </a:p>
+        </p:txBody>
+      </p:sp>
+      <p:sp>
+        <p:nvSpPr>
+          <p:cNvPr id="16" name="Right Arrow 15"/>
+          <p:cNvSpPr/>
+          <p:nvPr/>
+        </p:nvSpPr>
+        <p:spPr>
+          <a:xfrm>
+            <a:off x="6885431" y="1554480"/>
+            <a:ext cx="274320" cy="201168"/>
+          </a:xfrm>
+          <a:prstGeom prst="rightArrow">
+            <a:avLst/>
+          </a:prstGeom>
+          <a:solidFill>
+            <a:srgbClr val="2E75B6"/>
+          </a:solidFill>
+          <a:ln>
+            <a:noFill/>
+          </a:ln>
+          <a:effectLst/>
+        </p:spPr>
+        <p:style>
+          <a:lnRef idx="1">
+            <a:schemeClr val="accent1"/>
+          </a:lnRef>
+          <a:fillRef idx="3">
+            <a:schemeClr val="accent1"/>
+          </a:fillRef>
+          <a:effectRef idx="2">
+            <a:schemeClr val="accent1"/>
+          </a:effectRef>
+          <a:fontRef idx="minor">
+            <a:schemeClr val="lt1"/>
+          </a:fontRef>
+        </p:style>
+        <p:txBody>
+          <a:bodyPr rtlCol="0" anchor="ctr"/>
+          <a:lstStyle/>
+          <a:p>
+            <a:pPr algn="ctr"/>
+          </a:p>
+        </p:txBody>
+      </p:sp>
+      <p:sp>
+        <p:nvSpPr>
+          <p:cNvPr id="17" name="Rectangle 16"/>
+          <p:cNvSpPr/>
+          <p:nvPr/>
+        </p:nvSpPr>
+        <p:spPr>
+          <a:xfrm>
+            <a:off x="7223760" y="1298448"/>
+            <a:ext cx="1874519" cy="777240"/>
+          </a:xfrm>
+          <a:prstGeom prst="rect">
+            <a:avLst/>
+          </a:prstGeom>
+          <a:solidFill>
+            <a:srgbClr val="FFFFFF"/>
+          </a:solidFill>
+          <a:ln w="12700">
+            <a:solidFill>
+              <a:srgbClr val="BFBFBF"/>
+            </a:solidFill>
+          </a:ln>
+          <a:effectLst/>
+        </p:spPr>
+        <p:style>
+          <a:lnRef idx="1">
+            <a:schemeClr val="accent1"/>
+          </a:lnRef>
+          <a:fillRef idx="3">
+            <a:schemeClr val="accent1"/>
+          </a:fillRef>
+          <a:effectRef idx="2">
+            <a:schemeClr val="accent1"/>
+          </a:effectRef>
+          <a:fontRef idx="minor">
+            <a:schemeClr val="lt1"/>
+          </a:fontRef>
+        </p:style>
+        <p:txBody>
+          <a:bodyPr rtlCol="0" anchor="ctr" wrap="square" lIns="73152" rIns="73152" tIns="36576" bIns="36576"/>
+          <a:lstStyle/>
+          <a:p>
+            <a:pPr algn="ctr">
+              <a:spcBef>
+                <a:spcPts val="0"/>
+              </a:spcBef>
+              <a:spcAft>
+                <a:spcPts val="0"/>
+              </a:spcAft>
+            </a:pPr>
+            <a:r>
+              <a:rPr sz="1300" b="1">
+                <a:solidFill>
+                  <a:srgbClr val="1F4E79"/>
+                </a:solidFill>
+                <a:latin typeface="Calibri"/>
+              </a:rPr>
+              <a:t>IBM ACE</a:t>
+            </a:r>
+          </a:p>
+        </p:txBody>
+      </p:sp>
+      <p:sp>
+        <p:nvSpPr>
+          <p:cNvPr id="18" name="Right Arrow 17"/>
+          <p:cNvSpPr/>
+          <p:nvPr/>
+        </p:nvSpPr>
+        <p:spPr>
+          <a:xfrm>
+            <a:off x="9171431" y="1554480"/>
+            <a:ext cx="274320" cy="201168"/>
+          </a:xfrm>
+          <a:prstGeom prst="rightArrow">
+            <a:avLst/>
+          </a:prstGeom>
+          <a:solidFill>
+            <a:srgbClr val="2E75B6"/>
+          </a:solidFill>
+          <a:ln>
+            <a:noFill/>
+          </a:ln>
+          <a:effectLst/>
+        </p:spPr>
+        <p:style>
+          <a:lnRef idx="1">
+            <a:schemeClr val="accent1"/>
+          </a:lnRef>
+          <a:fillRef idx="3">
+            <a:schemeClr val="accent1"/>
+          </a:fillRef>
+          <a:effectRef idx="2">
+            <a:schemeClr val="accent1"/>
+          </a:effectRef>
+          <a:fontRef idx="minor">
+            <a:schemeClr val="lt1"/>
+          </a:fontRef>
+        </p:style>
+        <p:txBody>
+          <a:bodyPr rtlCol="0" anchor="ctr"/>
+          <a:lstStyle/>
+          <a:p>
+            <a:pPr algn="ctr"/>
+          </a:p>
+        </p:txBody>
+      </p:sp>
+      <p:sp>
+        <p:nvSpPr>
+          <p:cNvPr id="19" name="Rectangle 18"/>
+          <p:cNvSpPr/>
+          <p:nvPr/>
+        </p:nvSpPr>
+        <p:spPr>
+          <a:xfrm>
+            <a:off x="9509760" y="1298448"/>
+            <a:ext cx="1874519" cy="777240"/>
+          </a:xfrm>
+          <a:prstGeom prst="rect">
+            <a:avLst/>
+          </a:prstGeom>
+          <a:solidFill>
+            <a:srgbClr val="FDE2E2"/>
+          </a:solidFill>
+          <a:ln w="12700">
+            <a:solidFill>
+              <a:srgbClr val="C00000"/>
+            </a:solidFill>
+          </a:ln>
+          <a:effectLst/>
+        </p:spPr>
+        <p:style>
+          <a:lnRef idx="1">
+            <a:schemeClr val="accent1"/>
+          </a:lnRef>
+          <a:fillRef idx="3">
+            <a:schemeClr val="accent1"/>
+          </a:fillRef>
+          <a:effectRef idx="2">
+            <a:schemeClr val="accent1"/>
+          </a:effectRef>
+          <a:fontRef idx="minor">
+            <a:schemeClr val="lt1"/>
+          </a:fontRef>
+        </p:style>
+        <p:txBody>
+          <a:bodyPr rtlCol="0" anchor="ctr" wrap="square" lIns="73152" rIns="73152" tIns="36576" bIns="36576"/>
+          <a:lstStyle/>
+          <a:p>
+            <a:pPr algn="ctr">
+              <a:spcBef>
+                <a:spcPts val="0"/>
+              </a:spcBef>
+              <a:spcAft>
+                <a:spcPts val="200"/>
+              </a:spcAft>
+            </a:pPr>
+            <a:r>
+              <a:rPr sz="1300" b="1">
+                <a:solidFill>
+                  <a:srgbClr val="C00000"/>
+                </a:solidFill>
+                <a:latin typeface="Calibri"/>
+              </a:rPr>
+              <a:t>Processing</a:t>
+            </a:r>
+          </a:p>
+          <a:p>
+            <a:pPr algn="ctr">
+              <a:spcBef>
+                <a:spcPts val="0"/>
+              </a:spcBef>
+              <a:spcAft>
+                <a:spcPts val="0"/>
+              </a:spcAft>
+            </a:pPr>
+            <a:r>
+              <a:rPr sz="1300" b="1">
+                <a:solidFill>
+                  <a:srgbClr val="C00000"/>
+                </a:solidFill>
+                <a:latin typeface="Calibri"/>
+              </a:rPr>
+              <a:t>error</a:t>
+            </a:r>
+          </a:p>
+        </p:txBody>
+      </p:sp>
+      <p:sp>
+        <p:nvSpPr>
+          <p:cNvPr id="20" name="TextBox 19"/>
+          <p:cNvSpPr txBox="1"/>
+          <p:nvPr/>
+        </p:nvSpPr>
+        <p:spPr>
+          <a:xfrm>
+            <a:off x="365760" y="2212848"/>
+            <a:ext cx="11430000" cy="256032"/>
+          </a:xfrm>
+          <a:prstGeom prst="rect">
+            <a:avLst/>
+          </a:prstGeom>
+          <a:noFill/>
+        </p:spPr>
+        <p:txBody>
+          <a:bodyPr wrap="square" anchor="t"/>
+          <a:lstStyle/>
+          <a:p>
+            <a:pPr algn="l">
+              <a:spcBef>
+                <a:spcPts val="0"/>
+              </a:spcBef>
+              <a:spcAft>
+                <a:spcPts val="0"/>
+              </a:spcAft>
+            </a:pPr>
+            <a:r>
+              <a:rPr sz="1300" b="1">
+                <a:solidFill>
+                  <a:srgbClr val="595959"/>
+                </a:solidFill>
+                <a:latin typeface="Calibri"/>
+              </a:rPr>
+              <a:t>What the Copilot could produce for the engineer</a:t>
+            </a:r>
+          </a:p>
+        </p:txBody>
+      </p:sp>
+      <p:sp>
+        <p:nvSpPr>
+          <p:cNvPr id="21" name="Rectangle 20"/>
+          <p:cNvSpPr/>
+          <p:nvPr/>
+        </p:nvSpPr>
+        <p:spPr>
+          <a:xfrm>
+            <a:off x="365760" y="2514600"/>
+            <a:ext cx="2743200" cy="2148840"/>
+          </a:xfrm>
+          <a:prstGeom prst="rect">
+            <a:avLst/>
+          </a:prstGeom>
+          <a:solidFill>
+            <a:srgbClr val="FDE9D9"/>
+          </a:solidFill>
+          <a:ln w="12700">
+            <a:solidFill>
+              <a:srgbClr val="C65911"/>
+            </a:solidFill>
+          </a:ln>
+          <a:effectLst/>
+        </p:spPr>
+        <p:style>
+          <a:lnRef idx="1">
+            <a:schemeClr val="accent1"/>
+          </a:lnRef>
+          <a:fillRef idx="3">
+            <a:schemeClr val="accent1"/>
+          </a:fillRef>
+          <a:effectRef idx="2">
+            <a:schemeClr val="accent1"/>
+          </a:effectRef>
+          <a:fontRef idx="minor">
+            <a:schemeClr val="lt1"/>
+          </a:fontRef>
+        </p:style>
+        <p:txBody>
+          <a:bodyPr rtlCol="0" anchor="ctr"/>
+          <a:lstStyle/>
+          <a:p>
+            <a:pPr algn="ctr"/>
+          </a:p>
+        </p:txBody>
+      </p:sp>
+      <p:sp>
+        <p:nvSpPr>
+          <p:cNvPr id="22" name="Rectangle 21"/>
+          <p:cNvSpPr/>
+          <p:nvPr/>
+        </p:nvSpPr>
+        <p:spPr>
+          <a:xfrm>
+            <a:off x="365760" y="2514600"/>
+            <a:ext cx="2743200" cy="292608"/>
+          </a:xfrm>
+          <a:prstGeom prst="rect">
+            <a:avLst/>
+          </a:prstGeom>
+          <a:solidFill>
+            <a:srgbClr val="C65911"/>
+          </a:solidFill>
+          <a:ln>
+            <a:noFill/>
+          </a:ln>
+          <a:effectLst/>
+        </p:spPr>
+        <p:style>
+          <a:lnRef idx="1">
+            <a:schemeClr val="accent1"/>
+          </a:lnRef>
+          <a:fillRef idx="3">
+            <a:schemeClr val="accent1"/>
+          </a:fillRef>
+          <a:effectRef idx="2">
+            <a:schemeClr val="accent1"/>
+          </a:effectRef>
+          <a:fontRef idx="minor">
+            <a:schemeClr val="lt1"/>
+          </a:fontRef>
+        </p:style>
+        <p:txBody>
+          <a:bodyPr rtlCol="0" anchor="ctr" wrap="square" lIns="73152" rIns="73152" tIns="36576" bIns="36576"/>
+          <a:lstStyle/>
+          <a:p>
+            <a:pPr algn="ctr">
+              <a:spcBef>
+                <a:spcPts val="0"/>
+              </a:spcBef>
+              <a:spcAft>
+                <a:spcPts val="0"/>
+              </a:spcAft>
+            </a:pPr>
+            <a:r>
+              <a:rPr sz="1200" b="1">
+                <a:solidFill>
+                  <a:srgbClr val="FFFFFF"/>
+                </a:solidFill>
+                <a:latin typeface="Calibri"/>
+              </a:rPr>
+              <a:t>Incident</a:t>
+            </a:r>
+          </a:p>
+        </p:txBody>
+      </p:sp>
+      <p:sp>
+        <p:nvSpPr>
+          <p:cNvPr id="23" name="TextBox 22"/>
+          <p:cNvSpPr txBox="1"/>
+          <p:nvPr/>
+        </p:nvSpPr>
+        <p:spPr>
+          <a:xfrm>
+            <a:off x="475488" y="2907792"/>
+            <a:ext cx="2523744" cy="1600200"/>
+          </a:xfrm>
+          <a:prstGeom prst="rect">
+            <a:avLst/>
+          </a:prstGeom>
+          <a:noFill/>
+        </p:spPr>
+        <p:txBody>
+          <a:bodyPr wrap="square" anchor="t"/>
+          <a:lstStyle/>
+          <a:p>
+            <a:pPr algn="l">
+              <a:spcBef>
+                <a:spcPts val="0"/>
+              </a:spcBef>
+              <a:spcAft>
+                <a:spcPts val="0"/>
+              </a:spcAft>
+            </a:pPr>
+            <a:r>
+              <a:rPr sz="1300" b="0">
+                <a:solidFill>
+                  <a:srgbClr val="2F2F2F"/>
+                </a:solidFill>
+                <a:latin typeface="Calibri"/>
+              </a:rPr>
+              <a:t>AODB FLTU/RNUP processing failure</a:t>
+            </a:r>
+          </a:p>
+        </p:txBody>
+      </p:sp>
+      <p:sp>
+        <p:nvSpPr>
+          <p:cNvPr id="24" name="Rectangle 23"/>
+          <p:cNvSpPr/>
+          <p:nvPr/>
+        </p:nvSpPr>
+        <p:spPr>
+          <a:xfrm>
+            <a:off x="3291840" y="2514600"/>
+            <a:ext cx="2743200" cy="2148840"/>
+          </a:xfrm>
+          <a:prstGeom prst="rect">
+            <a:avLst/>
+          </a:prstGeom>
+          <a:solidFill>
+            <a:srgbClr val="DEEBF7"/>
+          </a:solidFill>
+          <a:ln w="12700">
+            <a:solidFill>
+              <a:srgbClr val="2E75B6"/>
+            </a:solidFill>
+          </a:ln>
+          <a:effectLst/>
+        </p:spPr>
+        <p:style>
+          <a:lnRef idx="1">
+            <a:schemeClr val="accent1"/>
+          </a:lnRef>
+          <a:fillRef idx="3">
+            <a:schemeClr val="accent1"/>
+          </a:fillRef>
+          <a:effectRef idx="2">
+            <a:schemeClr val="accent1"/>
+          </a:effectRef>
+          <a:fontRef idx="minor">
+            <a:schemeClr val="lt1"/>
+          </a:fontRef>
+        </p:style>
+        <p:txBody>
+          <a:bodyPr rtlCol="0" anchor="ctr"/>
+          <a:lstStyle/>
+          <a:p>
+            <a:pPr algn="ctr"/>
+          </a:p>
+        </p:txBody>
+      </p:sp>
+      <p:sp>
+        <p:nvSpPr>
+          <p:cNvPr id="25" name="Rectangle 24"/>
+          <p:cNvSpPr/>
+          <p:nvPr/>
+        </p:nvSpPr>
+        <p:spPr>
+          <a:xfrm>
+            <a:off x="3291840" y="2514600"/>
+            <a:ext cx="2743200" cy="292608"/>
+          </a:xfrm>
+          <a:prstGeom prst="rect">
+            <a:avLst/>
+          </a:prstGeom>
+          <a:solidFill>
+            <a:srgbClr val="2E75B6"/>
+          </a:solidFill>
+          <a:ln>
+            <a:noFill/>
+          </a:ln>
+          <a:effectLst/>
+        </p:spPr>
+        <p:style>
+          <a:lnRef idx="1">
+            <a:schemeClr val="accent1"/>
+          </a:lnRef>
+          <a:fillRef idx="3">
+            <a:schemeClr val="accent1"/>
+          </a:fillRef>
+          <a:effectRef idx="2">
+            <a:schemeClr val="accent1"/>
+          </a:effectRef>
+          <a:fontRef idx="minor">
+            <a:schemeClr val="lt1"/>
+          </a:fontRef>
+        </p:style>
+        <p:txBody>
+          <a:bodyPr rtlCol="0" anchor="ctr" wrap="square" lIns="73152" rIns="73152" tIns="36576" bIns="36576"/>
+          <a:lstStyle/>
+          <a:p>
+            <a:pPr algn="ctr">
+              <a:spcBef>
+                <a:spcPts val="0"/>
+              </a:spcBef>
+              <a:spcAft>
+                <a:spcPts val="0"/>
+              </a:spcAft>
+            </a:pPr>
+            <a:r>
+              <a:rPr sz="1200" b="1">
+                <a:solidFill>
+                  <a:srgbClr val="FFFFFF"/>
+                </a:solidFill>
+                <a:latin typeface="Calibri"/>
+              </a:rPr>
+              <a:t>Correlation</a:t>
+            </a:r>
+          </a:p>
+        </p:txBody>
+      </p:sp>
+      <p:sp>
+        <p:nvSpPr>
+          <p:cNvPr id="26" name="TextBox 25"/>
+          <p:cNvSpPr txBox="1"/>
+          <p:nvPr/>
+        </p:nvSpPr>
+        <p:spPr>
+          <a:xfrm>
+            <a:off x="3401568" y="2907792"/>
+            <a:ext cx="2523744" cy="1600200"/>
+          </a:xfrm>
+          <a:prstGeom prst="rect">
+            <a:avLst/>
+          </a:prstGeom>
+          <a:noFill/>
+        </p:spPr>
+        <p:txBody>
+          <a:bodyPr wrap="square" anchor="t"/>
+          <a:lstStyle/>
+          <a:p>
+            <a:pPr algn="l">
+              <a:spcBef>
+                <a:spcPts val="0"/>
+              </a:spcBef>
+              <a:spcAft>
+                <a:spcPts val="0"/>
+              </a:spcAft>
+            </a:pPr>
+            <a:r>
+              <a:rPr sz="1300" b="0">
+                <a:solidFill>
+                  <a:srgbClr val="2F2F2F"/>
+                </a:solidFill>
+                <a:latin typeface="Calibri"/>
+              </a:rPr>
+              <a:t>Message reached MQ successfully. Failure occurred during downstream processing.</a:t>
+            </a:r>
+          </a:p>
+        </p:txBody>
+      </p:sp>
+      <p:sp>
+        <p:nvSpPr>
+          <p:cNvPr id="27" name="Rectangle 26"/>
+          <p:cNvSpPr/>
+          <p:nvPr/>
+        </p:nvSpPr>
+        <p:spPr>
+          <a:xfrm>
+            <a:off x="6217920" y="2514600"/>
+            <a:ext cx="2743200" cy="2148840"/>
+          </a:xfrm>
+          <a:prstGeom prst="rect">
+            <a:avLst/>
+          </a:prstGeom>
+          <a:solidFill>
+            <a:srgbClr val="F2F2F2"/>
+          </a:solidFill>
+          <a:ln w="12700">
+            <a:solidFill>
+              <a:srgbClr val="1F4E79"/>
+            </a:solidFill>
+          </a:ln>
+          <a:effectLst/>
+        </p:spPr>
+        <p:style>
+          <a:lnRef idx="1">
+            <a:schemeClr val="accent1"/>
+          </a:lnRef>
+          <a:fillRef idx="3">
+            <a:schemeClr val="accent1"/>
+          </a:fillRef>
+          <a:effectRef idx="2">
+            <a:schemeClr val="accent1"/>
+          </a:effectRef>
+          <a:fontRef idx="minor">
+            <a:schemeClr val="lt1"/>
+          </a:fontRef>
+        </p:style>
+        <p:txBody>
+          <a:bodyPr rtlCol="0" anchor="ctr"/>
+          <a:lstStyle/>
+          <a:p>
+            <a:pPr algn="ctr"/>
+          </a:p>
+        </p:txBody>
+      </p:sp>
+      <p:sp>
+        <p:nvSpPr>
+          <p:cNvPr id="28" name="Rectangle 27"/>
+          <p:cNvSpPr/>
+          <p:nvPr/>
+        </p:nvSpPr>
+        <p:spPr>
+          <a:xfrm>
+            <a:off x="6217920" y="2514600"/>
+            <a:ext cx="2743200" cy="292608"/>
+          </a:xfrm>
+          <a:prstGeom prst="rect">
+            <a:avLst/>
+          </a:prstGeom>
+          <a:solidFill>
+            <a:srgbClr val="1F4E79"/>
+          </a:solidFill>
+          <a:ln>
+            <a:noFill/>
+          </a:ln>
+          <a:effectLst/>
+        </p:spPr>
+        <p:style>
+          <a:lnRef idx="1">
+            <a:schemeClr val="accent1"/>
+          </a:lnRef>
+          <a:fillRef idx="3">
+            <a:schemeClr val="accent1"/>
+          </a:fillRef>
+          <a:effectRef idx="2">
+            <a:schemeClr val="accent1"/>
+          </a:effectRef>
+          <a:fontRef idx="minor">
+            <a:schemeClr val="lt1"/>
+          </a:fontRef>
+        </p:style>
+        <p:txBody>
+          <a:bodyPr rtlCol="0" anchor="ctr" wrap="square" lIns="73152" rIns="73152" tIns="36576" bIns="36576"/>
+          <a:lstStyle/>
+          <a:p>
+            <a:pPr algn="ctr">
+              <a:spcBef>
+                <a:spcPts val="0"/>
+              </a:spcBef>
+              <a:spcAft>
+                <a:spcPts val="0"/>
+              </a:spcAft>
+            </a:pPr>
+            <a:r>
+              <a:rPr sz="1200" b="1">
+                <a:solidFill>
+                  <a:srgbClr val="FFFFFF"/>
+                </a:solidFill>
+                <a:latin typeface="Calibri"/>
+              </a:rPr>
+              <a:t>Pattern</a:t>
+            </a:r>
+          </a:p>
+        </p:txBody>
+      </p:sp>
+      <p:sp>
+        <p:nvSpPr>
+          <p:cNvPr id="29" name="TextBox 28"/>
+          <p:cNvSpPr txBox="1"/>
+          <p:nvPr/>
+        </p:nvSpPr>
+        <p:spPr>
+          <a:xfrm>
+            <a:off x="6327648" y="2907792"/>
+            <a:ext cx="2523744" cy="1600200"/>
+          </a:xfrm>
+          <a:prstGeom prst="rect">
+            <a:avLst/>
+          </a:prstGeom>
+          <a:noFill/>
+        </p:spPr>
+        <p:txBody>
+          <a:bodyPr wrap="square" anchor="t"/>
+          <a:lstStyle/>
+          <a:p>
+            <a:pPr algn="l">
+              <a:spcBef>
+                <a:spcPts val="0"/>
+              </a:spcBef>
+              <a:spcAft>
+                <a:spcPts val="0"/>
+              </a:spcAft>
+            </a:pPr>
+            <a:r>
+              <a:rPr sz="1300" b="0">
+                <a:solidFill>
+                  <a:srgbClr val="2F2F2F"/>
+                </a:solidFill>
+                <a:latin typeface="Calibri"/>
+              </a:rPr>
+              <a:t>Similar incidents were previously associated with the ACE processing layer.</a:t>
+            </a:r>
+          </a:p>
+        </p:txBody>
+      </p:sp>
+      <p:sp>
+        <p:nvSpPr>
+          <p:cNvPr id="30" name="Rectangle 29"/>
+          <p:cNvSpPr/>
+          <p:nvPr/>
+        </p:nvSpPr>
+        <p:spPr>
+          <a:xfrm>
+            <a:off x="9144000" y="2514600"/>
+            <a:ext cx="2743200" cy="2148840"/>
+          </a:xfrm>
+          <a:prstGeom prst="rect">
+            <a:avLst/>
+          </a:prstGeom>
+          <a:solidFill>
+            <a:srgbClr val="FFFFFF"/>
+          </a:solidFill>
+          <a:ln w="12700">
+            <a:solidFill>
+              <a:srgbClr val="2E75B6"/>
+            </a:solidFill>
+          </a:ln>
+          <a:effectLst/>
+        </p:spPr>
+        <p:style>
+          <a:lnRef idx="1">
+            <a:schemeClr val="accent1"/>
+          </a:lnRef>
+          <a:fillRef idx="3">
+            <a:schemeClr val="accent1"/>
+          </a:fillRef>
+          <a:effectRef idx="2">
+            <a:schemeClr val="accent1"/>
+          </a:effectRef>
+          <a:fontRef idx="minor">
+            <a:schemeClr val="lt1"/>
+          </a:fontRef>
+        </p:style>
+        <p:txBody>
+          <a:bodyPr rtlCol="0" anchor="ctr"/>
+          <a:lstStyle/>
+          <a:p>
+            <a:pPr algn="ctr"/>
+          </a:p>
+        </p:txBody>
+      </p:sp>
+      <p:sp>
+        <p:nvSpPr>
+          <p:cNvPr id="31" name="Rectangle 30"/>
+          <p:cNvSpPr/>
+          <p:nvPr/>
+        </p:nvSpPr>
+        <p:spPr>
+          <a:xfrm>
+            <a:off x="9144000" y="2514600"/>
+            <a:ext cx="2743200" cy="292608"/>
+          </a:xfrm>
+          <a:prstGeom prst="rect">
+            <a:avLst/>
+          </a:prstGeom>
+          <a:solidFill>
+            <a:srgbClr val="2E75B6"/>
+          </a:solidFill>
+          <a:ln>
+            <a:noFill/>
+          </a:ln>
+          <a:effectLst/>
+        </p:spPr>
+        <p:style>
+          <a:lnRef idx="1">
+            <a:schemeClr val="accent1"/>
+          </a:lnRef>
+          <a:fillRef idx="3">
+            <a:schemeClr val="accent1"/>
+          </a:fillRef>
+          <a:effectRef idx="2">
+            <a:schemeClr val="accent1"/>
+          </a:effectRef>
+          <a:fontRef idx="minor">
+            <a:schemeClr val="lt1"/>
+          </a:fontRef>
+        </p:style>
+        <p:txBody>
+          <a:bodyPr rtlCol="0" anchor="ctr" wrap="square" lIns="73152" rIns="73152" tIns="36576" bIns="36576"/>
+          <a:lstStyle/>
+          <a:p>
+            <a:pPr algn="ctr">
+              <a:spcBef>
+                <a:spcPts val="0"/>
+              </a:spcBef>
+              <a:spcAft>
+                <a:spcPts val="0"/>
+              </a:spcAft>
+            </a:pPr>
+            <a:r>
+              <a:rPr sz="1200" b="1">
+                <a:solidFill>
+                  <a:srgbClr val="FFFFFF"/>
+                </a:solidFill>
+                <a:latin typeface="Calibri"/>
+              </a:rPr>
+              <a:t>Recommendation</a:t>
+            </a:r>
+          </a:p>
+        </p:txBody>
+      </p:sp>
+      <p:sp>
+        <p:nvSpPr>
+          <p:cNvPr id="32" name="Rectangle 31"/>
+          <p:cNvSpPr/>
+          <p:nvPr/>
+        </p:nvSpPr>
+        <p:spPr>
+          <a:xfrm>
+            <a:off x="9144000" y="2807208"/>
+            <a:ext cx="2743200" cy="1856231"/>
+          </a:xfrm>
+          <a:prstGeom prst="rect">
+            <a:avLst/>
+          </a:prstGeom>
+          <a:solidFill>
+            <a:srgbClr val="FFFFFF"/>
+          </a:solidFill>
+          <a:ln>
+            <a:noFill/>
+          </a:ln>
+          <a:effectLst/>
+        </p:spPr>
+        <p:style>
+          <a:lnRef idx="1">
+            <a:schemeClr val="accent1"/>
+          </a:lnRef>
+          <a:fillRef idx="3">
+            <a:schemeClr val="accent1"/>
+          </a:fillRef>
+          <a:effectRef idx="2">
+            <a:schemeClr val="accent1"/>
+          </a:effectRef>
+          <a:fontRef idx="minor">
+            <a:schemeClr val="lt1"/>
+          </a:fontRef>
+        </p:style>
+        <p:txBody>
+          <a:bodyPr rtlCol="0" anchor="ctr" wrap="square" lIns="109728" rIns="73152"/>
+          <a:lstStyle/>
+          <a:p>
+            <a:pPr algn="l">
+              <a:spcBef>
+                <a:spcPts val="300"/>
+              </a:spcBef>
+              <a:spcAft>
+                <a:spcPts val="300"/>
+              </a:spcAft>
+              <a:buFont typeface="Arial"/>
+              <a:buChar char="•"/>
+            </a:pPr>
+            <a:r>
+              <a:rPr sz="1200" b="0">
+                <a:solidFill>
+                  <a:srgbClr val="2F2F2F"/>
+                </a:solidFill>
+                <a:latin typeface="Calibri"/>
+              </a:rPr>
+              <a:t>Check ACE application logs</a:t>
+            </a:r>
+          </a:p>
+          <a:p>
+            <a:pPr algn="l">
+              <a:spcBef>
+                <a:spcPts val="300"/>
+              </a:spcBef>
+              <a:spcAft>
+                <a:spcPts val="300"/>
+              </a:spcAft>
+              <a:buFont typeface="Arial"/>
+              <a:buChar char="•"/>
+            </a:pPr>
+            <a:r>
+              <a:rPr sz="1200" b="0">
+                <a:solidFill>
+                  <a:srgbClr val="2F2F2F"/>
+                </a:solidFill>
+                <a:latin typeface="Calibri"/>
+              </a:rPr>
+              <a:t>Validate message payload</a:t>
+            </a:r>
+          </a:p>
+          <a:p>
+            <a:pPr algn="l">
+              <a:spcBef>
+                <a:spcPts val="300"/>
+              </a:spcBef>
+              <a:spcAft>
+                <a:spcPts val="300"/>
+              </a:spcAft>
+              <a:buFont typeface="Arial"/>
+              <a:buChar char="•"/>
+            </a:pPr>
+            <a:r>
+              <a:rPr sz="1200" b="0">
+                <a:solidFill>
+                  <a:srgbClr val="2F2F2F"/>
+                </a:solidFill>
+                <a:latin typeface="Calibri"/>
+              </a:rPr>
+              <a:t>Check affected integration flow</a:t>
+            </a:r>
+          </a:p>
+          <a:p>
+            <a:pPr algn="l">
+              <a:spcBef>
+                <a:spcPts val="300"/>
+              </a:spcBef>
+              <a:spcAft>
+                <a:spcPts val="300"/>
+              </a:spcAft>
+              <a:buFont typeface="Arial"/>
+              <a:buChar char="•"/>
+            </a:pPr>
+            <a:r>
+              <a:rPr sz="1200" b="0">
+                <a:solidFill>
+                  <a:srgbClr val="2F2F2F"/>
+                </a:solidFill>
+                <a:latin typeface="Calibri"/>
+              </a:rPr>
+              <a:t>Compare with similar historical incidents</a:t>
+            </a:r>
+          </a:p>
+        </p:txBody>
+      </p:sp>
+      <p:sp>
+        <p:nvSpPr>
+          <p:cNvPr id="33" name="Rectangle 32"/>
+          <p:cNvSpPr/>
+          <p:nvPr/>
+        </p:nvSpPr>
+        <p:spPr>
+          <a:xfrm>
+            <a:off x="365760" y="4828032"/>
+            <a:ext cx="5532120" cy="1554480"/>
+          </a:xfrm>
+          <a:prstGeom prst="rect">
+            <a:avLst/>
+          </a:prstGeom>
+          <a:solidFill>
+            <a:srgbClr val="F2F2F2"/>
+          </a:solidFill>
+          <a:ln w="12700">
+            <a:solidFill>
+              <a:srgbClr val="BFBFBF"/>
+            </a:solidFill>
+          </a:ln>
+          <a:effectLst/>
+        </p:spPr>
+        <p:style>
+          <a:lnRef idx="1">
+            <a:schemeClr val="accent1"/>
+          </a:lnRef>
+          <a:fillRef idx="3">
+            <a:schemeClr val="accent1"/>
+          </a:fillRef>
+          <a:effectRef idx="2">
+            <a:schemeClr val="accent1"/>
+          </a:effectRef>
+          <a:fontRef idx="minor">
+            <a:schemeClr val="lt1"/>
+          </a:fontRef>
+        </p:style>
+        <p:txBody>
+          <a:bodyPr rtlCol="0" anchor="ctr"/>
+          <a:lstStyle/>
+          <a:p>
+            <a:pPr algn="ctr"/>
+          </a:p>
+        </p:txBody>
+      </p:sp>
+      <p:sp>
+        <p:nvSpPr>
+          <p:cNvPr id="34" name="Rectangle 33"/>
+          <p:cNvSpPr/>
+          <p:nvPr/>
+        </p:nvSpPr>
+        <p:spPr>
+          <a:xfrm>
+            <a:off x="6263640" y="4828032"/>
+            <a:ext cx="5532120" cy="1554480"/>
+          </a:xfrm>
+          <a:prstGeom prst="rect">
+            <a:avLst/>
+          </a:prstGeom>
+          <a:solidFill>
+            <a:srgbClr val="DEEBF7"/>
+          </a:solidFill>
+          <a:ln w="12700">
+            <a:solidFill>
+              <a:srgbClr val="2E75B6"/>
+            </a:solidFill>
+          </a:ln>
+          <a:effectLst/>
+        </p:spPr>
+        <p:style>
+          <a:lnRef idx="1">
+            <a:schemeClr val="accent1"/>
+          </a:lnRef>
+          <a:fillRef idx="3">
+            <a:schemeClr val="accent1"/>
+          </a:fillRef>
+          <a:effectRef idx="2">
+            <a:schemeClr val="accent1"/>
+          </a:effectRef>
+          <a:fontRef idx="minor">
+            <a:schemeClr val="lt1"/>
+          </a:fontRef>
+        </p:style>
+        <p:txBody>
+          <a:bodyPr rtlCol="0" anchor="ctr"/>
+          <a:lstStyle/>
+          <a:p>
+            <a:pPr algn="ctr"/>
+          </a:p>
+        </p:txBody>
+      </p:sp>
+      <p:sp>
+        <p:nvSpPr>
+          <p:cNvPr id="35" name="TextBox 34"/>
+          <p:cNvSpPr txBox="1"/>
+          <p:nvPr/>
+        </p:nvSpPr>
+        <p:spPr>
+          <a:xfrm>
+            <a:off x="502920" y="4919472"/>
+            <a:ext cx="5257800" cy="256032"/>
+          </a:xfrm>
+          <a:prstGeom prst="rect">
+            <a:avLst/>
+          </a:prstGeom>
+          <a:noFill/>
+        </p:spPr>
+        <p:txBody>
+          <a:bodyPr wrap="square" anchor="t"/>
+          <a:lstStyle/>
+          <a:p>
+            <a:pPr algn="l">
+              <a:spcBef>
+                <a:spcPts val="0"/>
+              </a:spcBef>
+              <a:spcAft>
+                <a:spcPts val="0"/>
+              </a:spcAft>
+            </a:pPr>
+            <a:r>
+              <a:rPr sz="1300" b="1">
+                <a:solidFill>
+                  <a:srgbClr val="595959"/>
+                </a:solidFill>
+                <a:latin typeface="Calibri"/>
+              </a:rPr>
+              <a:t>AIP Sentinel</a:t>
+            </a:r>
+          </a:p>
+        </p:txBody>
+      </p:sp>
+      <p:sp>
+        <p:nvSpPr>
+          <p:cNvPr id="36" name="TextBox 35"/>
+          <p:cNvSpPr txBox="1"/>
+          <p:nvPr/>
+        </p:nvSpPr>
+        <p:spPr>
+          <a:xfrm>
+            <a:off x="502920" y="5212080"/>
+            <a:ext cx="5257800" cy="960120"/>
+          </a:xfrm>
+          <a:prstGeom prst="rect">
+            <a:avLst/>
+          </a:prstGeom>
+          <a:noFill/>
+        </p:spPr>
+        <p:txBody>
+          <a:bodyPr wrap="square" anchor="t"/>
+          <a:lstStyle/>
+          <a:p>
+            <a:pPr algn="l">
+              <a:spcBef>
+                <a:spcPts val="0"/>
+              </a:spcBef>
+              <a:spcAft>
+                <a:spcPts val="0"/>
+              </a:spcAft>
+            </a:pPr>
+            <a:r>
+              <a:rPr sz="1500" b="1">
+                <a:solidFill>
+                  <a:srgbClr val="1F4E79"/>
+                </a:solidFill>
+                <a:latin typeface="Calibri"/>
+              </a:rPr>
+              <a:t>“Something is wrong.”
+Detection and alerting — the starting point.</a:t>
+            </a:r>
+          </a:p>
+        </p:txBody>
+      </p:sp>
+      <p:sp>
+        <p:nvSpPr>
+          <p:cNvPr id="37" name="TextBox 36"/>
+          <p:cNvSpPr txBox="1"/>
+          <p:nvPr/>
+        </p:nvSpPr>
+        <p:spPr>
+          <a:xfrm>
+            <a:off x="6400800" y="4919472"/>
+            <a:ext cx="5257800" cy="256032"/>
+          </a:xfrm>
+          <a:prstGeom prst="rect">
+            <a:avLst/>
+          </a:prstGeom>
+          <a:noFill/>
+        </p:spPr>
+        <p:txBody>
+          <a:bodyPr wrap="square" anchor="t"/>
+          <a:lstStyle/>
+          <a:p>
+            <a:pPr algn="l">
+              <a:spcBef>
+                <a:spcPts val="0"/>
+              </a:spcBef>
+              <a:spcAft>
+                <a:spcPts val="0"/>
+              </a:spcAft>
+            </a:pPr>
+            <a:r>
+              <a:rPr sz="1300" b="1">
+                <a:solidFill>
+                  <a:srgbClr val="1F4E79"/>
+                </a:solidFill>
+                <a:latin typeface="Calibri"/>
+              </a:rPr>
+              <a:t>AI Incident Copilot</a:t>
+            </a:r>
+          </a:p>
+        </p:txBody>
+      </p:sp>
+      <p:sp>
+        <p:nvSpPr>
+          <p:cNvPr id="38" name="TextBox 37"/>
+          <p:cNvSpPr txBox="1"/>
+          <p:nvPr/>
+        </p:nvSpPr>
+        <p:spPr>
+          <a:xfrm>
+            <a:off x="6400800" y="5212080"/>
+            <a:ext cx="5257800" cy="960120"/>
+          </a:xfrm>
+          <a:prstGeom prst="rect">
+            <a:avLst/>
+          </a:prstGeom>
+          <a:noFill/>
+        </p:spPr>
+        <p:txBody>
+          <a:bodyPr wrap="square" anchor="t"/>
+          <a:lstStyle/>
+          <a:p>
+            <a:pPr algn="l">
+              <a:spcBef>
+                <a:spcPts val="0"/>
+              </a:spcBef>
+              <a:spcAft>
+                <a:spcPts val="0"/>
+              </a:spcAft>
+            </a:pPr>
+            <a:r>
+              <a:rPr sz="1500" b="1">
+                <a:solidFill>
+                  <a:srgbClr val="1F4E79"/>
+                </a:solidFill>
+                <a:latin typeface="Calibri"/>
+              </a:rPr>
+              <a:t>“What happened, what is related, what pattern do we see, and what should the engineer investigate next?”</a:t>
+            </a:r>
+          </a:p>
+        </p:txBody>
+      </p:sp>
     </p:spTree>
   </p:cSld>
   <p:clrMapOvr>
@@ -3260,30 +8684,1555 @@
         <p:nvPr/>
       </p:nvGrpSpPr>
       <p:grpSpPr/>
-      <p:pic>
-        <p:nvPicPr>
-          <p:cNvPr id="2" name="Picture 1" descr="slide-05.png"/>
-          <p:cNvPicPr>
-            <a:picLocks noChangeAspect="1"/>
-          </p:cNvPicPr>
-          <p:nvPr/>
-        </p:nvPicPr>
-        <p:blipFill>
-          <a:blip r:embed="rId2"/>
-          <a:stretch>
-            <a:fillRect/>
-          </a:stretch>
-        </p:blipFill>
+      <p:sp>
+        <p:nvSpPr>
+          <p:cNvPr id="2" name="Rectangle 1"/>
+          <p:cNvSpPr/>
+          <p:nvPr/>
+        </p:nvSpPr>
         <p:spPr>
           <a:xfrm>
             <a:off x="0" y="0"/>
-            <a:ext cx="12191999" cy="6858000"/>
-          </a:xfrm>
-          <a:prstGeom prst="rect">
-            <a:avLst/>
-          </a:prstGeom>
-        </p:spPr>
-      </p:pic>
+            <a:ext cx="12191695" cy="384048"/>
+          </a:xfrm>
+          <a:prstGeom prst="rect">
+            <a:avLst/>
+          </a:prstGeom>
+          <a:solidFill>
+            <a:srgbClr val="1F4E79"/>
+          </a:solidFill>
+          <a:ln>
+            <a:noFill/>
+          </a:ln>
+          <a:effectLst/>
+        </p:spPr>
+        <p:style>
+          <a:lnRef idx="1">
+            <a:schemeClr val="accent1"/>
+          </a:lnRef>
+          <a:fillRef idx="3">
+            <a:schemeClr val="accent1"/>
+          </a:fillRef>
+          <a:effectRef idx="2">
+            <a:schemeClr val="accent1"/>
+          </a:effectRef>
+          <a:fontRef idx="minor">
+            <a:schemeClr val="lt1"/>
+          </a:fontRef>
+        </p:style>
+        <p:txBody>
+          <a:bodyPr rtlCol="0" anchor="ctr"/>
+          <a:lstStyle/>
+          <a:p>
+            <a:pPr algn="ctr"/>
+          </a:p>
+        </p:txBody>
+      </p:sp>
+      <p:sp>
+        <p:nvSpPr>
+          <p:cNvPr id="3" name="TextBox 2"/>
+          <p:cNvSpPr txBox="1"/>
+          <p:nvPr/>
+        </p:nvSpPr>
+        <p:spPr>
+          <a:xfrm>
+            <a:off x="320040" y="45720"/>
+            <a:ext cx="6766560" cy="292608"/>
+          </a:xfrm>
+          <a:prstGeom prst="rect">
+            <a:avLst/>
+          </a:prstGeom>
+          <a:noFill/>
+        </p:spPr>
+        <p:txBody>
+          <a:bodyPr wrap="square" anchor="ctr"/>
+          <a:lstStyle/>
+          <a:p>
+            <a:pPr algn="l">
+              <a:spcBef>
+                <a:spcPts val="0"/>
+              </a:spcBef>
+              <a:spcAft>
+                <a:spcPts val="0"/>
+              </a:spcAft>
+            </a:pPr>
+            <a:r>
+              <a:rPr sz="1200" b="0">
+                <a:solidFill>
+                  <a:srgbClr val="FFFFFF"/>
+                </a:solidFill>
+                <a:latin typeface="Calibri"/>
+              </a:rPr>
+              <a:t>Airport Technology  |  Internal Proposal</a:t>
+            </a:r>
+          </a:p>
+        </p:txBody>
+      </p:sp>
+      <p:sp>
+        <p:nvSpPr>
+          <p:cNvPr id="4" name="TextBox 3"/>
+          <p:cNvSpPr txBox="1"/>
+          <p:nvPr/>
+        </p:nvSpPr>
+        <p:spPr>
+          <a:xfrm>
+            <a:off x="8092440" y="45720"/>
+            <a:ext cx="3794760" cy="292608"/>
+          </a:xfrm>
+          <a:prstGeom prst="rect">
+            <a:avLst/>
+          </a:prstGeom>
+          <a:noFill/>
+        </p:spPr>
+        <p:txBody>
+          <a:bodyPr wrap="square" anchor="ctr"/>
+          <a:lstStyle/>
+          <a:p>
+            <a:pPr algn="r">
+              <a:spcBef>
+                <a:spcPts val="0"/>
+              </a:spcBef>
+              <a:spcAft>
+                <a:spcPts val="0"/>
+              </a:spcAft>
+            </a:pPr>
+            <a:r>
+              <a:rPr sz="1300" b="1">
+                <a:solidFill>
+                  <a:srgbClr val="FFFFFF"/>
+                </a:solidFill>
+                <a:latin typeface="Calibri"/>
+              </a:rPr>
+              <a:t>SOURCE INTEGRATE</a:t>
+            </a:r>
+          </a:p>
+        </p:txBody>
+      </p:sp>
+      <p:sp>
+        <p:nvSpPr>
+          <p:cNvPr id="5" name="TextBox 4"/>
+          <p:cNvSpPr txBox="1"/>
+          <p:nvPr/>
+        </p:nvSpPr>
+        <p:spPr>
+          <a:xfrm>
+            <a:off x="365760" y="502920"/>
+            <a:ext cx="11430000" cy="384048"/>
+          </a:xfrm>
+          <a:prstGeom prst="rect">
+            <a:avLst/>
+          </a:prstGeom>
+          <a:noFill/>
+        </p:spPr>
+        <p:txBody>
+          <a:bodyPr wrap="square" anchor="ctr"/>
+          <a:lstStyle/>
+          <a:p>
+            <a:pPr algn="l">
+              <a:spcBef>
+                <a:spcPts val="0"/>
+              </a:spcBef>
+              <a:spcAft>
+                <a:spcPts val="0"/>
+              </a:spcAft>
+            </a:pPr>
+            <a:r>
+              <a:rPr sz="2600" b="1">
+                <a:solidFill>
+                  <a:srgbClr val="1F4E79"/>
+                </a:solidFill>
+                <a:latin typeface="Calibri"/>
+              </a:rPr>
+              <a:t>Future Vision</a:t>
+            </a:r>
+          </a:p>
+        </p:txBody>
+      </p:sp>
+      <p:sp>
+        <p:nvSpPr>
+          <p:cNvPr id="6" name="Rectangle 5"/>
+          <p:cNvSpPr/>
+          <p:nvPr/>
+        </p:nvSpPr>
+        <p:spPr>
+          <a:xfrm>
+            <a:off x="365760" y="896112"/>
+            <a:ext cx="1920240" cy="41148"/>
+          </a:xfrm>
+          <a:prstGeom prst="rect">
+            <a:avLst/>
+          </a:prstGeom>
+          <a:solidFill>
+            <a:srgbClr val="2E75B6"/>
+          </a:solidFill>
+          <a:ln>
+            <a:noFill/>
+          </a:ln>
+          <a:effectLst/>
+        </p:spPr>
+        <p:style>
+          <a:lnRef idx="1">
+            <a:schemeClr val="accent1"/>
+          </a:lnRef>
+          <a:fillRef idx="3">
+            <a:schemeClr val="accent1"/>
+          </a:fillRef>
+          <a:effectRef idx="2">
+            <a:schemeClr val="accent1"/>
+          </a:effectRef>
+          <a:fontRef idx="minor">
+            <a:schemeClr val="lt1"/>
+          </a:fontRef>
+        </p:style>
+        <p:txBody>
+          <a:bodyPr rtlCol="0" anchor="ctr"/>
+          <a:lstStyle/>
+          <a:p>
+            <a:pPr algn="ctr"/>
+          </a:p>
+        </p:txBody>
+      </p:sp>
+      <p:sp>
+        <p:nvSpPr>
+          <p:cNvPr id="7" name="Rectangle 6"/>
+          <p:cNvSpPr/>
+          <p:nvPr/>
+        </p:nvSpPr>
+        <p:spPr>
+          <a:xfrm>
+            <a:off x="0" y="6601968"/>
+            <a:ext cx="12191695" cy="256032"/>
+          </a:xfrm>
+          <a:prstGeom prst="rect">
+            <a:avLst/>
+          </a:prstGeom>
+          <a:solidFill>
+            <a:srgbClr val="F2F2F2"/>
+          </a:solidFill>
+          <a:ln>
+            <a:noFill/>
+          </a:ln>
+          <a:effectLst/>
+        </p:spPr>
+        <p:style>
+          <a:lnRef idx="1">
+            <a:schemeClr val="accent1"/>
+          </a:lnRef>
+          <a:fillRef idx="3">
+            <a:schemeClr val="accent1"/>
+          </a:fillRef>
+          <a:effectRef idx="2">
+            <a:schemeClr val="accent1"/>
+          </a:effectRef>
+          <a:fontRef idx="minor">
+            <a:schemeClr val="lt1"/>
+          </a:fontRef>
+        </p:style>
+        <p:txBody>
+          <a:bodyPr rtlCol="0" anchor="ctr"/>
+          <a:lstStyle/>
+          <a:p>
+            <a:pPr algn="ctr"/>
+          </a:p>
+        </p:txBody>
+      </p:sp>
+      <p:sp>
+        <p:nvSpPr>
+          <p:cNvPr id="8" name="TextBox 7"/>
+          <p:cNvSpPr txBox="1"/>
+          <p:nvPr/>
+        </p:nvSpPr>
+        <p:spPr>
+          <a:xfrm>
+            <a:off x="365760" y="6601968"/>
+            <a:ext cx="7772400" cy="256032"/>
+          </a:xfrm>
+          <a:prstGeom prst="rect">
+            <a:avLst/>
+          </a:prstGeom>
+          <a:noFill/>
+        </p:spPr>
+        <p:txBody>
+          <a:bodyPr wrap="square" anchor="ctr"/>
+          <a:lstStyle/>
+          <a:p>
+            <a:pPr algn="l">
+              <a:spcBef>
+                <a:spcPts val="0"/>
+              </a:spcBef>
+              <a:spcAft>
+                <a:spcPts val="0"/>
+              </a:spcAft>
+            </a:pPr>
+            <a:r>
+              <a:rPr sz="1000" b="0">
+                <a:solidFill>
+                  <a:srgbClr val="595959"/>
+                </a:solidFill>
+                <a:latin typeface="Calibri"/>
+              </a:rPr>
+              <a:t>Confidential  |  Human-in-the-loop concept  |  Not an implemented system</a:t>
+            </a:r>
+          </a:p>
+        </p:txBody>
+      </p:sp>
+      <p:sp>
+        <p:nvSpPr>
+          <p:cNvPr id="9" name="TextBox 8"/>
+          <p:cNvSpPr txBox="1"/>
+          <p:nvPr/>
+        </p:nvSpPr>
+        <p:spPr>
+          <a:xfrm>
+            <a:off x="9509760" y="6601968"/>
+            <a:ext cx="2286000" cy="256032"/>
+          </a:xfrm>
+          <a:prstGeom prst="rect">
+            <a:avLst/>
+          </a:prstGeom>
+          <a:noFill/>
+        </p:spPr>
+        <p:txBody>
+          <a:bodyPr wrap="square" anchor="ctr"/>
+          <a:lstStyle/>
+          <a:p>
+            <a:pPr algn="r">
+              <a:spcBef>
+                <a:spcPts val="0"/>
+              </a:spcBef>
+              <a:spcAft>
+                <a:spcPts val="0"/>
+              </a:spcAft>
+            </a:pPr>
+            <a:r>
+              <a:rPr sz="1000" b="0">
+                <a:solidFill>
+                  <a:srgbClr val="595959"/>
+                </a:solidFill>
+                <a:latin typeface="Calibri"/>
+              </a:rPr>
+              <a:t>Slide 5 of 5</a:t>
+            </a:r>
+          </a:p>
+        </p:txBody>
+      </p:sp>
+      <p:sp>
+        <p:nvSpPr>
+          <p:cNvPr id="10" name="TextBox 9"/>
+          <p:cNvSpPr txBox="1"/>
+          <p:nvPr/>
+        </p:nvSpPr>
+        <p:spPr>
+          <a:xfrm>
+            <a:off x="365760" y="1024128"/>
+            <a:ext cx="11430000" cy="256032"/>
+          </a:xfrm>
+          <a:prstGeom prst="rect">
+            <a:avLst/>
+          </a:prstGeom>
+          <a:noFill/>
+        </p:spPr>
+        <p:txBody>
+          <a:bodyPr wrap="square" anchor="t"/>
+          <a:lstStyle/>
+          <a:p>
+            <a:pPr algn="l">
+              <a:spcBef>
+                <a:spcPts val="0"/>
+              </a:spcBef>
+              <a:spcAft>
+                <a:spcPts val="0"/>
+              </a:spcAft>
+            </a:pPr>
+            <a:r>
+              <a:rPr sz="1400" b="0">
+                <a:solidFill>
+                  <a:srgbClr val="595959"/>
+                </a:solidFill>
+                <a:latin typeface="Calibri"/>
+              </a:rPr>
+              <a:t>A staged path — engineer remains in control at every phase</a:t>
+            </a:r>
+          </a:p>
+        </p:txBody>
+      </p:sp>
+      <p:sp>
+        <p:nvSpPr>
+          <p:cNvPr id="11" name="Rectangle 10"/>
+          <p:cNvSpPr/>
+          <p:nvPr/>
+        </p:nvSpPr>
+        <p:spPr>
+          <a:xfrm>
+            <a:off x="365760" y="1371600"/>
+            <a:ext cx="2697480" cy="73152"/>
+          </a:xfrm>
+          <a:prstGeom prst="rect">
+            <a:avLst/>
+          </a:prstGeom>
+          <a:solidFill>
+            <a:srgbClr val="2E75B6"/>
+          </a:solidFill>
+          <a:ln>
+            <a:noFill/>
+          </a:ln>
+          <a:effectLst/>
+        </p:spPr>
+        <p:style>
+          <a:lnRef idx="1">
+            <a:schemeClr val="accent1"/>
+          </a:lnRef>
+          <a:fillRef idx="3">
+            <a:schemeClr val="accent1"/>
+          </a:fillRef>
+          <a:effectRef idx="2">
+            <a:schemeClr val="accent1"/>
+          </a:effectRef>
+          <a:fontRef idx="minor">
+            <a:schemeClr val="lt1"/>
+          </a:fontRef>
+        </p:style>
+        <p:txBody>
+          <a:bodyPr rtlCol="0" anchor="ctr"/>
+          <a:lstStyle/>
+          <a:p>
+            <a:pPr algn="ctr"/>
+          </a:p>
+        </p:txBody>
+      </p:sp>
+      <p:sp>
+        <p:nvSpPr>
+          <p:cNvPr id="12" name="Rectangle 11"/>
+          <p:cNvSpPr/>
+          <p:nvPr/>
+        </p:nvSpPr>
+        <p:spPr>
+          <a:xfrm>
+            <a:off x="365760" y="1444752"/>
+            <a:ext cx="2697480" cy="2331720"/>
+          </a:xfrm>
+          <a:prstGeom prst="rect">
+            <a:avLst/>
+          </a:prstGeom>
+          <a:solidFill>
+            <a:srgbClr val="FFFFFF"/>
+          </a:solidFill>
+          <a:ln w="12700">
+            <a:solidFill>
+              <a:srgbClr val="BFBFBF"/>
+            </a:solidFill>
+          </a:ln>
+          <a:effectLst/>
+        </p:spPr>
+        <p:style>
+          <a:lnRef idx="1">
+            <a:schemeClr val="accent1"/>
+          </a:lnRef>
+          <a:fillRef idx="3">
+            <a:schemeClr val="accent1"/>
+          </a:fillRef>
+          <a:effectRef idx="2">
+            <a:schemeClr val="accent1"/>
+          </a:effectRef>
+          <a:fontRef idx="minor">
+            <a:schemeClr val="lt1"/>
+          </a:fontRef>
+        </p:style>
+        <p:txBody>
+          <a:bodyPr rtlCol="0" anchor="ctr"/>
+          <a:lstStyle/>
+          <a:p>
+            <a:pPr algn="ctr"/>
+          </a:p>
+        </p:txBody>
+      </p:sp>
+      <p:sp>
+        <p:nvSpPr>
+          <p:cNvPr id="13" name="TextBox 12"/>
+          <p:cNvSpPr txBox="1"/>
+          <p:nvPr/>
+        </p:nvSpPr>
+        <p:spPr>
+          <a:xfrm>
+            <a:off x="475488" y="1554480"/>
+            <a:ext cx="2478024" cy="256032"/>
+          </a:xfrm>
+          <a:prstGeom prst="rect">
+            <a:avLst/>
+          </a:prstGeom>
+          <a:noFill/>
+        </p:spPr>
+        <p:txBody>
+          <a:bodyPr wrap="square" anchor="t"/>
+          <a:lstStyle/>
+          <a:p>
+            <a:pPr algn="l">
+              <a:spcBef>
+                <a:spcPts val="0"/>
+              </a:spcBef>
+              <a:spcAft>
+                <a:spcPts val="0"/>
+              </a:spcAft>
+            </a:pPr>
+            <a:r>
+              <a:rPr sz="1100" b="1">
+                <a:solidFill>
+                  <a:srgbClr val="2E75B6"/>
+                </a:solidFill>
+                <a:latin typeface="Calibri"/>
+              </a:rPr>
+              <a:t>PHASE 1</a:t>
+            </a:r>
+          </a:p>
+        </p:txBody>
+      </p:sp>
+      <p:sp>
+        <p:nvSpPr>
+          <p:cNvPr id="14" name="TextBox 13"/>
+          <p:cNvSpPr txBox="1"/>
+          <p:nvPr/>
+        </p:nvSpPr>
+        <p:spPr>
+          <a:xfrm>
+            <a:off x="475488" y="1828800"/>
+            <a:ext cx="2478024" cy="640080"/>
+          </a:xfrm>
+          <a:prstGeom prst="rect">
+            <a:avLst/>
+          </a:prstGeom>
+          <a:noFill/>
+        </p:spPr>
+        <p:txBody>
+          <a:bodyPr wrap="square" anchor="t"/>
+          <a:lstStyle/>
+          <a:p>
+            <a:pPr algn="l">
+              <a:spcBef>
+                <a:spcPts val="0"/>
+              </a:spcBef>
+              <a:spcAft>
+                <a:spcPts val="0"/>
+              </a:spcAft>
+            </a:pPr>
+            <a:r>
+              <a:rPr sz="1800" b="1">
+                <a:solidFill>
+                  <a:srgbClr val="1F4E79"/>
+                </a:solidFill>
+                <a:latin typeface="Calibri"/>
+              </a:rPr>
+              <a:t>Assist</a:t>
+            </a:r>
+          </a:p>
+        </p:txBody>
+      </p:sp>
+      <p:sp>
+        <p:nvSpPr>
+          <p:cNvPr id="15" name="TextBox 14"/>
+          <p:cNvSpPr txBox="1"/>
+          <p:nvPr/>
+        </p:nvSpPr>
+        <p:spPr>
+          <a:xfrm>
+            <a:off x="475488" y="2468880"/>
+            <a:ext cx="2478024" cy="1097280"/>
+          </a:xfrm>
+          <a:prstGeom prst="rect">
+            <a:avLst/>
+          </a:prstGeom>
+          <a:noFill/>
+        </p:spPr>
+        <p:txBody>
+          <a:bodyPr wrap="square" anchor="t"/>
+          <a:lstStyle/>
+          <a:p>
+            <a:pPr algn="l">
+              <a:spcBef>
+                <a:spcPts val="0"/>
+              </a:spcBef>
+              <a:spcAft>
+                <a:spcPts val="0"/>
+              </a:spcAft>
+            </a:pPr>
+            <a:r>
+              <a:rPr sz="1300" b="0">
+                <a:solidFill>
+                  <a:srgbClr val="2F2F2F"/>
+                </a:solidFill>
+                <a:latin typeface="Calibri"/>
+              </a:rPr>
+              <a:t>AI analyzes incidents and recommends next steps.</a:t>
+            </a:r>
+          </a:p>
+        </p:txBody>
+      </p:sp>
+      <p:sp>
+        <p:nvSpPr>
+          <p:cNvPr id="16" name="Right Arrow 15"/>
+          <p:cNvSpPr/>
+          <p:nvPr/>
+        </p:nvSpPr>
+        <p:spPr>
+          <a:xfrm>
+            <a:off x="3099816" y="2468880"/>
+            <a:ext cx="201168" cy="164592"/>
+          </a:xfrm>
+          <a:prstGeom prst="rightArrow">
+            <a:avLst/>
+          </a:prstGeom>
+          <a:solidFill>
+            <a:srgbClr val="2E75B6"/>
+          </a:solidFill>
+          <a:ln>
+            <a:noFill/>
+          </a:ln>
+          <a:effectLst/>
+        </p:spPr>
+        <p:style>
+          <a:lnRef idx="1">
+            <a:schemeClr val="accent1"/>
+          </a:lnRef>
+          <a:fillRef idx="3">
+            <a:schemeClr val="accent1"/>
+          </a:fillRef>
+          <a:effectRef idx="2">
+            <a:schemeClr val="accent1"/>
+          </a:effectRef>
+          <a:fontRef idx="minor">
+            <a:schemeClr val="lt1"/>
+          </a:fontRef>
+        </p:style>
+        <p:txBody>
+          <a:bodyPr rtlCol="0" anchor="ctr"/>
+          <a:lstStyle/>
+          <a:p>
+            <a:pPr algn="ctr"/>
+          </a:p>
+        </p:txBody>
+      </p:sp>
+      <p:sp>
+        <p:nvSpPr>
+          <p:cNvPr id="17" name="Rectangle 16"/>
+          <p:cNvSpPr/>
+          <p:nvPr/>
+        </p:nvSpPr>
+        <p:spPr>
+          <a:xfrm>
+            <a:off x="3291840" y="1371600"/>
+            <a:ext cx="2697480" cy="73152"/>
+          </a:xfrm>
+          <a:prstGeom prst="rect">
+            <a:avLst/>
+          </a:prstGeom>
+          <a:solidFill>
+            <a:srgbClr val="2E75B6"/>
+          </a:solidFill>
+          <a:ln>
+            <a:noFill/>
+          </a:ln>
+          <a:effectLst/>
+        </p:spPr>
+        <p:style>
+          <a:lnRef idx="1">
+            <a:schemeClr val="accent1"/>
+          </a:lnRef>
+          <a:fillRef idx="3">
+            <a:schemeClr val="accent1"/>
+          </a:fillRef>
+          <a:effectRef idx="2">
+            <a:schemeClr val="accent1"/>
+          </a:effectRef>
+          <a:fontRef idx="minor">
+            <a:schemeClr val="lt1"/>
+          </a:fontRef>
+        </p:style>
+        <p:txBody>
+          <a:bodyPr rtlCol="0" anchor="ctr"/>
+          <a:lstStyle/>
+          <a:p>
+            <a:pPr algn="ctr"/>
+          </a:p>
+        </p:txBody>
+      </p:sp>
+      <p:sp>
+        <p:nvSpPr>
+          <p:cNvPr id="18" name="Rectangle 17"/>
+          <p:cNvSpPr/>
+          <p:nvPr/>
+        </p:nvSpPr>
+        <p:spPr>
+          <a:xfrm>
+            <a:off x="3291840" y="1444752"/>
+            <a:ext cx="2697480" cy="2331720"/>
+          </a:xfrm>
+          <a:prstGeom prst="rect">
+            <a:avLst/>
+          </a:prstGeom>
+          <a:solidFill>
+            <a:srgbClr val="FFFFFF"/>
+          </a:solidFill>
+          <a:ln w="12700">
+            <a:solidFill>
+              <a:srgbClr val="BFBFBF"/>
+            </a:solidFill>
+          </a:ln>
+          <a:effectLst/>
+        </p:spPr>
+        <p:style>
+          <a:lnRef idx="1">
+            <a:schemeClr val="accent1"/>
+          </a:lnRef>
+          <a:fillRef idx="3">
+            <a:schemeClr val="accent1"/>
+          </a:fillRef>
+          <a:effectRef idx="2">
+            <a:schemeClr val="accent1"/>
+          </a:effectRef>
+          <a:fontRef idx="minor">
+            <a:schemeClr val="lt1"/>
+          </a:fontRef>
+        </p:style>
+        <p:txBody>
+          <a:bodyPr rtlCol="0" anchor="ctr"/>
+          <a:lstStyle/>
+          <a:p>
+            <a:pPr algn="ctr"/>
+          </a:p>
+        </p:txBody>
+      </p:sp>
+      <p:sp>
+        <p:nvSpPr>
+          <p:cNvPr id="19" name="TextBox 18"/>
+          <p:cNvSpPr txBox="1"/>
+          <p:nvPr/>
+        </p:nvSpPr>
+        <p:spPr>
+          <a:xfrm>
+            <a:off x="3401568" y="1554480"/>
+            <a:ext cx="2478024" cy="256032"/>
+          </a:xfrm>
+          <a:prstGeom prst="rect">
+            <a:avLst/>
+          </a:prstGeom>
+          <a:noFill/>
+        </p:spPr>
+        <p:txBody>
+          <a:bodyPr wrap="square" anchor="t"/>
+          <a:lstStyle/>
+          <a:p>
+            <a:pPr algn="l">
+              <a:spcBef>
+                <a:spcPts val="0"/>
+              </a:spcBef>
+              <a:spcAft>
+                <a:spcPts val="0"/>
+              </a:spcAft>
+            </a:pPr>
+            <a:r>
+              <a:rPr sz="1100" b="1">
+                <a:solidFill>
+                  <a:srgbClr val="2E75B6"/>
+                </a:solidFill>
+                <a:latin typeface="Calibri"/>
+              </a:rPr>
+              <a:t>PHASE 2</a:t>
+            </a:r>
+          </a:p>
+        </p:txBody>
+      </p:sp>
+      <p:sp>
+        <p:nvSpPr>
+          <p:cNvPr id="20" name="TextBox 19"/>
+          <p:cNvSpPr txBox="1"/>
+          <p:nvPr/>
+        </p:nvSpPr>
+        <p:spPr>
+          <a:xfrm>
+            <a:off x="3401568" y="1828800"/>
+            <a:ext cx="2478024" cy="640080"/>
+          </a:xfrm>
+          <a:prstGeom prst="rect">
+            <a:avLst/>
+          </a:prstGeom>
+          <a:noFill/>
+        </p:spPr>
+        <p:txBody>
+          <a:bodyPr wrap="square" anchor="t"/>
+          <a:lstStyle/>
+          <a:p>
+            <a:pPr algn="l">
+              <a:spcBef>
+                <a:spcPts val="0"/>
+              </a:spcBef>
+              <a:spcAft>
+                <a:spcPts val="0"/>
+              </a:spcAft>
+            </a:pPr>
+            <a:r>
+              <a:rPr sz="1800" b="1">
+                <a:solidFill>
+                  <a:srgbClr val="1F4E79"/>
+                </a:solidFill>
+                <a:latin typeface="Calibri"/>
+              </a:rPr>
+              <a:t>Learn</a:t>
+            </a:r>
+          </a:p>
+        </p:txBody>
+      </p:sp>
+      <p:sp>
+        <p:nvSpPr>
+          <p:cNvPr id="21" name="TextBox 20"/>
+          <p:cNvSpPr txBox="1"/>
+          <p:nvPr/>
+        </p:nvSpPr>
+        <p:spPr>
+          <a:xfrm>
+            <a:off x="3401568" y="2468880"/>
+            <a:ext cx="2478024" cy="1097280"/>
+          </a:xfrm>
+          <a:prstGeom prst="rect">
+            <a:avLst/>
+          </a:prstGeom>
+          <a:noFill/>
+        </p:spPr>
+        <p:txBody>
+          <a:bodyPr wrap="square" anchor="t"/>
+          <a:lstStyle/>
+          <a:p>
+            <a:pPr algn="l">
+              <a:spcBef>
+                <a:spcPts val="0"/>
+              </a:spcBef>
+              <a:spcAft>
+                <a:spcPts val="0"/>
+              </a:spcAft>
+            </a:pPr>
+            <a:r>
+              <a:rPr sz="1300" b="0">
+                <a:solidFill>
+                  <a:srgbClr val="2F2F2F"/>
+                </a:solidFill>
+                <a:latin typeface="Calibri"/>
+              </a:rPr>
+              <a:t>Use engineer feedback and resolved incidents to improve recommendations.</a:t>
+            </a:r>
+          </a:p>
+        </p:txBody>
+      </p:sp>
+      <p:sp>
+        <p:nvSpPr>
+          <p:cNvPr id="22" name="Right Arrow 21"/>
+          <p:cNvSpPr/>
+          <p:nvPr/>
+        </p:nvSpPr>
+        <p:spPr>
+          <a:xfrm>
+            <a:off x="6025896" y="2468880"/>
+            <a:ext cx="201168" cy="164592"/>
+          </a:xfrm>
+          <a:prstGeom prst="rightArrow">
+            <a:avLst/>
+          </a:prstGeom>
+          <a:solidFill>
+            <a:srgbClr val="2E75B6"/>
+          </a:solidFill>
+          <a:ln>
+            <a:noFill/>
+          </a:ln>
+          <a:effectLst/>
+        </p:spPr>
+        <p:style>
+          <a:lnRef idx="1">
+            <a:schemeClr val="accent1"/>
+          </a:lnRef>
+          <a:fillRef idx="3">
+            <a:schemeClr val="accent1"/>
+          </a:fillRef>
+          <a:effectRef idx="2">
+            <a:schemeClr val="accent1"/>
+          </a:effectRef>
+          <a:fontRef idx="minor">
+            <a:schemeClr val="lt1"/>
+          </a:fontRef>
+        </p:style>
+        <p:txBody>
+          <a:bodyPr rtlCol="0" anchor="ctr"/>
+          <a:lstStyle/>
+          <a:p>
+            <a:pPr algn="ctr"/>
+          </a:p>
+        </p:txBody>
+      </p:sp>
+      <p:sp>
+        <p:nvSpPr>
+          <p:cNvPr id="23" name="Rectangle 22"/>
+          <p:cNvSpPr/>
+          <p:nvPr/>
+        </p:nvSpPr>
+        <p:spPr>
+          <a:xfrm>
+            <a:off x="6217920" y="1371600"/>
+            <a:ext cx="2697480" cy="73152"/>
+          </a:xfrm>
+          <a:prstGeom prst="rect">
+            <a:avLst/>
+          </a:prstGeom>
+          <a:solidFill>
+            <a:srgbClr val="2E75B6"/>
+          </a:solidFill>
+          <a:ln>
+            <a:noFill/>
+          </a:ln>
+          <a:effectLst/>
+        </p:spPr>
+        <p:style>
+          <a:lnRef idx="1">
+            <a:schemeClr val="accent1"/>
+          </a:lnRef>
+          <a:fillRef idx="3">
+            <a:schemeClr val="accent1"/>
+          </a:fillRef>
+          <a:effectRef idx="2">
+            <a:schemeClr val="accent1"/>
+          </a:effectRef>
+          <a:fontRef idx="minor">
+            <a:schemeClr val="lt1"/>
+          </a:fontRef>
+        </p:style>
+        <p:txBody>
+          <a:bodyPr rtlCol="0" anchor="ctr"/>
+          <a:lstStyle/>
+          <a:p>
+            <a:pPr algn="ctr"/>
+          </a:p>
+        </p:txBody>
+      </p:sp>
+      <p:sp>
+        <p:nvSpPr>
+          <p:cNvPr id="24" name="Rectangle 23"/>
+          <p:cNvSpPr/>
+          <p:nvPr/>
+        </p:nvSpPr>
+        <p:spPr>
+          <a:xfrm>
+            <a:off x="6217920" y="1444752"/>
+            <a:ext cx="2697480" cy="2331720"/>
+          </a:xfrm>
+          <a:prstGeom prst="rect">
+            <a:avLst/>
+          </a:prstGeom>
+          <a:solidFill>
+            <a:srgbClr val="FFFFFF"/>
+          </a:solidFill>
+          <a:ln w="12700">
+            <a:solidFill>
+              <a:srgbClr val="BFBFBF"/>
+            </a:solidFill>
+          </a:ln>
+          <a:effectLst/>
+        </p:spPr>
+        <p:style>
+          <a:lnRef idx="1">
+            <a:schemeClr val="accent1"/>
+          </a:lnRef>
+          <a:fillRef idx="3">
+            <a:schemeClr val="accent1"/>
+          </a:fillRef>
+          <a:effectRef idx="2">
+            <a:schemeClr val="accent1"/>
+          </a:effectRef>
+          <a:fontRef idx="minor">
+            <a:schemeClr val="lt1"/>
+          </a:fontRef>
+        </p:style>
+        <p:txBody>
+          <a:bodyPr rtlCol="0" anchor="ctr"/>
+          <a:lstStyle/>
+          <a:p>
+            <a:pPr algn="ctr"/>
+          </a:p>
+        </p:txBody>
+      </p:sp>
+      <p:sp>
+        <p:nvSpPr>
+          <p:cNvPr id="25" name="TextBox 24"/>
+          <p:cNvSpPr txBox="1"/>
+          <p:nvPr/>
+        </p:nvSpPr>
+        <p:spPr>
+          <a:xfrm>
+            <a:off x="6327648" y="1554480"/>
+            <a:ext cx="2478024" cy="256032"/>
+          </a:xfrm>
+          <a:prstGeom prst="rect">
+            <a:avLst/>
+          </a:prstGeom>
+          <a:noFill/>
+        </p:spPr>
+        <p:txBody>
+          <a:bodyPr wrap="square" anchor="t"/>
+          <a:lstStyle/>
+          <a:p>
+            <a:pPr algn="l">
+              <a:spcBef>
+                <a:spcPts val="0"/>
+              </a:spcBef>
+              <a:spcAft>
+                <a:spcPts val="0"/>
+              </a:spcAft>
+            </a:pPr>
+            <a:r>
+              <a:rPr sz="1100" b="1">
+                <a:solidFill>
+                  <a:srgbClr val="2E75B6"/>
+                </a:solidFill>
+                <a:latin typeface="Calibri"/>
+              </a:rPr>
+              <a:t>PHASE 3</a:t>
+            </a:r>
+          </a:p>
+        </p:txBody>
+      </p:sp>
+      <p:sp>
+        <p:nvSpPr>
+          <p:cNvPr id="26" name="TextBox 25"/>
+          <p:cNvSpPr txBox="1"/>
+          <p:nvPr/>
+        </p:nvSpPr>
+        <p:spPr>
+          <a:xfrm>
+            <a:off x="6327648" y="1828800"/>
+            <a:ext cx="2478024" cy="640080"/>
+          </a:xfrm>
+          <a:prstGeom prst="rect">
+            <a:avLst/>
+          </a:prstGeom>
+          <a:noFill/>
+        </p:spPr>
+        <p:txBody>
+          <a:bodyPr wrap="square" anchor="t"/>
+          <a:lstStyle/>
+          <a:p>
+            <a:pPr algn="l">
+              <a:spcBef>
+                <a:spcPts val="0"/>
+              </a:spcBef>
+              <a:spcAft>
+                <a:spcPts val="0"/>
+              </a:spcAft>
+            </a:pPr>
+            <a:r>
+              <a:rPr sz="1800" b="1">
+                <a:solidFill>
+                  <a:srgbClr val="1F4E79"/>
+                </a:solidFill>
+                <a:latin typeface="Calibri"/>
+              </a:rPr>
+              <a:t>Predict</a:t>
+            </a:r>
+          </a:p>
+        </p:txBody>
+      </p:sp>
+      <p:sp>
+        <p:nvSpPr>
+          <p:cNvPr id="27" name="TextBox 26"/>
+          <p:cNvSpPr txBox="1"/>
+          <p:nvPr/>
+        </p:nvSpPr>
+        <p:spPr>
+          <a:xfrm>
+            <a:off x="6327648" y="2468880"/>
+            <a:ext cx="2478024" cy="1097280"/>
+          </a:xfrm>
+          <a:prstGeom prst="rect">
+            <a:avLst/>
+          </a:prstGeom>
+          <a:noFill/>
+        </p:spPr>
+        <p:txBody>
+          <a:bodyPr wrap="square" anchor="t"/>
+          <a:lstStyle/>
+          <a:p>
+            <a:pPr algn="l">
+              <a:spcBef>
+                <a:spcPts val="0"/>
+              </a:spcBef>
+              <a:spcAft>
+                <a:spcPts val="0"/>
+              </a:spcAft>
+            </a:pPr>
+            <a:r>
+              <a:rPr sz="1300" b="0">
+                <a:solidFill>
+                  <a:srgbClr val="2F2F2F"/>
+                </a:solidFill>
+                <a:latin typeface="Calibri"/>
+              </a:rPr>
+              <a:t>Identify recurring patterns and possible risks earlier.</a:t>
+            </a:r>
+          </a:p>
+        </p:txBody>
+      </p:sp>
+      <p:sp>
+        <p:nvSpPr>
+          <p:cNvPr id="28" name="Right Arrow 27"/>
+          <p:cNvSpPr/>
+          <p:nvPr/>
+        </p:nvSpPr>
+        <p:spPr>
+          <a:xfrm>
+            <a:off x="8951976" y="2468880"/>
+            <a:ext cx="201168" cy="164592"/>
+          </a:xfrm>
+          <a:prstGeom prst="rightArrow">
+            <a:avLst/>
+          </a:prstGeom>
+          <a:solidFill>
+            <a:srgbClr val="2E75B6"/>
+          </a:solidFill>
+          <a:ln>
+            <a:noFill/>
+          </a:ln>
+          <a:effectLst/>
+        </p:spPr>
+        <p:style>
+          <a:lnRef idx="1">
+            <a:schemeClr val="accent1"/>
+          </a:lnRef>
+          <a:fillRef idx="3">
+            <a:schemeClr val="accent1"/>
+          </a:fillRef>
+          <a:effectRef idx="2">
+            <a:schemeClr val="accent1"/>
+          </a:effectRef>
+          <a:fontRef idx="minor">
+            <a:schemeClr val="lt1"/>
+          </a:fontRef>
+        </p:style>
+        <p:txBody>
+          <a:bodyPr rtlCol="0" anchor="ctr"/>
+          <a:lstStyle/>
+          <a:p>
+            <a:pPr algn="ctr"/>
+          </a:p>
+        </p:txBody>
+      </p:sp>
+      <p:sp>
+        <p:nvSpPr>
+          <p:cNvPr id="29" name="Rectangle 28"/>
+          <p:cNvSpPr/>
+          <p:nvPr/>
+        </p:nvSpPr>
+        <p:spPr>
+          <a:xfrm>
+            <a:off x="9144000" y="1371600"/>
+            <a:ext cx="2697480" cy="73152"/>
+          </a:xfrm>
+          <a:prstGeom prst="rect">
+            <a:avLst/>
+          </a:prstGeom>
+          <a:solidFill>
+            <a:srgbClr val="1F4E79"/>
+          </a:solidFill>
+          <a:ln>
+            <a:noFill/>
+          </a:ln>
+          <a:effectLst/>
+        </p:spPr>
+        <p:style>
+          <a:lnRef idx="1">
+            <a:schemeClr val="accent1"/>
+          </a:lnRef>
+          <a:fillRef idx="3">
+            <a:schemeClr val="accent1"/>
+          </a:fillRef>
+          <a:effectRef idx="2">
+            <a:schemeClr val="accent1"/>
+          </a:effectRef>
+          <a:fontRef idx="minor">
+            <a:schemeClr val="lt1"/>
+          </a:fontRef>
+        </p:style>
+        <p:txBody>
+          <a:bodyPr rtlCol="0" anchor="ctr"/>
+          <a:lstStyle/>
+          <a:p>
+            <a:pPr algn="ctr"/>
+          </a:p>
+        </p:txBody>
+      </p:sp>
+      <p:sp>
+        <p:nvSpPr>
+          <p:cNvPr id="30" name="Rectangle 29"/>
+          <p:cNvSpPr/>
+          <p:nvPr/>
+        </p:nvSpPr>
+        <p:spPr>
+          <a:xfrm>
+            <a:off x="9144000" y="1444752"/>
+            <a:ext cx="2697480" cy="2331720"/>
+          </a:xfrm>
+          <a:prstGeom prst="rect">
+            <a:avLst/>
+          </a:prstGeom>
+          <a:solidFill>
+            <a:srgbClr val="FFFFFF"/>
+          </a:solidFill>
+          <a:ln w="12700">
+            <a:solidFill>
+              <a:srgbClr val="BFBFBF"/>
+            </a:solidFill>
+          </a:ln>
+          <a:effectLst/>
+        </p:spPr>
+        <p:style>
+          <a:lnRef idx="1">
+            <a:schemeClr val="accent1"/>
+          </a:lnRef>
+          <a:fillRef idx="3">
+            <a:schemeClr val="accent1"/>
+          </a:fillRef>
+          <a:effectRef idx="2">
+            <a:schemeClr val="accent1"/>
+          </a:effectRef>
+          <a:fontRef idx="minor">
+            <a:schemeClr val="lt1"/>
+          </a:fontRef>
+        </p:style>
+        <p:txBody>
+          <a:bodyPr rtlCol="0" anchor="ctr"/>
+          <a:lstStyle/>
+          <a:p>
+            <a:pPr algn="ctr"/>
+          </a:p>
+        </p:txBody>
+      </p:sp>
+      <p:sp>
+        <p:nvSpPr>
+          <p:cNvPr id="31" name="TextBox 30"/>
+          <p:cNvSpPr txBox="1"/>
+          <p:nvPr/>
+        </p:nvSpPr>
+        <p:spPr>
+          <a:xfrm>
+            <a:off x="9253728" y="1554480"/>
+            <a:ext cx="2478024" cy="256032"/>
+          </a:xfrm>
+          <a:prstGeom prst="rect">
+            <a:avLst/>
+          </a:prstGeom>
+          <a:noFill/>
+        </p:spPr>
+        <p:txBody>
+          <a:bodyPr wrap="square" anchor="t"/>
+          <a:lstStyle/>
+          <a:p>
+            <a:pPr algn="l">
+              <a:spcBef>
+                <a:spcPts val="0"/>
+              </a:spcBef>
+              <a:spcAft>
+                <a:spcPts val="0"/>
+              </a:spcAft>
+            </a:pPr>
+            <a:r>
+              <a:rPr sz="1100" b="1">
+                <a:solidFill>
+                  <a:srgbClr val="2E75B6"/>
+                </a:solidFill>
+                <a:latin typeface="Calibri"/>
+              </a:rPr>
+              <a:t>PHASE 4</a:t>
+            </a:r>
+          </a:p>
+        </p:txBody>
+      </p:sp>
+      <p:sp>
+        <p:nvSpPr>
+          <p:cNvPr id="32" name="TextBox 31"/>
+          <p:cNvSpPr txBox="1"/>
+          <p:nvPr/>
+        </p:nvSpPr>
+        <p:spPr>
+          <a:xfrm>
+            <a:off x="9253728" y="1828800"/>
+            <a:ext cx="2478024" cy="640080"/>
+          </a:xfrm>
+          <a:prstGeom prst="rect">
+            <a:avLst/>
+          </a:prstGeom>
+          <a:noFill/>
+        </p:spPr>
+        <p:txBody>
+          <a:bodyPr wrap="square" anchor="t"/>
+          <a:lstStyle/>
+          <a:p>
+            <a:pPr algn="l">
+              <a:spcBef>
+                <a:spcPts val="0"/>
+              </a:spcBef>
+              <a:spcAft>
+                <a:spcPts val="0"/>
+              </a:spcAft>
+            </a:pPr>
+            <a:r>
+              <a:rPr sz="1800" b="1">
+                <a:solidFill>
+                  <a:srgbClr val="1F4E79"/>
+                </a:solidFill>
+                <a:latin typeface="Calibri"/>
+              </a:rPr>
+              <a:t>Controlled automation</a:t>
+            </a:r>
+          </a:p>
+        </p:txBody>
+      </p:sp>
+      <p:sp>
+        <p:nvSpPr>
+          <p:cNvPr id="33" name="TextBox 32"/>
+          <p:cNvSpPr txBox="1"/>
+          <p:nvPr/>
+        </p:nvSpPr>
+        <p:spPr>
+          <a:xfrm>
+            <a:off x="9253728" y="2468880"/>
+            <a:ext cx="2478024" cy="1097280"/>
+          </a:xfrm>
+          <a:prstGeom prst="rect">
+            <a:avLst/>
+          </a:prstGeom>
+          <a:noFill/>
+        </p:spPr>
+        <p:txBody>
+          <a:bodyPr wrap="square" anchor="t"/>
+          <a:lstStyle/>
+          <a:p>
+            <a:pPr algn="l">
+              <a:spcBef>
+                <a:spcPts val="0"/>
+              </a:spcBef>
+              <a:spcAft>
+                <a:spcPts val="0"/>
+              </a:spcAft>
+            </a:pPr>
+            <a:r>
+              <a:rPr sz="1300" b="0">
+                <a:solidFill>
+                  <a:srgbClr val="2F2F2F"/>
+                </a:solidFill>
+                <a:latin typeface="Calibri"/>
+              </a:rPr>
+              <a:t>Potential automation only for approved, low-risk actions, with proper validation.</a:t>
+            </a:r>
+          </a:p>
+        </p:txBody>
+      </p:sp>
+      <p:sp>
+        <p:nvSpPr>
+          <p:cNvPr id="34" name="Rectangle 33"/>
+          <p:cNvSpPr/>
+          <p:nvPr/>
+        </p:nvSpPr>
+        <p:spPr>
+          <a:xfrm>
+            <a:off x="365760" y="3977639"/>
+            <a:ext cx="11430000" cy="868680"/>
+          </a:xfrm>
+          <a:prstGeom prst="rect">
+            <a:avLst/>
+          </a:prstGeom>
+          <a:solidFill>
+            <a:srgbClr val="DEEBF7"/>
+          </a:solidFill>
+          <a:ln w="12700">
+            <a:solidFill>
+              <a:srgbClr val="2E75B6"/>
+            </a:solidFill>
+          </a:ln>
+          <a:effectLst/>
+        </p:spPr>
+        <p:style>
+          <a:lnRef idx="1">
+            <a:schemeClr val="accent1"/>
+          </a:lnRef>
+          <a:fillRef idx="3">
+            <a:schemeClr val="accent1"/>
+          </a:fillRef>
+          <a:effectRef idx="2">
+            <a:schemeClr val="accent1"/>
+          </a:effectRef>
+          <a:fontRef idx="minor">
+            <a:schemeClr val="lt1"/>
+          </a:fontRef>
+        </p:style>
+        <p:txBody>
+          <a:bodyPr rtlCol="0" anchor="ctr" wrap="square" lIns="228600" rIns="73152" tIns="36576" bIns="36576"/>
+          <a:lstStyle/>
+          <a:p>
+            <a:pPr algn="l">
+              <a:spcBef>
+                <a:spcPts val="0"/>
+              </a:spcBef>
+              <a:spcAft>
+                <a:spcPts val="200"/>
+              </a:spcAft>
+            </a:pPr>
+            <a:r>
+              <a:rPr sz="1200" b="1">
+                <a:solidFill>
+                  <a:srgbClr val="2E75B6"/>
+                </a:solidFill>
+                <a:latin typeface="Calibri"/>
+              </a:rPr>
+              <a:t>Key benefit</a:t>
+            </a:r>
+          </a:p>
+          <a:p>
+            <a:pPr algn="l">
+              <a:spcBef>
+                <a:spcPts val="0"/>
+              </a:spcBef>
+              <a:spcAft>
+                <a:spcPts val="0"/>
+              </a:spcAft>
+            </a:pPr>
+            <a:r>
+              <a:rPr sz="1800" b="1">
+                <a:solidFill>
+                  <a:srgbClr val="1F4E79"/>
+                </a:solidFill>
+                <a:latin typeface="Calibri"/>
+              </a:rPr>
+              <a:t>Reduce incident investigation time while keeping the engineer in control.</a:t>
+            </a:r>
+          </a:p>
+        </p:txBody>
+      </p:sp>
+      <p:sp>
+        <p:nvSpPr>
+          <p:cNvPr id="35" name="Rectangle 34"/>
+          <p:cNvSpPr/>
+          <p:nvPr/>
+        </p:nvSpPr>
+        <p:spPr>
+          <a:xfrm>
+            <a:off x="4709160" y="5029200"/>
+            <a:ext cx="2743200" cy="36576"/>
+          </a:xfrm>
+          <a:prstGeom prst="rect">
+            <a:avLst/>
+          </a:prstGeom>
+          <a:solidFill>
+            <a:srgbClr val="BFBFBF"/>
+          </a:solidFill>
+          <a:ln>
+            <a:noFill/>
+          </a:ln>
+          <a:effectLst/>
+        </p:spPr>
+        <p:style>
+          <a:lnRef idx="1">
+            <a:schemeClr val="accent1"/>
+          </a:lnRef>
+          <a:fillRef idx="3">
+            <a:schemeClr val="accent1"/>
+          </a:fillRef>
+          <a:effectRef idx="2">
+            <a:schemeClr val="accent1"/>
+          </a:effectRef>
+          <a:fontRef idx="minor">
+            <a:schemeClr val="lt1"/>
+          </a:fontRef>
+        </p:style>
+        <p:txBody>
+          <a:bodyPr rtlCol="0" anchor="ctr"/>
+          <a:lstStyle/>
+          <a:p>
+            <a:pPr algn="ctr"/>
+          </a:p>
+        </p:txBody>
+      </p:sp>
+      <p:sp>
+        <p:nvSpPr>
+          <p:cNvPr id="36" name="TextBox 35"/>
+          <p:cNvSpPr txBox="1"/>
+          <p:nvPr/>
+        </p:nvSpPr>
+        <p:spPr>
+          <a:xfrm>
+            <a:off x="365760" y="5166360"/>
+            <a:ext cx="11430000" cy="502920"/>
+          </a:xfrm>
+          <a:prstGeom prst="rect">
+            <a:avLst/>
+          </a:prstGeom>
+          <a:noFill/>
+        </p:spPr>
+        <p:txBody>
+          <a:bodyPr wrap="square" anchor="ctr"/>
+          <a:lstStyle/>
+          <a:p>
+            <a:pPr algn="ctr">
+              <a:spcBef>
+                <a:spcPts val="0"/>
+              </a:spcBef>
+              <a:spcAft>
+                <a:spcPts val="0"/>
+              </a:spcAft>
+            </a:pPr>
+            <a:r>
+              <a:rPr sz="3200" b="1">
+                <a:solidFill>
+                  <a:srgbClr val="1F4E79"/>
+                </a:solidFill>
+                <a:latin typeface="Calibri"/>
+              </a:rPr>
+              <a:t>Thank You</a:t>
+            </a:r>
+          </a:p>
+        </p:txBody>
+      </p:sp>
+      <p:sp>
+        <p:nvSpPr>
+          <p:cNvPr id="37" name="TextBox 36"/>
+          <p:cNvSpPr txBox="1"/>
+          <p:nvPr/>
+        </p:nvSpPr>
+        <p:spPr>
+          <a:xfrm>
+            <a:off x="365760" y="5669280"/>
+            <a:ext cx="11430000" cy="320040"/>
+          </a:xfrm>
+          <a:prstGeom prst="rect">
+            <a:avLst/>
+          </a:prstGeom>
+          <a:noFill/>
+        </p:spPr>
+        <p:txBody>
+          <a:bodyPr wrap="square" anchor="t"/>
+          <a:lstStyle/>
+          <a:p>
+            <a:pPr algn="ctr">
+              <a:spcBef>
+                <a:spcPts val="0"/>
+              </a:spcBef>
+              <a:spcAft>
+                <a:spcPts val="0"/>
+              </a:spcAft>
+            </a:pPr>
+            <a:r>
+              <a:rPr sz="1400" b="0">
+                <a:solidFill>
+                  <a:srgbClr val="595959"/>
+                </a:solidFill>
+                <a:latin typeface="Calibri"/>
+              </a:rPr>
+              <a:t>Questions and discussion welcome</a:t>
+            </a:r>
+          </a:p>
+        </p:txBody>
+      </p:sp>
     </p:spTree>
   </p:cSld>
   <p:clrMapOvr>
